--- a/25MCS1018 ARYAN SHARMA CEREBRO-X REVIEW 2 PPT.pptx
+++ b/25MCS1018 ARYAN SHARMA CEREBRO-X REVIEW 2 PPT.pptx
@@ -5,7 +5,7 @@
     <p:sldMasterId id="2147483648" r:id="rId1"/>
   </p:sldMasterIdLst>
   <p:notesMasterIdLst>
-    <p:notesMasterId r:id="rId19"/>
+    <p:notesMasterId r:id="rId24"/>
   </p:notesMasterIdLst>
   <p:sldIdLst>
     <p:sldId id="256" r:id="rId2"/>
@@ -20,11 +20,16 @@
     <p:sldId id="264" r:id="rId11"/>
     <p:sldId id="277" r:id="rId12"/>
     <p:sldId id="275" r:id="rId13"/>
-    <p:sldId id="265" r:id="rId14"/>
-    <p:sldId id="267" r:id="rId15"/>
-    <p:sldId id="272" r:id="rId16"/>
-    <p:sldId id="274" r:id="rId17"/>
-    <p:sldId id="271" r:id="rId18"/>
+    <p:sldId id="278" r:id="rId14"/>
+    <p:sldId id="281" r:id="rId15"/>
+    <p:sldId id="280" r:id="rId16"/>
+    <p:sldId id="279" r:id="rId17"/>
+    <p:sldId id="282" r:id="rId18"/>
+    <p:sldId id="265" r:id="rId19"/>
+    <p:sldId id="267" r:id="rId20"/>
+    <p:sldId id="272" r:id="rId21"/>
+    <p:sldId id="274" r:id="rId22"/>
+    <p:sldId id="271" r:id="rId23"/>
   </p:sldIdLst>
   <p:sldSz cx="12801600" cy="7315200"/>
   <p:notesSz cx="6858000" cy="9144000"/>
@@ -224,7 +229,7 @@
           <a:p>
             <a:fld id="{C4CD7A36-15CF-4B40-B7C9-B299C824610E}" type="datetimeFigureOut">
               <a:rPr lang="en-US" smtClean="0"/>
-              <a:t>8/9/2026</a:t>
+              <a:t>9/28/2026</a:t>
             </a:fld>
             <a:endParaRPr lang="en-US"/>
           </a:p>
@@ -754,7 +759,7 @@
           <a:p>
             <a:fld id="{2C2E1E87-9C15-4984-91E0-215221CAF7F6}" type="datetime1">
               <a:rPr lang="en-US" smtClean="0"/>
-              <a:t>8/9/2026</a:t>
+              <a:t>9/28/2026</a:t>
             </a:fld>
             <a:endParaRPr lang="en-US"/>
           </a:p>
@@ -922,7 +927,7 @@
           <a:p>
             <a:fld id="{041370E5-7D69-44CE-AE73-71BFC3B68EE4}" type="datetime1">
               <a:rPr lang="en-US" smtClean="0"/>
-              <a:t>8/9/2026</a:t>
+              <a:t>9/28/2026</a:t>
             </a:fld>
             <a:endParaRPr lang="en-US"/>
           </a:p>
@@ -1100,7 +1105,7 @@
           <a:p>
             <a:fld id="{4CFF8B80-F83C-48AA-AA3F-63D37C1606D6}" type="datetime1">
               <a:rPr lang="en-US" smtClean="0"/>
-              <a:t>8/9/2026</a:t>
+              <a:t>9/28/2026</a:t>
             </a:fld>
             <a:endParaRPr lang="en-US"/>
           </a:p>
@@ -1268,7 +1273,7 @@
           <a:p>
             <a:fld id="{F1116BE9-D6CB-4D14-A12D-7F5512E1435B}" type="datetime1">
               <a:rPr lang="en-US" smtClean="0"/>
-              <a:t>8/9/2026</a:t>
+              <a:t>9/28/2026</a:t>
             </a:fld>
             <a:endParaRPr lang="en-US"/>
           </a:p>
@@ -1513,7 +1518,7 @@
           <a:p>
             <a:fld id="{712A9D04-24B9-408C-A000-3B78FDBD0AEB}" type="datetime1">
               <a:rPr lang="en-US" smtClean="0"/>
-              <a:t>8/9/2026</a:t>
+              <a:t>9/28/2026</a:t>
             </a:fld>
             <a:endParaRPr lang="en-US"/>
           </a:p>
@@ -1798,7 +1803,7 @@
           <a:p>
             <a:fld id="{F2B91B48-F2B5-44C0-A324-732125246729}" type="datetime1">
               <a:rPr lang="en-US" smtClean="0"/>
-              <a:t>8/9/2026</a:t>
+              <a:t>9/28/2026</a:t>
             </a:fld>
             <a:endParaRPr lang="en-US"/>
           </a:p>
@@ -2217,7 +2222,7 @@
           <a:p>
             <a:fld id="{E8337E91-F602-4F18-92CA-FB1A231376B0}" type="datetime1">
               <a:rPr lang="en-US" smtClean="0"/>
-              <a:t>8/9/2026</a:t>
+              <a:t>9/28/2026</a:t>
             </a:fld>
             <a:endParaRPr lang="en-US"/>
           </a:p>
@@ -2334,7 +2339,7 @@
           <a:p>
             <a:fld id="{C0818EFE-411D-495F-AE32-482368671348}" type="datetime1">
               <a:rPr lang="en-US" smtClean="0"/>
-              <a:t>8/9/2026</a:t>
+              <a:t>9/28/2026</a:t>
             </a:fld>
             <a:endParaRPr lang="en-US"/>
           </a:p>
@@ -2429,7 +2434,7 @@
           <a:p>
             <a:fld id="{2C6129DD-E279-4A67-BA32-75987FE76FB7}" type="datetime1">
               <a:rPr lang="en-US" smtClean="0"/>
-              <a:t>8/9/2026</a:t>
+              <a:t>9/28/2026</a:t>
             </a:fld>
             <a:endParaRPr lang="en-US"/>
           </a:p>
@@ -2704,7 +2709,7 @@
           <a:p>
             <a:fld id="{E97BA02B-9B73-458F-B848-E99C8FA83242}" type="datetime1">
               <a:rPr lang="en-US" smtClean="0"/>
-              <a:t>8/9/2026</a:t>
+              <a:t>9/28/2026</a:t>
             </a:fld>
             <a:endParaRPr lang="en-US"/>
           </a:p>
@@ -2956,7 +2961,7 @@
           <a:p>
             <a:fld id="{33752997-1B9E-4EF2-B260-9EB38D81F553}" type="datetime1">
               <a:rPr lang="en-US" smtClean="0"/>
-              <a:t>8/9/2026</a:t>
+              <a:t>9/28/2026</a:t>
             </a:fld>
             <a:endParaRPr lang="en-US"/>
           </a:p>
@@ -3167,7 +3172,7 @@
           <a:p>
             <a:fld id="{0E5C8E2D-1657-4F9E-9BA7-8881C66FCBC2}" type="datetime1">
               <a:rPr lang="en-US" smtClean="0"/>
-              <a:t>8/9/2026</a:t>
+              <a:t>9/28/2026</a:t>
             </a:fld>
             <a:endParaRPr lang="en-US"/>
           </a:p>
@@ -4014,17 +4019,7 @@
                 <a:latin typeface="Times New Roman" pitchFamily="18" charset="0"/>
                 <a:cs typeface="Times New Roman" pitchFamily="18" charset="0"/>
               </a:rPr>
-              <a:t>. </a:t>
-            </a:r>
-            <a:r>
-              <a:rPr lang="en-US" sz="3700" b="1" dirty="0" smtClean="0">
-                <a:solidFill>
-                  <a:schemeClr val="bg1"/>
-                </a:solidFill>
-                <a:latin typeface="Times New Roman" pitchFamily="18" charset="0"/>
-                <a:cs typeface="Times New Roman" pitchFamily="18" charset="0"/>
-              </a:rPr>
-              <a:t>PROPOSED </a:t>
+              <a:t>. PROPOSED </a:t>
             </a:r>
             <a:r>
               <a:rPr lang="en-US" sz="3700" b="1" dirty="0">
@@ -4357,27 +4352,7 @@
                 <a:latin typeface="Times New Roman" pitchFamily="18" charset="0"/>
                 <a:cs typeface="Times New Roman" pitchFamily="18" charset="0"/>
               </a:rPr>
-              <a:t>. </a:t>
-            </a:r>
-            <a:r>
-              <a:rPr lang="en-US" sz="3700" b="1" dirty="0" smtClean="0">
-                <a:solidFill>
-                  <a:schemeClr val="bg1"/>
-                </a:solidFill>
-                <a:latin typeface="Times New Roman" pitchFamily="18" charset="0"/>
-                <a:cs typeface="Times New Roman" pitchFamily="18" charset="0"/>
-              </a:rPr>
-              <a:t>ARCHITECTURE</a:t>
-            </a:r>
-            <a:r>
-              <a:rPr lang="en-US" sz="3700" b="1" dirty="0" smtClean="0">
-                <a:solidFill>
-                  <a:schemeClr val="bg1"/>
-                </a:solidFill>
-                <a:latin typeface="Times New Roman" pitchFamily="18" charset="0"/>
-                <a:cs typeface="Times New Roman" pitchFamily="18" charset="0"/>
-              </a:rPr>
-              <a:t> </a:t>
+              <a:t>. ARCHITECTURE </a:t>
             </a:r>
             <a:endParaRPr lang="en-US" sz="3700" b="1" dirty="0">
               <a:solidFill>
@@ -5418,6 +5393,3789 @@
           </p:nvPr>
         </p:nvSpPr>
         <p:spPr>
+          <a:solidFill>
+            <a:srgbClr val="558ED5"/>
+          </a:solidFill>
+        </p:spPr>
+        <p:txBody>
+          <a:bodyPr/>
+          <a:lstStyle/>
+          <a:p>
+            <a:r>
+              <a:rPr lang="en-US" sz="3700" b="1" dirty="0" smtClean="0">
+                <a:solidFill>
+                  <a:schemeClr val="bg1"/>
+                </a:solidFill>
+                <a:latin typeface="Times New Roman" panose="02020603050405020304" pitchFamily="18" charset="0"/>
+                <a:cs typeface="Times New Roman" pitchFamily="18" charset="0"/>
+              </a:rPr>
+              <a:t>8. </a:t>
+            </a:r>
+            <a:r>
+              <a:rPr lang="en-US" sz="3700" b="1" dirty="0" smtClean="0">
+                <a:solidFill>
+                  <a:schemeClr val="bg1"/>
+                </a:solidFill>
+                <a:latin typeface="Times New Roman" pitchFamily="18" charset="0"/>
+                <a:cs typeface="Times New Roman" pitchFamily="18" charset="0"/>
+              </a:rPr>
+              <a:t>DATASET DESCRIPTION</a:t>
+            </a:r>
+            <a:r>
+              <a:rPr lang="en-US" sz="3700" b="1" dirty="0" smtClean="0">
+                <a:solidFill>
+                  <a:schemeClr val="bg1"/>
+                </a:solidFill>
+                <a:latin typeface="Times New Roman" pitchFamily="18" charset="0"/>
+                <a:cs typeface="Times New Roman" pitchFamily="18" charset="0"/>
+              </a:rPr>
+              <a:t> </a:t>
+            </a:r>
+            <a:endParaRPr lang="en-US" sz="3700" b="1" dirty="0">
+              <a:solidFill>
+                <a:schemeClr val="bg1"/>
+              </a:solidFill>
+              <a:latin typeface="Times New Roman" pitchFamily="18" charset="0"/>
+              <a:cs typeface="Times New Roman" pitchFamily="18" charset="0"/>
+            </a:endParaRPr>
+          </a:p>
+        </p:txBody>
+      </p:sp>
+      <p:sp>
+        <p:nvSpPr>
+          <p:cNvPr id="4" name="Slide Number Placeholder 3"/>
+          <p:cNvSpPr>
+            <a:spLocks noGrp="1"/>
+          </p:cNvSpPr>
+          <p:nvPr>
+            <p:ph type="sldNum" sz="quarter" idx="12"/>
+          </p:nvPr>
+        </p:nvSpPr>
+        <p:spPr/>
+        <p:txBody>
+          <a:bodyPr/>
+          <a:lstStyle/>
+          <a:p>
+            <a:fld id="{C02A2637-A5A3-49FA-B214-6E67543099EF}" type="slidenum">
+              <a:rPr lang="en-US" smtClean="0">
+                <a:latin typeface="Times New Roman" panose="02020603050405020304" pitchFamily="18" charset="0"/>
+                <a:cs typeface="Times New Roman" panose="02020603050405020304" pitchFamily="18" charset="0"/>
+              </a:rPr>
+              <a:t>13</a:t>
+            </a:fld>
+            <a:endParaRPr lang="en-US">
+              <a:latin typeface="Times New Roman" panose="02020603050405020304" pitchFamily="18" charset="0"/>
+              <a:cs typeface="Times New Roman" panose="02020603050405020304" pitchFamily="18" charset="0"/>
+            </a:endParaRPr>
+          </a:p>
+        </p:txBody>
+      </p:sp>
+      <p:sp>
+        <p:nvSpPr>
+          <p:cNvPr id="5" name="Text 2"/>
+          <p:cNvSpPr txBox="1"/>
+          <p:nvPr/>
+        </p:nvSpPr>
+        <p:spPr>
+          <a:xfrm>
+            <a:off x="640080" y="1635492"/>
+            <a:ext cx="11521440" cy="365760"/>
+          </a:xfrm>
+          <a:prstGeom prst="rect">
+            <a:avLst/>
+          </a:prstGeom>
+          <a:noFill/>
+          <a:ln/>
+        </p:spPr>
+        <p:txBody>
+          <a:bodyPr wrap="square" rtlCol="0" anchor="ctr"/>
+          <a:lstStyle/>
+          <a:p>
+            <a:pPr marL="0" indent="0">
+              <a:buNone/>
+            </a:pPr>
+            <a:r>
+              <a:rPr lang="en-US" sz="1700" b="1" dirty="0">
+                <a:solidFill>
+                  <a:srgbClr val="1F497D"/>
+                </a:solidFill>
+                <a:latin typeface="Times New Roman" panose="02020603050405020304" pitchFamily="18" charset="0"/>
+                <a:ea typeface="Times New Roman" pitchFamily="34" charset="-122"/>
+                <a:cs typeface="Times New Roman" panose="02020603050405020304" pitchFamily="18" charset="0"/>
+              </a:rPr>
+              <a:t>1. OASIS-2 (Open Access Series of Imaging Studies – Longitudinal)</a:t>
+            </a:r>
+            <a:endParaRPr lang="en-US" sz="1700" dirty="0">
+              <a:latin typeface="Times New Roman" panose="02020603050405020304" pitchFamily="18" charset="0"/>
+              <a:cs typeface="Times New Roman" panose="02020603050405020304" pitchFamily="18" charset="0"/>
+            </a:endParaRPr>
+          </a:p>
+        </p:txBody>
+      </p:sp>
+      <p:sp>
+        <p:nvSpPr>
+          <p:cNvPr id="6" name="Text 3"/>
+          <p:cNvSpPr txBox="1"/>
+          <p:nvPr/>
+        </p:nvSpPr>
+        <p:spPr>
+          <a:xfrm>
+            <a:off x="640080" y="2028684"/>
+            <a:ext cx="11521440" cy="2286000"/>
+          </a:xfrm>
+          <a:prstGeom prst="rect">
+            <a:avLst/>
+          </a:prstGeom>
+          <a:noFill/>
+          <a:ln/>
+        </p:spPr>
+        <p:txBody>
+          <a:bodyPr wrap="square" rtlCol="0" anchor="t"/>
+          <a:lstStyle/>
+          <a:p>
+            <a:pPr marL="342900" indent="-342900">
+              <a:spcAft>
+                <a:spcPts val="800"/>
+              </a:spcAft>
+              <a:buSzPct val="100000"/>
+              <a:buChar char="•"/>
+            </a:pPr>
+            <a:r>
+              <a:rPr lang="en-US" sz="1450" dirty="0">
+                <a:solidFill>
+                  <a:srgbClr val="000000"/>
+                </a:solidFill>
+                <a:latin typeface="Times New Roman" panose="02020603050405020304" pitchFamily="18" charset="0"/>
+                <a:ea typeface="Times New Roman" pitchFamily="34" charset="-122"/>
+                <a:cs typeface="Times New Roman" panose="02020603050405020304" pitchFamily="18" charset="0"/>
+              </a:rPr>
+              <a:t>Purpose: primary dataset for the clinical GRU and clinical + MRI bimodal fusion models.</a:t>
+            </a:r>
+            <a:endParaRPr lang="en-US" sz="1450" dirty="0">
+              <a:latin typeface="Times New Roman" panose="02020603050405020304" pitchFamily="18" charset="0"/>
+              <a:cs typeface="Times New Roman" panose="02020603050405020304" pitchFamily="18" charset="0"/>
+            </a:endParaRPr>
+          </a:p>
+          <a:p>
+            <a:pPr marL="342900" indent="-342900">
+              <a:spcAft>
+                <a:spcPts val="800"/>
+              </a:spcAft>
+              <a:buSzPct val="100000"/>
+              <a:buChar char="•"/>
+            </a:pPr>
+            <a:r>
+              <a:rPr lang="en-US" sz="1450" dirty="0">
+                <a:solidFill>
+                  <a:srgbClr val="000000"/>
+                </a:solidFill>
+                <a:latin typeface="Times New Roman" panose="02020603050405020304" pitchFamily="18" charset="0"/>
+                <a:ea typeface="Times New Roman" pitchFamily="34" charset="-122"/>
+                <a:cs typeface="Times New Roman" panose="02020603050405020304" pitchFamily="18" charset="0"/>
+              </a:rPr>
+              <a:t>Scale: 150 subjects, 373 imaging sessions; 223 usable longitudinal next-visit pairs built for modelling.</a:t>
+            </a:r>
+            <a:endParaRPr lang="en-US" sz="1450" dirty="0">
+              <a:latin typeface="Times New Roman" panose="02020603050405020304" pitchFamily="18" charset="0"/>
+              <a:cs typeface="Times New Roman" panose="02020603050405020304" pitchFamily="18" charset="0"/>
+            </a:endParaRPr>
+          </a:p>
+          <a:p>
+            <a:pPr marL="342900" indent="-342900">
+              <a:spcAft>
+                <a:spcPts val="800"/>
+              </a:spcAft>
+              <a:buSzPct val="100000"/>
+              <a:buChar char="•"/>
+            </a:pPr>
+            <a:r>
+              <a:rPr lang="en-US" sz="1450" dirty="0">
+                <a:solidFill>
+                  <a:srgbClr val="000000"/>
+                </a:solidFill>
+                <a:latin typeface="Times New Roman" panose="02020603050405020304" pitchFamily="18" charset="0"/>
+                <a:ea typeface="Times New Roman" pitchFamily="34" charset="-122"/>
+                <a:cs typeface="Times New Roman" panose="02020603050405020304" pitchFamily="18" charset="0"/>
+              </a:rPr>
+              <a:t>Modalities used: clinical/demographic (Age, Education, SES, MMSE, CDR) and MRI-derived structural scalars (nWBV, eTIV, ASF) — not raw 3D MRI volumes.</a:t>
+            </a:r>
+            <a:endParaRPr lang="en-US" sz="1450" dirty="0">
+              <a:latin typeface="Times New Roman" panose="02020603050405020304" pitchFamily="18" charset="0"/>
+              <a:cs typeface="Times New Roman" panose="02020603050405020304" pitchFamily="18" charset="0"/>
+            </a:endParaRPr>
+          </a:p>
+          <a:p>
+            <a:pPr marL="342900" indent="-342900">
+              <a:spcAft>
+                <a:spcPts val="800"/>
+              </a:spcAft>
+              <a:buSzPct val="100000"/>
+              <a:buChar char="•"/>
+            </a:pPr>
+            <a:r>
+              <a:rPr lang="en-US" sz="1450" dirty="0">
+                <a:solidFill>
+                  <a:srgbClr val="000000"/>
+                </a:solidFill>
+                <a:latin typeface="Times New Roman" panose="02020603050405020304" pitchFamily="18" charset="0"/>
+                <a:ea typeface="Times New Roman" pitchFamily="34" charset="-122"/>
+                <a:cs typeface="Times New Roman" panose="02020603050405020304" pitchFamily="18" charset="0"/>
+              </a:rPr>
+              <a:t>Split: subject-level split into 160 train / 35 validation / 28 test samples (random seed 42), preventing patient leakage across sets.</a:t>
+            </a:r>
+            <a:endParaRPr lang="en-US" sz="1450" dirty="0">
+              <a:latin typeface="Times New Roman" panose="02020603050405020304" pitchFamily="18" charset="0"/>
+              <a:cs typeface="Times New Roman" panose="02020603050405020304" pitchFamily="18" charset="0"/>
+            </a:endParaRPr>
+          </a:p>
+          <a:p>
+            <a:pPr marL="342900" indent="-342900">
+              <a:spcAft>
+                <a:spcPts val="800"/>
+              </a:spcAft>
+              <a:buSzPct val="100000"/>
+              <a:buChar char="•"/>
+            </a:pPr>
+            <a:r>
+              <a:rPr lang="en-US" sz="1450" dirty="0">
+                <a:solidFill>
+                  <a:srgbClr val="000000"/>
+                </a:solidFill>
+                <a:latin typeface="Times New Roman" panose="02020603050405020304" pitchFamily="18" charset="0"/>
+                <a:ea typeface="Times New Roman" pitchFamily="34" charset="-122"/>
+                <a:cs typeface="Times New Roman" panose="02020603050405020304" pitchFamily="18" charset="0"/>
+              </a:rPr>
+              <a:t>Preprocessing: 19-feature per-visit vector (raw values + previous-visit values + visit-to-visit deltas), normalization of Age/EDUC/MMSE/nWBV/eTIV, missing values filled with 0.</a:t>
+            </a:r>
+            <a:endParaRPr lang="en-US" sz="1450" dirty="0">
+              <a:latin typeface="Times New Roman" panose="02020603050405020304" pitchFamily="18" charset="0"/>
+              <a:cs typeface="Times New Roman" panose="02020603050405020304" pitchFamily="18" charset="0"/>
+            </a:endParaRPr>
+          </a:p>
+        </p:txBody>
+      </p:sp>
+      <p:sp>
+        <p:nvSpPr>
+          <p:cNvPr id="8" name="Text 4"/>
+          <p:cNvSpPr txBox="1"/>
+          <p:nvPr/>
+        </p:nvSpPr>
+        <p:spPr>
+          <a:xfrm>
+            <a:off x="640080" y="4544833"/>
+            <a:ext cx="11521440" cy="365760"/>
+          </a:xfrm>
+          <a:prstGeom prst="rect">
+            <a:avLst/>
+          </a:prstGeom>
+          <a:noFill/>
+          <a:ln/>
+        </p:spPr>
+        <p:txBody>
+          <a:bodyPr wrap="square" rtlCol="0" anchor="ctr"/>
+          <a:lstStyle/>
+          <a:p>
+            <a:pPr marL="0" indent="0">
+              <a:buNone/>
+            </a:pPr>
+            <a:r>
+              <a:rPr lang="en-US" sz="1700" b="1" dirty="0">
+                <a:solidFill>
+                  <a:srgbClr val="1F497D"/>
+                </a:solidFill>
+                <a:latin typeface="Times New Roman" panose="02020603050405020304" pitchFamily="18" charset="0"/>
+                <a:ea typeface="Times New Roman" pitchFamily="34" charset="-122"/>
+                <a:cs typeface="Times New Roman" panose="02020603050405020304" pitchFamily="18" charset="0"/>
+              </a:rPr>
+              <a:t>2. OpenNeuro ds004504 (EEG Cohort)</a:t>
+            </a:r>
+            <a:endParaRPr lang="en-US" sz="1700" dirty="0">
+              <a:latin typeface="Times New Roman" panose="02020603050405020304" pitchFamily="18" charset="0"/>
+              <a:cs typeface="Times New Roman" panose="02020603050405020304" pitchFamily="18" charset="0"/>
+            </a:endParaRPr>
+          </a:p>
+        </p:txBody>
+      </p:sp>
+      <p:sp>
+        <p:nvSpPr>
+          <p:cNvPr id="9" name="Text 5"/>
+          <p:cNvSpPr txBox="1"/>
+          <p:nvPr/>
+        </p:nvSpPr>
+        <p:spPr>
+          <a:xfrm>
+            <a:off x="640080" y="4938025"/>
+            <a:ext cx="11521440" cy="2011680"/>
+          </a:xfrm>
+          <a:prstGeom prst="rect">
+            <a:avLst/>
+          </a:prstGeom>
+          <a:noFill/>
+          <a:ln/>
+        </p:spPr>
+        <p:txBody>
+          <a:bodyPr wrap="square" rtlCol="0" anchor="t"/>
+          <a:lstStyle/>
+          <a:p>
+            <a:pPr marL="342900" indent="-342900">
+              <a:spcAft>
+                <a:spcPts val="800"/>
+              </a:spcAft>
+              <a:buSzPct val="100000"/>
+              <a:buChar char="•"/>
+            </a:pPr>
+            <a:r>
+              <a:rPr lang="en-US" sz="1450" dirty="0">
+                <a:solidFill>
+                  <a:srgbClr val="000000"/>
+                </a:solidFill>
+                <a:latin typeface="Times New Roman" panose="02020603050405020304" pitchFamily="18" charset="0"/>
+                <a:ea typeface="Times New Roman" pitchFamily="34" charset="-122"/>
+                <a:cs typeface="Times New Roman" panose="02020603050405020304" pitchFamily="18" charset="0"/>
+              </a:rPr>
+              <a:t>Purpose: independent EEG-based binary screening pathway (Disease vs Control), evaluated separately from the CDR-prediction pipeline.</a:t>
+            </a:r>
+            <a:endParaRPr lang="en-US" sz="1450" dirty="0">
+              <a:latin typeface="Times New Roman" panose="02020603050405020304" pitchFamily="18" charset="0"/>
+              <a:cs typeface="Times New Roman" panose="02020603050405020304" pitchFamily="18" charset="0"/>
+            </a:endParaRPr>
+          </a:p>
+          <a:p>
+            <a:pPr marL="342900" indent="-342900">
+              <a:spcAft>
+                <a:spcPts val="800"/>
+              </a:spcAft>
+              <a:buSzPct val="100000"/>
+              <a:buChar char="•"/>
+            </a:pPr>
+            <a:r>
+              <a:rPr lang="en-US" sz="1450" dirty="0">
+                <a:solidFill>
+                  <a:srgbClr val="000000"/>
+                </a:solidFill>
+                <a:latin typeface="Times New Roman" panose="02020603050405020304" pitchFamily="18" charset="0"/>
+                <a:ea typeface="Times New Roman" pitchFamily="34" charset="-122"/>
+                <a:cs typeface="Times New Roman" panose="02020603050405020304" pitchFamily="18" charset="0"/>
+              </a:rPr>
+              <a:t>Scale: 87 subjects; pre-extracted spectral band-power features (delta, theta, alpha, beta, gamma; relative powers; theta/alpha ratio; spectral edge frequency), not raw EEG signal.</a:t>
+            </a:r>
+            <a:endParaRPr lang="en-US" sz="1450" dirty="0">
+              <a:latin typeface="Times New Roman" panose="02020603050405020304" pitchFamily="18" charset="0"/>
+              <a:cs typeface="Times New Roman" panose="02020603050405020304" pitchFamily="18" charset="0"/>
+            </a:endParaRPr>
+          </a:p>
+          <a:p>
+            <a:pPr marL="342900" indent="-342900">
+              <a:spcAft>
+                <a:spcPts val="800"/>
+              </a:spcAft>
+              <a:buSzPct val="100000"/>
+              <a:buChar char="•"/>
+            </a:pPr>
+            <a:r>
+              <a:rPr lang="en-US" sz="1450" dirty="0">
+                <a:solidFill>
+                  <a:srgbClr val="000000"/>
+                </a:solidFill>
+                <a:latin typeface="Times New Roman" panose="02020603050405020304" pitchFamily="18" charset="0"/>
+                <a:ea typeface="Times New Roman" pitchFamily="34" charset="-122"/>
+                <a:cs typeface="Times New Roman" panose="02020603050405020304" pitchFamily="18" charset="0"/>
+              </a:rPr>
+              <a:t>Important note: this is a separate subject cohort from OASIS-2 — there is no shared patient identity, so EEG outputs cannot currently be fused with the clinical/MRI CDR prediction for the same patient.</a:t>
+            </a:r>
+            <a:endParaRPr lang="en-US" sz="1450" dirty="0">
+              <a:latin typeface="Times New Roman" panose="02020603050405020304" pitchFamily="18" charset="0"/>
+              <a:cs typeface="Times New Roman" panose="02020603050405020304" pitchFamily="18" charset="0"/>
+            </a:endParaRPr>
+          </a:p>
+        </p:txBody>
+      </p:sp>
+    </p:spTree>
+    <p:extLst>
+      <p:ext uri="{BB962C8B-B14F-4D97-AF65-F5344CB8AC3E}">
+        <p14:creationId xmlns:p14="http://schemas.microsoft.com/office/powerpoint/2010/main" val="609956532"/>
+      </p:ext>
+    </p:extLst>
+  </p:cSld>
+  <p:clrMapOvr>
+    <a:masterClrMapping/>
+  </p:clrMapOvr>
+  <p:timing>
+    <p:tnLst>
+      <p:par>
+        <p:cTn id="1" dur="indefinite" restart="never" nodeType="tmRoot"/>
+      </p:par>
+    </p:tnLst>
+  </p:timing>
+</p:sld>
+</file>
+
+<file path=ppt/slides/slide14.xml><?xml version="1.0" encoding="utf-8"?>
+<p:sld xmlns:a="http://schemas.openxmlformats.org/drawingml/2006/main" xmlns:r="http://schemas.openxmlformats.org/officeDocument/2006/relationships" xmlns:p="http://schemas.openxmlformats.org/presentationml/2006/main">
+  <p:cSld>
+    <p:spTree>
+      <p:nvGrpSpPr>
+        <p:cNvPr id="1" name=""/>
+        <p:cNvGrpSpPr/>
+        <p:nvPr/>
+      </p:nvGrpSpPr>
+      <p:grpSpPr>
+        <a:xfrm>
+          <a:off x="0" y="0"/>
+          <a:ext cx="0" cy="0"/>
+          <a:chOff x="0" y="0"/>
+          <a:chExt cx="0" cy="0"/>
+        </a:xfrm>
+      </p:grpSpPr>
+      <p:sp>
+        <p:nvSpPr>
+          <p:cNvPr id="2" name="Title 1"/>
+          <p:cNvSpPr>
+            <a:spLocks noGrp="1"/>
+          </p:cNvSpPr>
+          <p:nvPr>
+            <p:ph type="title"/>
+          </p:nvPr>
+        </p:nvSpPr>
+        <p:spPr>
+          <a:solidFill>
+            <a:srgbClr val="558ED5"/>
+          </a:solidFill>
+        </p:spPr>
+        <p:txBody>
+          <a:bodyPr/>
+          <a:lstStyle/>
+          <a:p>
+            <a:r>
+              <a:rPr lang="en-US" sz="3700" b="1" dirty="0">
+                <a:solidFill>
+                  <a:schemeClr val="bg1"/>
+                </a:solidFill>
+                <a:latin typeface="Times New Roman" pitchFamily="18" charset="0"/>
+                <a:cs typeface="Times New Roman" pitchFamily="18" charset="0"/>
+              </a:rPr>
+              <a:t>9</a:t>
+            </a:r>
+            <a:r>
+              <a:rPr lang="en-US" sz="3700" b="1" dirty="0" smtClean="0">
+                <a:solidFill>
+                  <a:schemeClr val="bg1"/>
+                </a:solidFill>
+                <a:latin typeface="Times New Roman" pitchFamily="18" charset="0"/>
+                <a:cs typeface="Times New Roman" pitchFamily="18" charset="0"/>
+              </a:rPr>
+              <a:t>. MODULES DESCRIPTION</a:t>
+            </a:r>
+            <a:endParaRPr lang="en-US" sz="3700" b="1" dirty="0">
+              <a:solidFill>
+                <a:schemeClr val="bg1"/>
+              </a:solidFill>
+              <a:latin typeface="Times New Roman" pitchFamily="18" charset="0"/>
+              <a:cs typeface="Times New Roman" pitchFamily="18" charset="0"/>
+            </a:endParaRPr>
+          </a:p>
+        </p:txBody>
+      </p:sp>
+      <p:sp>
+        <p:nvSpPr>
+          <p:cNvPr id="4" name="Slide Number Placeholder 3"/>
+          <p:cNvSpPr>
+            <a:spLocks noGrp="1"/>
+          </p:cNvSpPr>
+          <p:nvPr>
+            <p:ph type="sldNum" sz="quarter" idx="12"/>
+          </p:nvPr>
+        </p:nvSpPr>
+        <p:spPr/>
+        <p:txBody>
+          <a:bodyPr/>
+          <a:lstStyle/>
+          <a:p>
+            <a:fld id="{C02A2637-A5A3-49FA-B214-6E67543099EF}" type="slidenum">
+              <a:rPr lang="en-US" smtClean="0"/>
+              <a:t>14</a:t>
+            </a:fld>
+            <a:endParaRPr lang="en-US"/>
+          </a:p>
+        </p:txBody>
+      </p:sp>
+      <p:graphicFrame>
+        <p:nvGraphicFramePr>
+          <p:cNvPr id="7" name="Table 0"/>
+          <p:cNvGraphicFramePr>
+            <a:graphicFrameLocks noGrp="1"/>
+          </p:cNvGraphicFramePr>
+          <p:nvPr>
+            <p:extLst>
+              <p:ext uri="{D42A27DB-BD31-4B8C-83A1-F6EECF244321}">
+                <p14:modId xmlns:p14="http://schemas.microsoft.com/office/powerpoint/2010/main" val="2487941587"/>
+              </p:ext>
+            </p:extLst>
+          </p:nvPr>
+        </p:nvGraphicFramePr>
+        <p:xfrm>
+          <a:off x="640080" y="1636423"/>
+          <a:ext cx="11521440" cy="2400300"/>
+        </p:xfrm>
+        <a:graphic>
+          <a:graphicData uri="http://schemas.openxmlformats.org/drawingml/2006/table">
+            <a:tbl>
+              <a:tblPr/>
+              <a:tblGrid>
+                <a:gridCol w="2377440">
+                  <a:extLst>
+                    <a:ext uri="{9D8B030D-6E8A-4147-A177-3AD203B41FA5}">
+                      <a16:colId xmlns:a16="http://schemas.microsoft.com/office/drawing/2014/main" val="20000"/>
+                    </a:ext>
+                  </a:extLst>
+                </a:gridCol>
+                <a:gridCol w="2834640">
+                  <a:extLst>
+                    <a:ext uri="{9D8B030D-6E8A-4147-A177-3AD203B41FA5}">
+                      <a16:colId xmlns:a16="http://schemas.microsoft.com/office/drawing/2014/main" val="20001"/>
+                    </a:ext>
+                  </a:extLst>
+                </a:gridCol>
+                <a:gridCol w="3840480">
+                  <a:extLst>
+                    <a:ext uri="{9D8B030D-6E8A-4147-A177-3AD203B41FA5}">
+                      <a16:colId xmlns:a16="http://schemas.microsoft.com/office/drawing/2014/main" val="20002"/>
+                    </a:ext>
+                  </a:extLst>
+                </a:gridCol>
+                <a:gridCol w="2468880">
+                  <a:extLst>
+                    <a:ext uri="{9D8B030D-6E8A-4147-A177-3AD203B41FA5}">
+                      <a16:colId xmlns:a16="http://schemas.microsoft.com/office/drawing/2014/main" val="20003"/>
+                    </a:ext>
+                  </a:extLst>
+                </a:gridCol>
+              </a:tblGrid>
+              <a:tr h="0">
+                <a:tc>
+                  <a:txBody>
+                    <a:bodyPr/>
+                    <a:lstStyle/>
+                    <a:p>
+                      <a:pPr marL="0" indent="0" algn="ctr">
+                        <a:buNone/>
+                      </a:pPr>
+                      <a:r>
+                        <a:rPr lang="en-US" sz="1200" b="1" dirty="0">
+                          <a:solidFill>
+                            <a:srgbClr val="FFFFFF"/>
+                          </a:solidFill>
+                          <a:latin typeface="Times New Roman" pitchFamily="34" charset="0"/>
+                          <a:ea typeface="Times New Roman" pitchFamily="34" charset="-122"/>
+                          <a:cs typeface="Times New Roman" pitchFamily="34" charset="-120"/>
+                        </a:rPr>
+                        <a:t>Module</a:t>
+                      </a:r>
+                      <a:endParaRPr lang="en-US" sz="1200" dirty="0">
+                        <a:latin typeface="Times New Roman" charset="0"/>
+                        <a:ea typeface="Times New Roman" charset="0"/>
+                        <a:cs typeface="Times New Roman" charset="0"/>
+                      </a:endParaRPr>
+                    </a:p>
+                  </a:txBody>
+                  <a:tcPr anchor="ctr">
+                    <a:lnL w="6350" cap="flat" cmpd="sng" algn="ctr">
+                      <a:solidFill>
+                        <a:srgbClr val="BFBFBF"/>
+                      </a:solidFill>
+                      <a:prstDash val="solid"/>
+                      <a:round/>
+                      <a:headEnd type="none" w="med" len="med"/>
+                      <a:tailEnd type="none" w="med" len="med"/>
+                    </a:lnL>
+                    <a:lnR w="6350" cap="flat" cmpd="sng" algn="ctr">
+                      <a:solidFill>
+                        <a:srgbClr val="BFBFBF"/>
+                      </a:solidFill>
+                      <a:prstDash val="solid"/>
+                      <a:round/>
+                      <a:headEnd type="none" w="med" len="med"/>
+                      <a:tailEnd type="none" w="med" len="med"/>
+                    </a:lnR>
+                    <a:lnT w="6350" cap="flat" cmpd="sng" algn="ctr">
+                      <a:solidFill>
+                        <a:srgbClr val="BFBFBF"/>
+                      </a:solidFill>
+                      <a:prstDash val="solid"/>
+                      <a:round/>
+                      <a:headEnd type="none" w="med" len="med"/>
+                      <a:tailEnd type="none" w="med" len="med"/>
+                    </a:lnT>
+                    <a:lnB w="6350" cap="flat" cmpd="sng" algn="ctr">
+                      <a:solidFill>
+                        <a:srgbClr val="BFBFBF"/>
+                      </a:solidFill>
+                      <a:prstDash val="solid"/>
+                      <a:round/>
+                      <a:headEnd type="none" w="med" len="med"/>
+                      <a:tailEnd type="none" w="med" len="med"/>
+                    </a:lnB>
+                    <a:solidFill>
+                      <a:srgbClr val="558ED3"/>
+                    </a:solidFill>
+                  </a:tcPr>
+                </a:tc>
+                <a:tc>
+                  <a:txBody>
+                    <a:bodyPr/>
+                    <a:lstStyle/>
+                    <a:p>
+                      <a:pPr marL="0" indent="0" algn="ctr">
+                        <a:buNone/>
+                      </a:pPr>
+                      <a:r>
+                        <a:rPr lang="en-US" sz="1200" b="1" dirty="0">
+                          <a:solidFill>
+                            <a:srgbClr val="FFFFFF"/>
+                          </a:solidFill>
+                          <a:latin typeface="Times New Roman" pitchFamily="34" charset="0"/>
+                          <a:ea typeface="Times New Roman" pitchFamily="34" charset="-122"/>
+                          <a:cs typeface="Times New Roman" pitchFamily="34" charset="-120"/>
+                        </a:rPr>
+                        <a:t>Input</a:t>
+                      </a:r>
+                      <a:endParaRPr lang="en-US" sz="1200" dirty="0">
+                        <a:latin typeface="Times New Roman" charset="0"/>
+                        <a:ea typeface="Times New Roman" charset="0"/>
+                        <a:cs typeface="Times New Roman" charset="0"/>
+                      </a:endParaRPr>
+                    </a:p>
+                  </a:txBody>
+                  <a:tcPr anchor="ctr">
+                    <a:lnL w="6350" cap="flat" cmpd="sng" algn="ctr">
+                      <a:solidFill>
+                        <a:srgbClr val="BFBFBF"/>
+                      </a:solidFill>
+                      <a:prstDash val="solid"/>
+                      <a:round/>
+                      <a:headEnd type="none" w="med" len="med"/>
+                      <a:tailEnd type="none" w="med" len="med"/>
+                    </a:lnL>
+                    <a:lnR w="6350" cap="flat" cmpd="sng" algn="ctr">
+                      <a:solidFill>
+                        <a:srgbClr val="BFBFBF"/>
+                      </a:solidFill>
+                      <a:prstDash val="solid"/>
+                      <a:round/>
+                      <a:headEnd type="none" w="med" len="med"/>
+                      <a:tailEnd type="none" w="med" len="med"/>
+                    </a:lnR>
+                    <a:lnT w="6350" cap="flat" cmpd="sng" algn="ctr">
+                      <a:solidFill>
+                        <a:srgbClr val="BFBFBF"/>
+                      </a:solidFill>
+                      <a:prstDash val="solid"/>
+                      <a:round/>
+                      <a:headEnd type="none" w="med" len="med"/>
+                      <a:tailEnd type="none" w="med" len="med"/>
+                    </a:lnT>
+                    <a:lnB w="6350" cap="flat" cmpd="sng" algn="ctr">
+                      <a:solidFill>
+                        <a:srgbClr val="BFBFBF"/>
+                      </a:solidFill>
+                      <a:prstDash val="solid"/>
+                      <a:round/>
+                      <a:headEnd type="none" w="med" len="med"/>
+                      <a:tailEnd type="none" w="med" len="med"/>
+                    </a:lnB>
+                    <a:solidFill>
+                      <a:srgbClr val="558ED3"/>
+                    </a:solidFill>
+                  </a:tcPr>
+                </a:tc>
+                <a:tc>
+                  <a:txBody>
+                    <a:bodyPr/>
+                    <a:lstStyle/>
+                    <a:p>
+                      <a:pPr marL="0" indent="0" algn="ctr">
+                        <a:buNone/>
+                      </a:pPr>
+                      <a:r>
+                        <a:rPr lang="en-US" sz="1200" b="1" dirty="0">
+                          <a:solidFill>
+                            <a:srgbClr val="FFFFFF"/>
+                          </a:solidFill>
+                          <a:latin typeface="Times New Roman" pitchFamily="34" charset="0"/>
+                          <a:ea typeface="Times New Roman" pitchFamily="34" charset="-122"/>
+                          <a:cs typeface="Times New Roman" pitchFamily="34" charset="-120"/>
+                        </a:rPr>
+                        <a:t>Algorithm / Model</a:t>
+                      </a:r>
+                      <a:endParaRPr lang="en-US" sz="1200" dirty="0">
+                        <a:latin typeface="Times New Roman" charset="0"/>
+                        <a:ea typeface="Times New Roman" charset="0"/>
+                        <a:cs typeface="Times New Roman" charset="0"/>
+                      </a:endParaRPr>
+                    </a:p>
+                  </a:txBody>
+                  <a:tcPr anchor="ctr">
+                    <a:lnL w="6350" cap="flat" cmpd="sng" algn="ctr">
+                      <a:solidFill>
+                        <a:srgbClr val="BFBFBF"/>
+                      </a:solidFill>
+                      <a:prstDash val="solid"/>
+                      <a:round/>
+                      <a:headEnd type="none" w="med" len="med"/>
+                      <a:tailEnd type="none" w="med" len="med"/>
+                    </a:lnL>
+                    <a:lnR w="6350" cap="flat" cmpd="sng" algn="ctr">
+                      <a:solidFill>
+                        <a:srgbClr val="BFBFBF"/>
+                      </a:solidFill>
+                      <a:prstDash val="solid"/>
+                      <a:round/>
+                      <a:headEnd type="none" w="med" len="med"/>
+                      <a:tailEnd type="none" w="med" len="med"/>
+                    </a:lnR>
+                    <a:lnT w="6350" cap="flat" cmpd="sng" algn="ctr">
+                      <a:solidFill>
+                        <a:srgbClr val="BFBFBF"/>
+                      </a:solidFill>
+                      <a:prstDash val="solid"/>
+                      <a:round/>
+                      <a:headEnd type="none" w="med" len="med"/>
+                      <a:tailEnd type="none" w="med" len="med"/>
+                    </a:lnT>
+                    <a:lnB w="6350" cap="flat" cmpd="sng" algn="ctr">
+                      <a:solidFill>
+                        <a:srgbClr val="BFBFBF"/>
+                      </a:solidFill>
+                      <a:prstDash val="solid"/>
+                      <a:round/>
+                      <a:headEnd type="none" w="med" len="med"/>
+                      <a:tailEnd type="none" w="med" len="med"/>
+                    </a:lnB>
+                    <a:solidFill>
+                      <a:srgbClr val="558ED3"/>
+                    </a:solidFill>
+                  </a:tcPr>
+                </a:tc>
+                <a:tc>
+                  <a:txBody>
+                    <a:bodyPr/>
+                    <a:lstStyle/>
+                    <a:p>
+                      <a:pPr marL="0" indent="0" algn="ctr">
+                        <a:buNone/>
+                      </a:pPr>
+                      <a:r>
+                        <a:rPr lang="en-US" sz="1200" b="1" dirty="0">
+                          <a:solidFill>
+                            <a:srgbClr val="FFFFFF"/>
+                          </a:solidFill>
+                          <a:latin typeface="Times New Roman" pitchFamily="34" charset="0"/>
+                          <a:ea typeface="Times New Roman" pitchFamily="34" charset="-122"/>
+                          <a:cs typeface="Times New Roman" pitchFamily="34" charset="-120"/>
+                        </a:rPr>
+                        <a:t>Output</a:t>
+                      </a:r>
+                      <a:endParaRPr lang="en-US" sz="1200" dirty="0">
+                        <a:latin typeface="Times New Roman" charset="0"/>
+                        <a:ea typeface="Times New Roman" charset="0"/>
+                        <a:cs typeface="Times New Roman" charset="0"/>
+                      </a:endParaRPr>
+                    </a:p>
+                  </a:txBody>
+                  <a:tcPr anchor="ctr">
+                    <a:lnL w="6350" cap="flat" cmpd="sng" algn="ctr">
+                      <a:solidFill>
+                        <a:srgbClr val="BFBFBF"/>
+                      </a:solidFill>
+                      <a:prstDash val="solid"/>
+                      <a:round/>
+                      <a:headEnd type="none" w="med" len="med"/>
+                      <a:tailEnd type="none" w="med" len="med"/>
+                    </a:lnL>
+                    <a:lnR w="6350" cap="flat" cmpd="sng" algn="ctr">
+                      <a:solidFill>
+                        <a:srgbClr val="BFBFBF"/>
+                      </a:solidFill>
+                      <a:prstDash val="solid"/>
+                      <a:round/>
+                      <a:headEnd type="none" w="med" len="med"/>
+                      <a:tailEnd type="none" w="med" len="med"/>
+                    </a:lnR>
+                    <a:lnT w="6350" cap="flat" cmpd="sng" algn="ctr">
+                      <a:solidFill>
+                        <a:srgbClr val="BFBFBF"/>
+                      </a:solidFill>
+                      <a:prstDash val="solid"/>
+                      <a:round/>
+                      <a:headEnd type="none" w="med" len="med"/>
+                      <a:tailEnd type="none" w="med" len="med"/>
+                    </a:lnT>
+                    <a:lnB w="6350" cap="flat" cmpd="sng" algn="ctr">
+                      <a:solidFill>
+                        <a:srgbClr val="BFBFBF"/>
+                      </a:solidFill>
+                      <a:prstDash val="solid"/>
+                      <a:round/>
+                      <a:headEnd type="none" w="med" len="med"/>
+                      <a:tailEnd type="none" w="med" len="med"/>
+                    </a:lnB>
+                    <a:solidFill>
+                      <a:srgbClr val="558ED3"/>
+                    </a:solidFill>
+                  </a:tcPr>
+                </a:tc>
+                <a:extLst>
+                  <a:ext uri="{0D108BD9-81ED-4DB2-BD59-A6C34878D82A}">
+                    <a16:rowId xmlns:a16="http://schemas.microsoft.com/office/drawing/2014/main" val="10000"/>
+                  </a:ext>
+                </a:extLst>
+              </a:tr>
+              <a:tr h="0">
+                <a:tc>
+                  <a:txBody>
+                    <a:bodyPr/>
+                    <a:lstStyle/>
+                    <a:p>
+                      <a:pPr marL="0" indent="0" algn="l">
+                        <a:buNone/>
+                      </a:pPr>
+                      <a:r>
+                        <a:rPr lang="en-US" sz="1050" b="1" dirty="0">
+                          <a:solidFill>
+                            <a:srgbClr val="000000"/>
+                          </a:solidFill>
+                          <a:latin typeface="Times New Roman" pitchFamily="34" charset="0"/>
+                          <a:ea typeface="Times New Roman" pitchFamily="34" charset="-122"/>
+                          <a:cs typeface="Times New Roman" pitchFamily="34" charset="-120"/>
+                        </a:rPr>
+                        <a:t>Clinical Preprocessing</a:t>
+                      </a:r>
+                      <a:endParaRPr lang="en-US" sz="1050" dirty="0">
+                        <a:latin typeface="Times New Roman" charset="0"/>
+                        <a:ea typeface="Times New Roman" charset="0"/>
+                        <a:cs typeface="Times New Roman" charset="0"/>
+                      </a:endParaRPr>
+                    </a:p>
+                  </a:txBody>
+                  <a:tcPr>
+                    <a:lnL w="6350" cap="flat" cmpd="sng" algn="ctr">
+                      <a:solidFill>
+                        <a:srgbClr val="BFBFBF"/>
+                      </a:solidFill>
+                      <a:prstDash val="solid"/>
+                      <a:round/>
+                      <a:headEnd type="none" w="med" len="med"/>
+                      <a:tailEnd type="none" w="med" len="med"/>
+                    </a:lnL>
+                    <a:lnR w="6350" cap="flat" cmpd="sng" algn="ctr">
+                      <a:solidFill>
+                        <a:srgbClr val="BFBFBF"/>
+                      </a:solidFill>
+                      <a:prstDash val="solid"/>
+                      <a:round/>
+                      <a:headEnd type="none" w="med" len="med"/>
+                      <a:tailEnd type="none" w="med" len="med"/>
+                    </a:lnR>
+                    <a:lnT w="6350" cap="flat" cmpd="sng" algn="ctr">
+                      <a:solidFill>
+                        <a:srgbClr val="BFBFBF"/>
+                      </a:solidFill>
+                      <a:prstDash val="solid"/>
+                      <a:round/>
+                      <a:headEnd type="none" w="med" len="med"/>
+                      <a:tailEnd type="none" w="med" len="med"/>
+                    </a:lnT>
+                    <a:lnB w="6350" cap="flat" cmpd="sng" algn="ctr">
+                      <a:solidFill>
+                        <a:srgbClr val="BFBFBF"/>
+                      </a:solidFill>
+                      <a:prstDash val="solid"/>
+                      <a:round/>
+                      <a:headEnd type="none" w="med" len="med"/>
+                      <a:tailEnd type="none" w="med" len="med"/>
+                    </a:lnB>
+                    <a:solidFill>
+                      <a:srgbClr val="FFFFFF"/>
+                    </a:solidFill>
+                  </a:tcPr>
+                </a:tc>
+                <a:tc>
+                  <a:txBody>
+                    <a:bodyPr/>
+                    <a:lstStyle/>
+                    <a:p>
+                      <a:pPr marL="0" indent="0" algn="l">
+                        <a:buNone/>
+                      </a:pPr>
+                      <a:r>
+                        <a:rPr lang="en-US" sz="1050" dirty="0">
+                          <a:solidFill>
+                            <a:srgbClr val="000000"/>
+                          </a:solidFill>
+                          <a:latin typeface="Times New Roman" pitchFamily="34" charset="0"/>
+                          <a:ea typeface="Times New Roman" pitchFamily="34" charset="-122"/>
+                          <a:cs typeface="Times New Roman" pitchFamily="34" charset="-120"/>
+                        </a:rPr>
+                        <a:t>Raw visit records (Age, EDUC, SES, MMSE, CDR, nWBV, eTIV, ASF, …)</a:t>
+                      </a:r>
+                      <a:endParaRPr lang="en-US" sz="1050" dirty="0">
+                        <a:latin typeface="Times New Roman" charset="0"/>
+                        <a:ea typeface="Times New Roman" charset="0"/>
+                        <a:cs typeface="Times New Roman" charset="0"/>
+                      </a:endParaRPr>
+                    </a:p>
+                  </a:txBody>
+                  <a:tcPr>
+                    <a:lnL w="6350" cap="flat" cmpd="sng" algn="ctr">
+                      <a:solidFill>
+                        <a:srgbClr val="BFBFBF"/>
+                      </a:solidFill>
+                      <a:prstDash val="solid"/>
+                      <a:round/>
+                      <a:headEnd type="none" w="med" len="med"/>
+                      <a:tailEnd type="none" w="med" len="med"/>
+                    </a:lnL>
+                    <a:lnR w="6350" cap="flat" cmpd="sng" algn="ctr">
+                      <a:solidFill>
+                        <a:srgbClr val="BFBFBF"/>
+                      </a:solidFill>
+                      <a:prstDash val="solid"/>
+                      <a:round/>
+                      <a:headEnd type="none" w="med" len="med"/>
+                      <a:tailEnd type="none" w="med" len="med"/>
+                    </a:lnR>
+                    <a:lnT w="6350" cap="flat" cmpd="sng" algn="ctr">
+                      <a:solidFill>
+                        <a:srgbClr val="BFBFBF"/>
+                      </a:solidFill>
+                      <a:prstDash val="solid"/>
+                      <a:round/>
+                      <a:headEnd type="none" w="med" len="med"/>
+                      <a:tailEnd type="none" w="med" len="med"/>
+                    </a:lnT>
+                    <a:lnB w="6350" cap="flat" cmpd="sng" algn="ctr">
+                      <a:solidFill>
+                        <a:srgbClr val="BFBFBF"/>
+                      </a:solidFill>
+                      <a:prstDash val="solid"/>
+                      <a:round/>
+                      <a:headEnd type="none" w="med" len="med"/>
+                      <a:tailEnd type="none" w="med" len="med"/>
+                    </a:lnB>
+                    <a:solidFill>
+                      <a:srgbClr val="FFFFFF"/>
+                    </a:solidFill>
+                  </a:tcPr>
+                </a:tc>
+                <a:tc>
+                  <a:txBody>
+                    <a:bodyPr/>
+                    <a:lstStyle/>
+                    <a:p>
+                      <a:pPr marL="0" indent="0" algn="l">
+                        <a:buNone/>
+                      </a:pPr>
+                      <a:r>
+                        <a:rPr lang="en-US" sz="1050" dirty="0">
+                          <a:solidFill>
+                            <a:srgbClr val="000000"/>
+                          </a:solidFill>
+                          <a:latin typeface="Times New Roman" pitchFamily="34" charset="0"/>
+                          <a:ea typeface="Times New Roman" pitchFamily="34" charset="-122"/>
+                          <a:cs typeface="Times New Roman" pitchFamily="34" charset="-120"/>
+                        </a:rPr>
+                        <a:t>Feature engineering: raw + previous-visit + delta features; normalization (z-score style); missing → 0</a:t>
+                      </a:r>
+                      <a:endParaRPr lang="en-US" sz="1050" dirty="0">
+                        <a:latin typeface="Times New Roman" charset="0"/>
+                        <a:ea typeface="Times New Roman" charset="0"/>
+                        <a:cs typeface="Times New Roman" charset="0"/>
+                      </a:endParaRPr>
+                    </a:p>
+                  </a:txBody>
+                  <a:tcPr>
+                    <a:lnL w="6350" cap="flat" cmpd="sng" algn="ctr">
+                      <a:solidFill>
+                        <a:srgbClr val="BFBFBF"/>
+                      </a:solidFill>
+                      <a:prstDash val="solid"/>
+                      <a:round/>
+                      <a:headEnd type="none" w="med" len="med"/>
+                      <a:tailEnd type="none" w="med" len="med"/>
+                    </a:lnL>
+                    <a:lnR w="6350" cap="flat" cmpd="sng" algn="ctr">
+                      <a:solidFill>
+                        <a:srgbClr val="BFBFBF"/>
+                      </a:solidFill>
+                      <a:prstDash val="solid"/>
+                      <a:round/>
+                      <a:headEnd type="none" w="med" len="med"/>
+                      <a:tailEnd type="none" w="med" len="med"/>
+                    </a:lnR>
+                    <a:lnT w="6350" cap="flat" cmpd="sng" algn="ctr">
+                      <a:solidFill>
+                        <a:srgbClr val="BFBFBF"/>
+                      </a:solidFill>
+                      <a:prstDash val="solid"/>
+                      <a:round/>
+                      <a:headEnd type="none" w="med" len="med"/>
+                      <a:tailEnd type="none" w="med" len="med"/>
+                    </a:lnT>
+                    <a:lnB w="6350" cap="flat" cmpd="sng" algn="ctr">
+                      <a:solidFill>
+                        <a:srgbClr val="BFBFBF"/>
+                      </a:solidFill>
+                      <a:prstDash val="solid"/>
+                      <a:round/>
+                      <a:headEnd type="none" w="med" len="med"/>
+                      <a:tailEnd type="none" w="med" len="med"/>
+                    </a:lnB>
+                    <a:solidFill>
+                      <a:srgbClr val="FFFFFF"/>
+                    </a:solidFill>
+                  </a:tcPr>
+                </a:tc>
+                <a:tc>
+                  <a:txBody>
+                    <a:bodyPr/>
+                    <a:lstStyle/>
+                    <a:p>
+                      <a:pPr marL="0" indent="0" algn="l">
+                        <a:buNone/>
+                      </a:pPr>
+                      <a:r>
+                        <a:rPr lang="en-US" sz="1050" dirty="0">
+                          <a:solidFill>
+                            <a:srgbClr val="000000"/>
+                          </a:solidFill>
+                          <a:latin typeface="Times New Roman" pitchFamily="34" charset="0"/>
+                          <a:ea typeface="Times New Roman" pitchFamily="34" charset="-122"/>
+                          <a:cs typeface="Times New Roman" pitchFamily="34" charset="-120"/>
+                        </a:rPr>
+                        <a:t>19-dim per-visit feature vector, sequence of length T</a:t>
+                      </a:r>
+                      <a:endParaRPr lang="en-US" sz="1050" dirty="0">
+                        <a:latin typeface="Times New Roman" charset="0"/>
+                        <a:ea typeface="Times New Roman" charset="0"/>
+                        <a:cs typeface="Times New Roman" charset="0"/>
+                      </a:endParaRPr>
+                    </a:p>
+                  </a:txBody>
+                  <a:tcPr>
+                    <a:lnL w="6350" cap="flat" cmpd="sng" algn="ctr">
+                      <a:solidFill>
+                        <a:srgbClr val="BFBFBF"/>
+                      </a:solidFill>
+                      <a:prstDash val="solid"/>
+                      <a:round/>
+                      <a:headEnd type="none" w="med" len="med"/>
+                      <a:tailEnd type="none" w="med" len="med"/>
+                    </a:lnL>
+                    <a:lnR w="6350" cap="flat" cmpd="sng" algn="ctr">
+                      <a:solidFill>
+                        <a:srgbClr val="BFBFBF"/>
+                      </a:solidFill>
+                      <a:prstDash val="solid"/>
+                      <a:round/>
+                      <a:headEnd type="none" w="med" len="med"/>
+                      <a:tailEnd type="none" w="med" len="med"/>
+                    </a:lnR>
+                    <a:lnT w="6350" cap="flat" cmpd="sng" algn="ctr">
+                      <a:solidFill>
+                        <a:srgbClr val="BFBFBF"/>
+                      </a:solidFill>
+                      <a:prstDash val="solid"/>
+                      <a:round/>
+                      <a:headEnd type="none" w="med" len="med"/>
+                      <a:tailEnd type="none" w="med" len="med"/>
+                    </a:lnT>
+                    <a:lnB w="6350" cap="flat" cmpd="sng" algn="ctr">
+                      <a:solidFill>
+                        <a:srgbClr val="BFBFBF"/>
+                      </a:solidFill>
+                      <a:prstDash val="solid"/>
+                      <a:round/>
+                      <a:headEnd type="none" w="med" len="med"/>
+                      <a:tailEnd type="none" w="med" len="med"/>
+                    </a:lnB>
+                    <a:solidFill>
+                      <a:srgbClr val="FFFFFF"/>
+                    </a:solidFill>
+                  </a:tcPr>
+                </a:tc>
+                <a:extLst>
+                  <a:ext uri="{0D108BD9-81ED-4DB2-BD59-A6C34878D82A}">
+                    <a16:rowId xmlns:a16="http://schemas.microsoft.com/office/drawing/2014/main" val="10001"/>
+                  </a:ext>
+                </a:extLst>
+              </a:tr>
+              <a:tr h="0">
+                <a:tc>
+                  <a:txBody>
+                    <a:bodyPr/>
+                    <a:lstStyle/>
+                    <a:p>
+                      <a:pPr marL="0" indent="0" algn="l">
+                        <a:buNone/>
+                      </a:pPr>
+                      <a:r>
+                        <a:rPr lang="en-US" sz="1050" b="1" dirty="0">
+                          <a:solidFill>
+                            <a:srgbClr val="000000"/>
+                          </a:solidFill>
+                          <a:latin typeface="Times New Roman" pitchFamily="34" charset="0"/>
+                          <a:ea typeface="Times New Roman" pitchFamily="34" charset="-122"/>
+                          <a:cs typeface="Times New Roman" pitchFamily="34" charset="-120"/>
+                        </a:rPr>
+                        <a:t>Temporal Clinical GRU</a:t>
+                      </a:r>
+                      <a:endParaRPr lang="en-US" sz="1050" dirty="0">
+                        <a:latin typeface="Times New Roman" charset="0"/>
+                        <a:ea typeface="Times New Roman" charset="0"/>
+                        <a:cs typeface="Times New Roman" charset="0"/>
+                      </a:endParaRPr>
+                    </a:p>
+                  </a:txBody>
+                  <a:tcPr>
+                    <a:lnL w="6350" cap="flat" cmpd="sng" algn="ctr">
+                      <a:solidFill>
+                        <a:srgbClr val="BFBFBF"/>
+                      </a:solidFill>
+                      <a:prstDash val="solid"/>
+                      <a:round/>
+                      <a:headEnd type="none" w="med" len="med"/>
+                      <a:tailEnd type="none" w="med" len="med"/>
+                    </a:lnL>
+                    <a:lnR w="6350" cap="flat" cmpd="sng" algn="ctr">
+                      <a:solidFill>
+                        <a:srgbClr val="BFBFBF"/>
+                      </a:solidFill>
+                      <a:prstDash val="solid"/>
+                      <a:round/>
+                      <a:headEnd type="none" w="med" len="med"/>
+                      <a:tailEnd type="none" w="med" len="med"/>
+                    </a:lnR>
+                    <a:lnT w="6350" cap="flat" cmpd="sng" algn="ctr">
+                      <a:solidFill>
+                        <a:srgbClr val="BFBFBF"/>
+                      </a:solidFill>
+                      <a:prstDash val="solid"/>
+                      <a:round/>
+                      <a:headEnd type="none" w="med" len="med"/>
+                      <a:tailEnd type="none" w="med" len="med"/>
+                    </a:lnT>
+                    <a:lnB w="6350" cap="flat" cmpd="sng" algn="ctr">
+                      <a:solidFill>
+                        <a:srgbClr val="BFBFBF"/>
+                      </a:solidFill>
+                      <a:prstDash val="solid"/>
+                      <a:round/>
+                      <a:headEnd type="none" w="med" len="med"/>
+                      <a:tailEnd type="none" w="med" len="med"/>
+                    </a:lnB>
+                    <a:solidFill>
+                      <a:srgbClr val="DCEAF6"/>
+                    </a:solidFill>
+                  </a:tcPr>
+                </a:tc>
+                <a:tc>
+                  <a:txBody>
+                    <a:bodyPr/>
+                    <a:lstStyle/>
+                    <a:p>
+                      <a:pPr marL="0" indent="0" algn="l">
+                        <a:buNone/>
+                      </a:pPr>
+                      <a:r>
+                        <a:rPr lang="en-US" sz="1050" dirty="0">
+                          <a:solidFill>
+                            <a:srgbClr val="000000"/>
+                          </a:solidFill>
+                          <a:latin typeface="Times New Roman" pitchFamily="34" charset="0"/>
+                          <a:ea typeface="Times New Roman" pitchFamily="34" charset="-122"/>
+                          <a:cs typeface="Times New Roman" pitchFamily="34" charset="-120"/>
+                        </a:rPr>
+                        <a:t>Sequence of 19-dim visit vectors, (1, T, 19)</a:t>
+                      </a:r>
+                      <a:endParaRPr lang="en-US" sz="1050" dirty="0">
+                        <a:latin typeface="Times New Roman" charset="0"/>
+                        <a:ea typeface="Times New Roman" charset="0"/>
+                        <a:cs typeface="Times New Roman" charset="0"/>
+                      </a:endParaRPr>
+                    </a:p>
+                  </a:txBody>
+                  <a:tcPr>
+                    <a:lnL w="6350" cap="flat" cmpd="sng" algn="ctr">
+                      <a:solidFill>
+                        <a:srgbClr val="BFBFBF"/>
+                      </a:solidFill>
+                      <a:prstDash val="solid"/>
+                      <a:round/>
+                      <a:headEnd type="none" w="med" len="med"/>
+                      <a:tailEnd type="none" w="med" len="med"/>
+                    </a:lnL>
+                    <a:lnR w="6350" cap="flat" cmpd="sng" algn="ctr">
+                      <a:solidFill>
+                        <a:srgbClr val="BFBFBF"/>
+                      </a:solidFill>
+                      <a:prstDash val="solid"/>
+                      <a:round/>
+                      <a:headEnd type="none" w="med" len="med"/>
+                      <a:tailEnd type="none" w="med" len="med"/>
+                    </a:lnR>
+                    <a:lnT w="6350" cap="flat" cmpd="sng" algn="ctr">
+                      <a:solidFill>
+                        <a:srgbClr val="BFBFBF"/>
+                      </a:solidFill>
+                      <a:prstDash val="solid"/>
+                      <a:round/>
+                      <a:headEnd type="none" w="med" len="med"/>
+                      <a:tailEnd type="none" w="med" len="med"/>
+                    </a:lnT>
+                    <a:lnB w="6350" cap="flat" cmpd="sng" algn="ctr">
+                      <a:solidFill>
+                        <a:srgbClr val="BFBFBF"/>
+                      </a:solidFill>
+                      <a:prstDash val="solid"/>
+                      <a:round/>
+                      <a:headEnd type="none" w="med" len="med"/>
+                      <a:tailEnd type="none" w="med" len="med"/>
+                    </a:lnB>
+                    <a:solidFill>
+                      <a:srgbClr val="DCEAF6"/>
+                    </a:solidFill>
+                  </a:tcPr>
+                </a:tc>
+                <a:tc>
+                  <a:txBody>
+                    <a:bodyPr/>
+                    <a:lstStyle/>
+                    <a:p>
+                      <a:pPr marL="0" indent="0" algn="l">
+                        <a:buNone/>
+                      </a:pPr>
+                      <a:r>
+                        <a:rPr lang="en-US" sz="1050" dirty="0">
+                          <a:solidFill>
+                            <a:srgbClr val="000000"/>
+                          </a:solidFill>
+                          <a:latin typeface="Times New Roman" pitchFamily="34" charset="0"/>
+                          <a:ea typeface="Times New Roman" pitchFamily="34" charset="-122"/>
+                          <a:cs typeface="Times New Roman" pitchFamily="34" charset="-120"/>
+                        </a:rPr>
+                        <a:t>GRU(input=19, hidden=64, 1 layer) → hₙ[-1] → MLP head: Linear(64,32)→BatchNorm→ReLU→Dropout(0.3)→Linear(32,4)</a:t>
+                      </a:r>
+                      <a:endParaRPr lang="en-US" sz="1050" dirty="0">
+                        <a:latin typeface="Times New Roman" charset="0"/>
+                        <a:ea typeface="Times New Roman" charset="0"/>
+                        <a:cs typeface="Times New Roman" charset="0"/>
+                      </a:endParaRPr>
+                    </a:p>
+                  </a:txBody>
+                  <a:tcPr>
+                    <a:lnL w="6350" cap="flat" cmpd="sng" algn="ctr">
+                      <a:solidFill>
+                        <a:srgbClr val="BFBFBF"/>
+                      </a:solidFill>
+                      <a:prstDash val="solid"/>
+                      <a:round/>
+                      <a:headEnd type="none" w="med" len="med"/>
+                      <a:tailEnd type="none" w="med" len="med"/>
+                    </a:lnL>
+                    <a:lnR w="6350" cap="flat" cmpd="sng" algn="ctr">
+                      <a:solidFill>
+                        <a:srgbClr val="BFBFBF"/>
+                      </a:solidFill>
+                      <a:prstDash val="solid"/>
+                      <a:round/>
+                      <a:headEnd type="none" w="med" len="med"/>
+                      <a:tailEnd type="none" w="med" len="med"/>
+                    </a:lnR>
+                    <a:lnT w="6350" cap="flat" cmpd="sng" algn="ctr">
+                      <a:solidFill>
+                        <a:srgbClr val="BFBFBF"/>
+                      </a:solidFill>
+                      <a:prstDash val="solid"/>
+                      <a:round/>
+                      <a:headEnd type="none" w="med" len="med"/>
+                      <a:tailEnd type="none" w="med" len="med"/>
+                    </a:lnT>
+                    <a:lnB w="6350" cap="flat" cmpd="sng" algn="ctr">
+                      <a:solidFill>
+                        <a:srgbClr val="BFBFBF"/>
+                      </a:solidFill>
+                      <a:prstDash val="solid"/>
+                      <a:round/>
+                      <a:headEnd type="none" w="med" len="med"/>
+                      <a:tailEnd type="none" w="med" len="med"/>
+                    </a:lnB>
+                    <a:solidFill>
+                      <a:srgbClr val="DCEAF6"/>
+                    </a:solidFill>
+                  </a:tcPr>
+                </a:tc>
+                <a:tc>
+                  <a:txBody>
+                    <a:bodyPr/>
+                    <a:lstStyle/>
+                    <a:p>
+                      <a:pPr marL="0" indent="0" algn="l">
+                        <a:buNone/>
+                      </a:pPr>
+                      <a:r>
+                        <a:rPr lang="en-US" sz="1050" dirty="0">
+                          <a:solidFill>
+                            <a:srgbClr val="000000"/>
+                          </a:solidFill>
+                          <a:latin typeface="Times New Roman" pitchFamily="34" charset="0"/>
+                          <a:ea typeface="Times New Roman" pitchFamily="34" charset="-122"/>
+                          <a:cs typeface="Times New Roman" pitchFamily="34" charset="-120"/>
+                        </a:rPr>
+                        <a:t>Next-visit CDR class logits (4 classes) + Zₜ (64-dim)</a:t>
+                      </a:r>
+                      <a:endParaRPr lang="en-US" sz="1050" dirty="0">
+                        <a:latin typeface="Times New Roman" charset="0"/>
+                        <a:ea typeface="Times New Roman" charset="0"/>
+                        <a:cs typeface="Times New Roman" charset="0"/>
+                      </a:endParaRPr>
+                    </a:p>
+                  </a:txBody>
+                  <a:tcPr>
+                    <a:lnL w="6350" cap="flat" cmpd="sng" algn="ctr">
+                      <a:solidFill>
+                        <a:srgbClr val="BFBFBF"/>
+                      </a:solidFill>
+                      <a:prstDash val="solid"/>
+                      <a:round/>
+                      <a:headEnd type="none" w="med" len="med"/>
+                      <a:tailEnd type="none" w="med" len="med"/>
+                    </a:lnL>
+                    <a:lnR w="6350" cap="flat" cmpd="sng" algn="ctr">
+                      <a:solidFill>
+                        <a:srgbClr val="BFBFBF"/>
+                      </a:solidFill>
+                      <a:prstDash val="solid"/>
+                      <a:round/>
+                      <a:headEnd type="none" w="med" len="med"/>
+                      <a:tailEnd type="none" w="med" len="med"/>
+                    </a:lnR>
+                    <a:lnT w="6350" cap="flat" cmpd="sng" algn="ctr">
+                      <a:solidFill>
+                        <a:srgbClr val="BFBFBF"/>
+                      </a:solidFill>
+                      <a:prstDash val="solid"/>
+                      <a:round/>
+                      <a:headEnd type="none" w="med" len="med"/>
+                      <a:tailEnd type="none" w="med" len="med"/>
+                    </a:lnT>
+                    <a:lnB w="6350" cap="flat" cmpd="sng" algn="ctr">
+                      <a:solidFill>
+                        <a:srgbClr val="BFBFBF"/>
+                      </a:solidFill>
+                      <a:prstDash val="solid"/>
+                      <a:round/>
+                      <a:headEnd type="none" w="med" len="med"/>
+                      <a:tailEnd type="none" w="med" len="med"/>
+                    </a:lnB>
+                    <a:solidFill>
+                      <a:srgbClr val="DCEAF6"/>
+                    </a:solidFill>
+                  </a:tcPr>
+                </a:tc>
+                <a:extLst>
+                  <a:ext uri="{0D108BD9-81ED-4DB2-BD59-A6C34878D82A}">
+                    <a16:rowId xmlns:a16="http://schemas.microsoft.com/office/drawing/2014/main" val="10002"/>
+                  </a:ext>
+                </a:extLst>
+              </a:tr>
+              <a:tr h="0">
+                <a:tc>
+                  <a:txBody>
+                    <a:bodyPr/>
+                    <a:lstStyle/>
+                    <a:p>
+                      <a:pPr marL="0" indent="0" algn="l">
+                        <a:buNone/>
+                      </a:pPr>
+                      <a:r>
+                        <a:rPr lang="en-US" sz="1050" b="1" dirty="0">
+                          <a:solidFill>
+                            <a:srgbClr val="000000"/>
+                          </a:solidFill>
+                          <a:latin typeface="Times New Roman" pitchFamily="34" charset="0"/>
+                          <a:ea typeface="Times New Roman" pitchFamily="34" charset="-122"/>
+                          <a:cs typeface="Times New Roman" pitchFamily="34" charset="-120"/>
+                        </a:rPr>
+                        <a:t>MRI Scalar Encoder + Bimodal Fusion</a:t>
+                      </a:r>
+                      <a:endParaRPr lang="en-US" sz="1050" dirty="0">
+                        <a:latin typeface="Times New Roman" charset="0"/>
+                        <a:ea typeface="Times New Roman" charset="0"/>
+                        <a:cs typeface="Times New Roman" charset="0"/>
+                      </a:endParaRPr>
+                    </a:p>
+                  </a:txBody>
+                  <a:tcPr>
+                    <a:lnL w="6350" cap="flat" cmpd="sng" algn="ctr">
+                      <a:solidFill>
+                        <a:srgbClr val="BFBFBF"/>
+                      </a:solidFill>
+                      <a:prstDash val="solid"/>
+                      <a:round/>
+                      <a:headEnd type="none" w="med" len="med"/>
+                      <a:tailEnd type="none" w="med" len="med"/>
+                    </a:lnL>
+                    <a:lnR w="6350" cap="flat" cmpd="sng" algn="ctr">
+                      <a:solidFill>
+                        <a:srgbClr val="BFBFBF"/>
+                      </a:solidFill>
+                      <a:prstDash val="solid"/>
+                      <a:round/>
+                      <a:headEnd type="none" w="med" len="med"/>
+                      <a:tailEnd type="none" w="med" len="med"/>
+                    </a:lnR>
+                    <a:lnT w="6350" cap="flat" cmpd="sng" algn="ctr">
+                      <a:solidFill>
+                        <a:srgbClr val="BFBFBF"/>
+                      </a:solidFill>
+                      <a:prstDash val="solid"/>
+                      <a:round/>
+                      <a:headEnd type="none" w="med" len="med"/>
+                      <a:tailEnd type="none" w="med" len="med"/>
+                    </a:lnT>
+                    <a:lnB w="6350" cap="flat" cmpd="sng" algn="ctr">
+                      <a:solidFill>
+                        <a:srgbClr val="BFBFBF"/>
+                      </a:solidFill>
+                      <a:prstDash val="solid"/>
+                      <a:round/>
+                      <a:headEnd type="none" w="med" len="med"/>
+                      <a:tailEnd type="none" w="med" len="med"/>
+                    </a:lnB>
+                    <a:solidFill>
+                      <a:srgbClr val="FFFFFF"/>
+                    </a:solidFill>
+                  </a:tcPr>
+                </a:tc>
+                <a:tc>
+                  <a:txBody>
+                    <a:bodyPr/>
+                    <a:lstStyle/>
+                    <a:p>
+                      <a:pPr marL="0" indent="0" algn="l">
+                        <a:buNone/>
+                      </a:pPr>
+                      <a:r>
+                        <a:rPr lang="en-US" sz="1050" dirty="0">
+                          <a:solidFill>
+                            <a:srgbClr val="000000"/>
+                          </a:solidFill>
+                          <a:latin typeface="Times New Roman" pitchFamily="34" charset="0"/>
+                          <a:ea typeface="Times New Roman" pitchFamily="34" charset="-122"/>
+                          <a:cs typeface="Times New Roman" pitchFamily="34" charset="-120"/>
+                        </a:rPr>
+                        <a:t>MRI scalars (nWBV, eTIV, ASF, nwbvΔ), (1,4)</a:t>
+                      </a:r>
+                      <a:endParaRPr lang="en-US" sz="1050" dirty="0">
+                        <a:latin typeface="Times New Roman" charset="0"/>
+                        <a:ea typeface="Times New Roman" charset="0"/>
+                        <a:cs typeface="Times New Roman" charset="0"/>
+                      </a:endParaRPr>
+                    </a:p>
+                  </a:txBody>
+                  <a:tcPr>
+                    <a:lnL w="6350" cap="flat" cmpd="sng" algn="ctr">
+                      <a:solidFill>
+                        <a:srgbClr val="BFBFBF"/>
+                      </a:solidFill>
+                      <a:prstDash val="solid"/>
+                      <a:round/>
+                      <a:headEnd type="none" w="med" len="med"/>
+                      <a:tailEnd type="none" w="med" len="med"/>
+                    </a:lnL>
+                    <a:lnR w="6350" cap="flat" cmpd="sng" algn="ctr">
+                      <a:solidFill>
+                        <a:srgbClr val="BFBFBF"/>
+                      </a:solidFill>
+                      <a:prstDash val="solid"/>
+                      <a:round/>
+                      <a:headEnd type="none" w="med" len="med"/>
+                      <a:tailEnd type="none" w="med" len="med"/>
+                    </a:lnR>
+                    <a:lnT w="6350" cap="flat" cmpd="sng" algn="ctr">
+                      <a:solidFill>
+                        <a:srgbClr val="BFBFBF"/>
+                      </a:solidFill>
+                      <a:prstDash val="solid"/>
+                      <a:round/>
+                      <a:headEnd type="none" w="med" len="med"/>
+                      <a:tailEnd type="none" w="med" len="med"/>
+                    </a:lnT>
+                    <a:lnB w="6350" cap="flat" cmpd="sng" algn="ctr">
+                      <a:solidFill>
+                        <a:srgbClr val="BFBFBF"/>
+                      </a:solidFill>
+                      <a:prstDash val="solid"/>
+                      <a:round/>
+                      <a:headEnd type="none" w="med" len="med"/>
+                      <a:tailEnd type="none" w="med" len="med"/>
+                    </a:lnB>
+                    <a:solidFill>
+                      <a:srgbClr val="FFFFFF"/>
+                    </a:solidFill>
+                  </a:tcPr>
+                </a:tc>
+                <a:tc>
+                  <a:txBody>
+                    <a:bodyPr/>
+                    <a:lstStyle/>
+                    <a:p>
+                      <a:pPr marL="0" indent="0" algn="l">
+                        <a:buNone/>
+                      </a:pPr>
+                      <a:r>
+                        <a:rPr lang="en-US" sz="1050" dirty="0">
+                          <a:solidFill>
+                            <a:srgbClr val="000000"/>
+                          </a:solidFill>
+                          <a:latin typeface="Times New Roman" pitchFamily="34" charset="0"/>
+                          <a:ea typeface="Times New Roman" pitchFamily="34" charset="-122"/>
+                          <a:cs typeface="Times New Roman" pitchFamily="34" charset="-120"/>
+                        </a:rPr>
+                        <a:t>MLP: Linear(4,32)→BN→ReLU→Dropout→Linear(32,32)→BN→ReLU; concatenated with clinical embedding → Linear(96,48)→BN→ReLU→Dropout→Linear(48,4)</a:t>
+                      </a:r>
+                      <a:endParaRPr lang="en-US" sz="1050" dirty="0">
+                        <a:latin typeface="Times New Roman" charset="0"/>
+                        <a:ea typeface="Times New Roman" charset="0"/>
+                        <a:cs typeface="Times New Roman" charset="0"/>
+                      </a:endParaRPr>
+                    </a:p>
+                  </a:txBody>
+                  <a:tcPr>
+                    <a:lnL w="6350" cap="flat" cmpd="sng" algn="ctr">
+                      <a:solidFill>
+                        <a:srgbClr val="BFBFBF"/>
+                      </a:solidFill>
+                      <a:prstDash val="solid"/>
+                      <a:round/>
+                      <a:headEnd type="none" w="med" len="med"/>
+                      <a:tailEnd type="none" w="med" len="med"/>
+                    </a:lnL>
+                    <a:lnR w="6350" cap="flat" cmpd="sng" algn="ctr">
+                      <a:solidFill>
+                        <a:srgbClr val="BFBFBF"/>
+                      </a:solidFill>
+                      <a:prstDash val="solid"/>
+                      <a:round/>
+                      <a:headEnd type="none" w="med" len="med"/>
+                      <a:tailEnd type="none" w="med" len="med"/>
+                    </a:lnR>
+                    <a:lnT w="6350" cap="flat" cmpd="sng" algn="ctr">
+                      <a:solidFill>
+                        <a:srgbClr val="BFBFBF"/>
+                      </a:solidFill>
+                      <a:prstDash val="solid"/>
+                      <a:round/>
+                      <a:headEnd type="none" w="med" len="med"/>
+                      <a:tailEnd type="none" w="med" len="med"/>
+                    </a:lnT>
+                    <a:lnB w="6350" cap="flat" cmpd="sng" algn="ctr">
+                      <a:solidFill>
+                        <a:srgbClr val="BFBFBF"/>
+                      </a:solidFill>
+                      <a:prstDash val="solid"/>
+                      <a:round/>
+                      <a:headEnd type="none" w="med" len="med"/>
+                      <a:tailEnd type="none" w="med" len="med"/>
+                    </a:lnB>
+                    <a:solidFill>
+                      <a:srgbClr val="FFFFFF"/>
+                    </a:solidFill>
+                  </a:tcPr>
+                </a:tc>
+                <a:tc>
+                  <a:txBody>
+                    <a:bodyPr/>
+                    <a:lstStyle/>
+                    <a:p>
+                      <a:pPr marL="0" indent="0" algn="l">
+                        <a:buNone/>
+                      </a:pPr>
+                      <a:r>
+                        <a:rPr lang="en-US" sz="1050" dirty="0">
+                          <a:solidFill>
+                            <a:srgbClr val="000000"/>
+                          </a:solidFill>
+                          <a:latin typeface="Times New Roman" pitchFamily="34" charset="0"/>
+                          <a:ea typeface="Times New Roman" pitchFamily="34" charset="-122"/>
+                          <a:cs typeface="Times New Roman" pitchFamily="34" charset="-120"/>
+                        </a:rPr>
+                        <a:t>Next-visit CDR class logits (4 classes) + Zₜ (96-dim)</a:t>
+                      </a:r>
+                      <a:endParaRPr lang="en-US" sz="1050" dirty="0">
+                        <a:latin typeface="Times New Roman" charset="0"/>
+                        <a:ea typeface="Times New Roman" charset="0"/>
+                        <a:cs typeface="Times New Roman" charset="0"/>
+                      </a:endParaRPr>
+                    </a:p>
+                  </a:txBody>
+                  <a:tcPr>
+                    <a:lnL w="6350" cap="flat" cmpd="sng" algn="ctr">
+                      <a:solidFill>
+                        <a:srgbClr val="BFBFBF"/>
+                      </a:solidFill>
+                      <a:prstDash val="solid"/>
+                      <a:round/>
+                      <a:headEnd type="none" w="med" len="med"/>
+                      <a:tailEnd type="none" w="med" len="med"/>
+                    </a:lnL>
+                    <a:lnR w="6350" cap="flat" cmpd="sng" algn="ctr">
+                      <a:solidFill>
+                        <a:srgbClr val="BFBFBF"/>
+                      </a:solidFill>
+                      <a:prstDash val="solid"/>
+                      <a:round/>
+                      <a:headEnd type="none" w="med" len="med"/>
+                      <a:tailEnd type="none" w="med" len="med"/>
+                    </a:lnR>
+                    <a:lnT w="6350" cap="flat" cmpd="sng" algn="ctr">
+                      <a:solidFill>
+                        <a:srgbClr val="BFBFBF"/>
+                      </a:solidFill>
+                      <a:prstDash val="solid"/>
+                      <a:round/>
+                      <a:headEnd type="none" w="med" len="med"/>
+                      <a:tailEnd type="none" w="med" len="med"/>
+                    </a:lnT>
+                    <a:lnB w="6350" cap="flat" cmpd="sng" algn="ctr">
+                      <a:solidFill>
+                        <a:srgbClr val="BFBFBF"/>
+                      </a:solidFill>
+                      <a:prstDash val="solid"/>
+                      <a:round/>
+                      <a:headEnd type="none" w="med" len="med"/>
+                      <a:tailEnd type="none" w="med" len="med"/>
+                    </a:lnB>
+                    <a:solidFill>
+                      <a:srgbClr val="FFFFFF"/>
+                    </a:solidFill>
+                  </a:tcPr>
+                </a:tc>
+                <a:extLst>
+                  <a:ext uri="{0D108BD9-81ED-4DB2-BD59-A6C34878D82A}">
+                    <a16:rowId xmlns:a16="http://schemas.microsoft.com/office/drawing/2014/main" val="10003"/>
+                  </a:ext>
+                </a:extLst>
+              </a:tr>
+              <a:tr h="0">
+                <a:tc>
+                  <a:txBody>
+                    <a:bodyPr/>
+                    <a:lstStyle/>
+                    <a:p>
+                      <a:pPr marL="0" indent="0" algn="l">
+                        <a:buNone/>
+                      </a:pPr>
+                      <a:r>
+                        <a:rPr lang="en-US" sz="1050" b="1" dirty="0">
+                          <a:solidFill>
+                            <a:srgbClr val="000000"/>
+                          </a:solidFill>
+                          <a:latin typeface="Times New Roman" pitchFamily="34" charset="0"/>
+                          <a:ea typeface="Times New Roman" pitchFamily="34" charset="-122"/>
+                          <a:cs typeface="Times New Roman" pitchFamily="34" charset="-120"/>
+                        </a:rPr>
+                        <a:t>EEG Spectral Screener</a:t>
+                      </a:r>
+                      <a:endParaRPr lang="en-US" sz="1050" dirty="0">
+                        <a:latin typeface="Times New Roman" charset="0"/>
+                        <a:ea typeface="Times New Roman" charset="0"/>
+                        <a:cs typeface="Times New Roman" charset="0"/>
+                      </a:endParaRPr>
+                    </a:p>
+                  </a:txBody>
+                  <a:tcPr>
+                    <a:lnL w="6350" cap="flat" cmpd="sng" algn="ctr">
+                      <a:solidFill>
+                        <a:srgbClr val="BFBFBF"/>
+                      </a:solidFill>
+                      <a:prstDash val="solid"/>
+                      <a:round/>
+                      <a:headEnd type="none" w="med" len="med"/>
+                      <a:tailEnd type="none" w="med" len="med"/>
+                    </a:lnL>
+                    <a:lnR w="6350" cap="flat" cmpd="sng" algn="ctr">
+                      <a:solidFill>
+                        <a:srgbClr val="BFBFBF"/>
+                      </a:solidFill>
+                      <a:prstDash val="solid"/>
+                      <a:round/>
+                      <a:headEnd type="none" w="med" len="med"/>
+                      <a:tailEnd type="none" w="med" len="med"/>
+                    </a:lnR>
+                    <a:lnT w="6350" cap="flat" cmpd="sng" algn="ctr">
+                      <a:solidFill>
+                        <a:srgbClr val="BFBFBF"/>
+                      </a:solidFill>
+                      <a:prstDash val="solid"/>
+                      <a:round/>
+                      <a:headEnd type="none" w="med" len="med"/>
+                      <a:tailEnd type="none" w="med" len="med"/>
+                    </a:lnT>
+                    <a:lnB w="6350" cap="flat" cmpd="sng" algn="ctr">
+                      <a:solidFill>
+                        <a:srgbClr val="BFBFBF"/>
+                      </a:solidFill>
+                      <a:prstDash val="solid"/>
+                      <a:round/>
+                      <a:headEnd type="none" w="med" len="med"/>
+                      <a:tailEnd type="none" w="med" len="med"/>
+                    </a:lnB>
+                    <a:solidFill>
+                      <a:srgbClr val="DCEAF6"/>
+                    </a:solidFill>
+                  </a:tcPr>
+                </a:tc>
+                <a:tc>
+                  <a:txBody>
+                    <a:bodyPr/>
+                    <a:lstStyle/>
+                    <a:p>
+                      <a:pPr marL="0" indent="0" algn="l">
+                        <a:buNone/>
+                      </a:pPr>
+                      <a:r>
+                        <a:rPr lang="en-US" sz="1050" dirty="0">
+                          <a:solidFill>
+                            <a:srgbClr val="000000"/>
+                          </a:solidFill>
+                          <a:latin typeface="Times New Roman" pitchFamily="34" charset="0"/>
+                          <a:ea typeface="Times New Roman" pitchFamily="34" charset="-122"/>
+                          <a:cs typeface="Times New Roman" pitchFamily="34" charset="-120"/>
+                        </a:rPr>
+                        <a:t>107-dim spectral feature vector (12 measured, rest imputed)</a:t>
+                      </a:r>
+                      <a:endParaRPr lang="en-US" sz="1050" dirty="0">
+                        <a:latin typeface="Times New Roman" charset="0"/>
+                        <a:ea typeface="Times New Roman" charset="0"/>
+                        <a:cs typeface="Times New Roman" charset="0"/>
+                      </a:endParaRPr>
+                    </a:p>
+                  </a:txBody>
+                  <a:tcPr>
+                    <a:lnL w="6350" cap="flat" cmpd="sng" algn="ctr">
+                      <a:solidFill>
+                        <a:srgbClr val="BFBFBF"/>
+                      </a:solidFill>
+                      <a:prstDash val="solid"/>
+                      <a:round/>
+                      <a:headEnd type="none" w="med" len="med"/>
+                      <a:tailEnd type="none" w="med" len="med"/>
+                    </a:lnL>
+                    <a:lnR w="6350" cap="flat" cmpd="sng" algn="ctr">
+                      <a:solidFill>
+                        <a:srgbClr val="BFBFBF"/>
+                      </a:solidFill>
+                      <a:prstDash val="solid"/>
+                      <a:round/>
+                      <a:headEnd type="none" w="med" len="med"/>
+                      <a:tailEnd type="none" w="med" len="med"/>
+                    </a:lnR>
+                    <a:lnT w="6350" cap="flat" cmpd="sng" algn="ctr">
+                      <a:solidFill>
+                        <a:srgbClr val="BFBFBF"/>
+                      </a:solidFill>
+                      <a:prstDash val="solid"/>
+                      <a:round/>
+                      <a:headEnd type="none" w="med" len="med"/>
+                      <a:tailEnd type="none" w="med" len="med"/>
+                    </a:lnT>
+                    <a:lnB w="6350" cap="flat" cmpd="sng" algn="ctr">
+                      <a:solidFill>
+                        <a:srgbClr val="BFBFBF"/>
+                      </a:solidFill>
+                      <a:prstDash val="solid"/>
+                      <a:round/>
+                      <a:headEnd type="none" w="med" len="med"/>
+                      <a:tailEnd type="none" w="med" len="med"/>
+                    </a:lnB>
+                    <a:solidFill>
+                      <a:srgbClr val="DCEAF6"/>
+                    </a:solidFill>
+                  </a:tcPr>
+                </a:tc>
+                <a:tc>
+                  <a:txBody>
+                    <a:bodyPr/>
+                    <a:lstStyle/>
+                    <a:p>
+                      <a:pPr marL="0" indent="0" algn="l">
+                        <a:buNone/>
+                      </a:pPr>
+                      <a:r>
+                        <a:rPr lang="en-US" sz="1050" dirty="0">
+                          <a:solidFill>
+                            <a:srgbClr val="000000"/>
+                          </a:solidFill>
+                          <a:latin typeface="Times New Roman" pitchFamily="34" charset="0"/>
+                          <a:ea typeface="Times New Roman" pitchFamily="34" charset="-122"/>
+                          <a:cs typeface="Times New Roman" pitchFamily="34" charset="-120"/>
+                        </a:rPr>
+                        <a:t>MLP: Linear(107,128)→BN→ReLU→Dropout(0.4)→Linear(128,64)→BN→ReLU→Dropout→Linear(64,64)→BN→ReLU→Linear(64,2)</a:t>
+                      </a:r>
+                      <a:endParaRPr lang="en-US" sz="1050" dirty="0">
+                        <a:latin typeface="Times New Roman" charset="0"/>
+                        <a:ea typeface="Times New Roman" charset="0"/>
+                        <a:cs typeface="Times New Roman" charset="0"/>
+                      </a:endParaRPr>
+                    </a:p>
+                  </a:txBody>
+                  <a:tcPr>
+                    <a:lnL w="6350" cap="flat" cmpd="sng" algn="ctr">
+                      <a:solidFill>
+                        <a:srgbClr val="BFBFBF"/>
+                      </a:solidFill>
+                      <a:prstDash val="solid"/>
+                      <a:round/>
+                      <a:headEnd type="none" w="med" len="med"/>
+                      <a:tailEnd type="none" w="med" len="med"/>
+                    </a:lnL>
+                    <a:lnR w="6350" cap="flat" cmpd="sng" algn="ctr">
+                      <a:solidFill>
+                        <a:srgbClr val="BFBFBF"/>
+                      </a:solidFill>
+                      <a:prstDash val="solid"/>
+                      <a:round/>
+                      <a:headEnd type="none" w="med" len="med"/>
+                      <a:tailEnd type="none" w="med" len="med"/>
+                    </a:lnR>
+                    <a:lnT w="6350" cap="flat" cmpd="sng" algn="ctr">
+                      <a:solidFill>
+                        <a:srgbClr val="BFBFBF"/>
+                      </a:solidFill>
+                      <a:prstDash val="solid"/>
+                      <a:round/>
+                      <a:headEnd type="none" w="med" len="med"/>
+                      <a:tailEnd type="none" w="med" len="med"/>
+                    </a:lnT>
+                    <a:lnB w="6350" cap="flat" cmpd="sng" algn="ctr">
+                      <a:solidFill>
+                        <a:srgbClr val="BFBFBF"/>
+                      </a:solidFill>
+                      <a:prstDash val="solid"/>
+                      <a:round/>
+                      <a:headEnd type="none" w="med" len="med"/>
+                      <a:tailEnd type="none" w="med" len="med"/>
+                    </a:lnB>
+                    <a:solidFill>
+                      <a:srgbClr val="DCEAF6"/>
+                    </a:solidFill>
+                  </a:tcPr>
+                </a:tc>
+                <a:tc>
+                  <a:txBody>
+                    <a:bodyPr/>
+                    <a:lstStyle/>
+                    <a:p>
+                      <a:pPr marL="0" indent="0" algn="l">
+                        <a:buNone/>
+                      </a:pPr>
+                      <a:r>
+                        <a:rPr lang="en-US" sz="1050" dirty="0">
+                          <a:solidFill>
+                            <a:srgbClr val="000000"/>
+                          </a:solidFill>
+                          <a:latin typeface="Times New Roman" pitchFamily="34" charset="0"/>
+                          <a:ea typeface="Times New Roman" pitchFamily="34" charset="-122"/>
+                          <a:cs typeface="Times New Roman" pitchFamily="34" charset="-120"/>
+                        </a:rPr>
+                        <a:t>Binary class: Disease (AD/FTD) vs Control</a:t>
+                      </a:r>
+                      <a:endParaRPr lang="en-US" sz="1050" dirty="0">
+                        <a:latin typeface="Times New Roman" charset="0"/>
+                        <a:ea typeface="Times New Roman" charset="0"/>
+                        <a:cs typeface="Times New Roman" charset="0"/>
+                      </a:endParaRPr>
+                    </a:p>
+                  </a:txBody>
+                  <a:tcPr>
+                    <a:lnL w="6350" cap="flat" cmpd="sng" algn="ctr">
+                      <a:solidFill>
+                        <a:srgbClr val="BFBFBF"/>
+                      </a:solidFill>
+                      <a:prstDash val="solid"/>
+                      <a:round/>
+                      <a:headEnd type="none" w="med" len="med"/>
+                      <a:tailEnd type="none" w="med" len="med"/>
+                    </a:lnL>
+                    <a:lnR w="6350" cap="flat" cmpd="sng" algn="ctr">
+                      <a:solidFill>
+                        <a:srgbClr val="BFBFBF"/>
+                      </a:solidFill>
+                      <a:prstDash val="solid"/>
+                      <a:round/>
+                      <a:headEnd type="none" w="med" len="med"/>
+                      <a:tailEnd type="none" w="med" len="med"/>
+                    </a:lnR>
+                    <a:lnT w="6350" cap="flat" cmpd="sng" algn="ctr">
+                      <a:solidFill>
+                        <a:srgbClr val="BFBFBF"/>
+                      </a:solidFill>
+                      <a:prstDash val="solid"/>
+                      <a:round/>
+                      <a:headEnd type="none" w="med" len="med"/>
+                      <a:tailEnd type="none" w="med" len="med"/>
+                    </a:lnT>
+                    <a:lnB w="6350" cap="flat" cmpd="sng" algn="ctr">
+                      <a:solidFill>
+                        <a:srgbClr val="BFBFBF"/>
+                      </a:solidFill>
+                      <a:prstDash val="solid"/>
+                      <a:round/>
+                      <a:headEnd type="none" w="med" len="med"/>
+                      <a:tailEnd type="none" w="med" len="med"/>
+                    </a:lnB>
+                    <a:solidFill>
+                      <a:srgbClr val="DCEAF6"/>
+                    </a:solidFill>
+                  </a:tcPr>
+                </a:tc>
+                <a:extLst>
+                  <a:ext uri="{0D108BD9-81ED-4DB2-BD59-A6C34878D82A}">
+                    <a16:rowId xmlns:a16="http://schemas.microsoft.com/office/drawing/2014/main" val="10004"/>
+                  </a:ext>
+                </a:extLst>
+              </a:tr>
+            </a:tbl>
+          </a:graphicData>
+        </a:graphic>
+      </p:graphicFrame>
+      <p:graphicFrame>
+        <p:nvGraphicFramePr>
+          <p:cNvPr id="8" name="Table 0"/>
+          <p:cNvGraphicFramePr>
+            <a:graphicFrameLocks noGrp="1"/>
+          </p:cNvGraphicFramePr>
+          <p:nvPr>
+            <p:extLst>
+              <p:ext uri="{D42A27DB-BD31-4B8C-83A1-F6EECF244321}">
+                <p14:modId xmlns:p14="http://schemas.microsoft.com/office/powerpoint/2010/main" val="2255474932"/>
+              </p:ext>
+            </p:extLst>
+          </p:nvPr>
+        </p:nvGraphicFramePr>
+        <p:xfrm>
+          <a:off x="640080" y="4255530"/>
+          <a:ext cx="11521440" cy="1920240"/>
+        </p:xfrm>
+        <a:graphic>
+          <a:graphicData uri="http://schemas.openxmlformats.org/drawingml/2006/table">
+            <a:tbl>
+              <a:tblPr/>
+              <a:tblGrid>
+                <a:gridCol w="2377440">
+                  <a:extLst>
+                    <a:ext uri="{9D8B030D-6E8A-4147-A177-3AD203B41FA5}">
+                      <a16:colId xmlns:a16="http://schemas.microsoft.com/office/drawing/2014/main" val="20000"/>
+                    </a:ext>
+                  </a:extLst>
+                </a:gridCol>
+                <a:gridCol w="2834640">
+                  <a:extLst>
+                    <a:ext uri="{9D8B030D-6E8A-4147-A177-3AD203B41FA5}">
+                      <a16:colId xmlns:a16="http://schemas.microsoft.com/office/drawing/2014/main" val="20001"/>
+                    </a:ext>
+                  </a:extLst>
+                </a:gridCol>
+                <a:gridCol w="3840480">
+                  <a:extLst>
+                    <a:ext uri="{9D8B030D-6E8A-4147-A177-3AD203B41FA5}">
+                      <a16:colId xmlns:a16="http://schemas.microsoft.com/office/drawing/2014/main" val="20002"/>
+                    </a:ext>
+                  </a:extLst>
+                </a:gridCol>
+                <a:gridCol w="2468880">
+                  <a:extLst>
+                    <a:ext uri="{9D8B030D-6E8A-4147-A177-3AD203B41FA5}">
+                      <a16:colId xmlns:a16="http://schemas.microsoft.com/office/drawing/2014/main" val="20003"/>
+                    </a:ext>
+                  </a:extLst>
+                </a:gridCol>
+              </a:tblGrid>
+              <a:tr h="0">
+                <a:tc>
+                  <a:txBody>
+                    <a:bodyPr/>
+                    <a:lstStyle/>
+                    <a:p>
+                      <a:pPr marL="0" indent="0" algn="ctr">
+                        <a:buNone/>
+                      </a:pPr>
+                      <a:r>
+                        <a:rPr lang="en-US" sz="1200" b="1" dirty="0">
+                          <a:solidFill>
+                            <a:srgbClr val="FFFFFF"/>
+                          </a:solidFill>
+                          <a:latin typeface="Times New Roman" pitchFamily="34" charset="0"/>
+                          <a:ea typeface="Times New Roman" pitchFamily="34" charset="-122"/>
+                          <a:cs typeface="Times New Roman" pitchFamily="34" charset="-120"/>
+                        </a:rPr>
+                        <a:t>Module</a:t>
+                      </a:r>
+                      <a:endParaRPr lang="en-US" sz="1200" dirty="0">
+                        <a:latin typeface="Times New Roman" charset="0"/>
+                        <a:ea typeface="Times New Roman" charset="0"/>
+                        <a:cs typeface="Times New Roman" charset="0"/>
+                      </a:endParaRPr>
+                    </a:p>
+                  </a:txBody>
+                  <a:tcPr anchor="ctr">
+                    <a:lnL w="6350" cap="flat" cmpd="sng" algn="ctr">
+                      <a:solidFill>
+                        <a:srgbClr val="BFBFBF"/>
+                      </a:solidFill>
+                      <a:prstDash val="solid"/>
+                      <a:round/>
+                      <a:headEnd type="none" w="med" len="med"/>
+                      <a:tailEnd type="none" w="med" len="med"/>
+                    </a:lnL>
+                    <a:lnR w="6350" cap="flat" cmpd="sng" algn="ctr">
+                      <a:solidFill>
+                        <a:srgbClr val="BFBFBF"/>
+                      </a:solidFill>
+                      <a:prstDash val="solid"/>
+                      <a:round/>
+                      <a:headEnd type="none" w="med" len="med"/>
+                      <a:tailEnd type="none" w="med" len="med"/>
+                    </a:lnR>
+                    <a:lnT w="6350" cap="flat" cmpd="sng" algn="ctr">
+                      <a:solidFill>
+                        <a:srgbClr val="BFBFBF"/>
+                      </a:solidFill>
+                      <a:prstDash val="solid"/>
+                      <a:round/>
+                      <a:headEnd type="none" w="med" len="med"/>
+                      <a:tailEnd type="none" w="med" len="med"/>
+                    </a:lnT>
+                    <a:lnB w="6350" cap="flat" cmpd="sng" algn="ctr">
+                      <a:solidFill>
+                        <a:srgbClr val="BFBFBF"/>
+                      </a:solidFill>
+                      <a:prstDash val="solid"/>
+                      <a:round/>
+                      <a:headEnd type="none" w="med" len="med"/>
+                      <a:tailEnd type="none" w="med" len="med"/>
+                    </a:lnB>
+                    <a:solidFill>
+                      <a:srgbClr val="558ED3"/>
+                    </a:solidFill>
+                  </a:tcPr>
+                </a:tc>
+                <a:tc>
+                  <a:txBody>
+                    <a:bodyPr/>
+                    <a:lstStyle/>
+                    <a:p>
+                      <a:pPr marL="0" indent="0" algn="ctr">
+                        <a:buNone/>
+                      </a:pPr>
+                      <a:r>
+                        <a:rPr lang="en-US" sz="1200" b="1" dirty="0">
+                          <a:solidFill>
+                            <a:srgbClr val="FFFFFF"/>
+                          </a:solidFill>
+                          <a:latin typeface="Times New Roman" pitchFamily="34" charset="0"/>
+                          <a:ea typeface="Times New Roman" pitchFamily="34" charset="-122"/>
+                          <a:cs typeface="Times New Roman" pitchFamily="34" charset="-120"/>
+                        </a:rPr>
+                        <a:t>Input</a:t>
+                      </a:r>
+                      <a:endParaRPr lang="en-US" sz="1200" dirty="0">
+                        <a:latin typeface="Times New Roman" charset="0"/>
+                        <a:ea typeface="Times New Roman" charset="0"/>
+                        <a:cs typeface="Times New Roman" charset="0"/>
+                      </a:endParaRPr>
+                    </a:p>
+                  </a:txBody>
+                  <a:tcPr anchor="ctr">
+                    <a:lnL w="6350" cap="flat" cmpd="sng" algn="ctr">
+                      <a:solidFill>
+                        <a:srgbClr val="BFBFBF"/>
+                      </a:solidFill>
+                      <a:prstDash val="solid"/>
+                      <a:round/>
+                      <a:headEnd type="none" w="med" len="med"/>
+                      <a:tailEnd type="none" w="med" len="med"/>
+                    </a:lnL>
+                    <a:lnR w="6350" cap="flat" cmpd="sng" algn="ctr">
+                      <a:solidFill>
+                        <a:srgbClr val="BFBFBF"/>
+                      </a:solidFill>
+                      <a:prstDash val="solid"/>
+                      <a:round/>
+                      <a:headEnd type="none" w="med" len="med"/>
+                      <a:tailEnd type="none" w="med" len="med"/>
+                    </a:lnR>
+                    <a:lnT w="6350" cap="flat" cmpd="sng" algn="ctr">
+                      <a:solidFill>
+                        <a:srgbClr val="BFBFBF"/>
+                      </a:solidFill>
+                      <a:prstDash val="solid"/>
+                      <a:round/>
+                      <a:headEnd type="none" w="med" len="med"/>
+                      <a:tailEnd type="none" w="med" len="med"/>
+                    </a:lnT>
+                    <a:lnB w="6350" cap="flat" cmpd="sng" algn="ctr">
+                      <a:solidFill>
+                        <a:srgbClr val="BFBFBF"/>
+                      </a:solidFill>
+                      <a:prstDash val="solid"/>
+                      <a:round/>
+                      <a:headEnd type="none" w="med" len="med"/>
+                      <a:tailEnd type="none" w="med" len="med"/>
+                    </a:lnB>
+                    <a:solidFill>
+                      <a:srgbClr val="558ED3"/>
+                    </a:solidFill>
+                  </a:tcPr>
+                </a:tc>
+                <a:tc>
+                  <a:txBody>
+                    <a:bodyPr/>
+                    <a:lstStyle/>
+                    <a:p>
+                      <a:pPr marL="0" indent="0" algn="ctr">
+                        <a:buNone/>
+                      </a:pPr>
+                      <a:r>
+                        <a:rPr lang="en-US" sz="1200" b="1" dirty="0">
+                          <a:solidFill>
+                            <a:srgbClr val="FFFFFF"/>
+                          </a:solidFill>
+                          <a:latin typeface="Times New Roman" pitchFamily="34" charset="0"/>
+                          <a:ea typeface="Times New Roman" pitchFamily="34" charset="-122"/>
+                          <a:cs typeface="Times New Roman" pitchFamily="34" charset="-120"/>
+                        </a:rPr>
+                        <a:t>Algorithm / Model</a:t>
+                      </a:r>
+                      <a:endParaRPr lang="en-US" sz="1200" dirty="0">
+                        <a:latin typeface="Times New Roman" charset="0"/>
+                        <a:ea typeface="Times New Roman" charset="0"/>
+                        <a:cs typeface="Times New Roman" charset="0"/>
+                      </a:endParaRPr>
+                    </a:p>
+                  </a:txBody>
+                  <a:tcPr anchor="ctr">
+                    <a:lnL w="6350" cap="flat" cmpd="sng" algn="ctr">
+                      <a:solidFill>
+                        <a:srgbClr val="BFBFBF"/>
+                      </a:solidFill>
+                      <a:prstDash val="solid"/>
+                      <a:round/>
+                      <a:headEnd type="none" w="med" len="med"/>
+                      <a:tailEnd type="none" w="med" len="med"/>
+                    </a:lnL>
+                    <a:lnR w="6350" cap="flat" cmpd="sng" algn="ctr">
+                      <a:solidFill>
+                        <a:srgbClr val="BFBFBF"/>
+                      </a:solidFill>
+                      <a:prstDash val="solid"/>
+                      <a:round/>
+                      <a:headEnd type="none" w="med" len="med"/>
+                      <a:tailEnd type="none" w="med" len="med"/>
+                    </a:lnR>
+                    <a:lnT w="6350" cap="flat" cmpd="sng" algn="ctr">
+                      <a:solidFill>
+                        <a:srgbClr val="BFBFBF"/>
+                      </a:solidFill>
+                      <a:prstDash val="solid"/>
+                      <a:round/>
+                      <a:headEnd type="none" w="med" len="med"/>
+                      <a:tailEnd type="none" w="med" len="med"/>
+                    </a:lnT>
+                    <a:lnB w="6350" cap="flat" cmpd="sng" algn="ctr">
+                      <a:solidFill>
+                        <a:srgbClr val="BFBFBF"/>
+                      </a:solidFill>
+                      <a:prstDash val="solid"/>
+                      <a:round/>
+                      <a:headEnd type="none" w="med" len="med"/>
+                      <a:tailEnd type="none" w="med" len="med"/>
+                    </a:lnB>
+                    <a:solidFill>
+                      <a:srgbClr val="558ED3"/>
+                    </a:solidFill>
+                  </a:tcPr>
+                </a:tc>
+                <a:tc>
+                  <a:txBody>
+                    <a:bodyPr/>
+                    <a:lstStyle/>
+                    <a:p>
+                      <a:pPr marL="0" indent="0" algn="ctr">
+                        <a:buNone/>
+                      </a:pPr>
+                      <a:r>
+                        <a:rPr lang="en-US" sz="1200" b="1" dirty="0">
+                          <a:solidFill>
+                            <a:srgbClr val="FFFFFF"/>
+                          </a:solidFill>
+                          <a:latin typeface="Times New Roman" pitchFamily="34" charset="0"/>
+                          <a:ea typeface="Times New Roman" pitchFamily="34" charset="-122"/>
+                          <a:cs typeface="Times New Roman" pitchFamily="34" charset="-120"/>
+                        </a:rPr>
+                        <a:t>Output</a:t>
+                      </a:r>
+                      <a:endParaRPr lang="en-US" sz="1200" dirty="0">
+                        <a:latin typeface="Times New Roman" charset="0"/>
+                        <a:ea typeface="Times New Roman" charset="0"/>
+                        <a:cs typeface="Times New Roman" charset="0"/>
+                      </a:endParaRPr>
+                    </a:p>
+                  </a:txBody>
+                  <a:tcPr anchor="ctr">
+                    <a:lnL w="6350" cap="flat" cmpd="sng" algn="ctr">
+                      <a:solidFill>
+                        <a:srgbClr val="BFBFBF"/>
+                      </a:solidFill>
+                      <a:prstDash val="solid"/>
+                      <a:round/>
+                      <a:headEnd type="none" w="med" len="med"/>
+                      <a:tailEnd type="none" w="med" len="med"/>
+                    </a:lnL>
+                    <a:lnR w="6350" cap="flat" cmpd="sng" algn="ctr">
+                      <a:solidFill>
+                        <a:srgbClr val="BFBFBF"/>
+                      </a:solidFill>
+                      <a:prstDash val="solid"/>
+                      <a:round/>
+                      <a:headEnd type="none" w="med" len="med"/>
+                      <a:tailEnd type="none" w="med" len="med"/>
+                    </a:lnR>
+                    <a:lnT w="6350" cap="flat" cmpd="sng" algn="ctr">
+                      <a:solidFill>
+                        <a:srgbClr val="BFBFBF"/>
+                      </a:solidFill>
+                      <a:prstDash val="solid"/>
+                      <a:round/>
+                      <a:headEnd type="none" w="med" len="med"/>
+                      <a:tailEnd type="none" w="med" len="med"/>
+                    </a:lnT>
+                    <a:lnB w="6350" cap="flat" cmpd="sng" algn="ctr">
+                      <a:solidFill>
+                        <a:srgbClr val="BFBFBF"/>
+                      </a:solidFill>
+                      <a:prstDash val="solid"/>
+                      <a:round/>
+                      <a:headEnd type="none" w="med" len="med"/>
+                      <a:tailEnd type="none" w="med" len="med"/>
+                    </a:lnB>
+                    <a:solidFill>
+                      <a:srgbClr val="558ED3"/>
+                    </a:solidFill>
+                  </a:tcPr>
+                </a:tc>
+                <a:extLst>
+                  <a:ext uri="{0D108BD9-81ED-4DB2-BD59-A6C34878D82A}">
+                    <a16:rowId xmlns:a16="http://schemas.microsoft.com/office/drawing/2014/main" val="10000"/>
+                  </a:ext>
+                </a:extLst>
+              </a:tr>
+              <a:tr h="0">
+                <a:tc>
+                  <a:txBody>
+                    <a:bodyPr/>
+                    <a:lstStyle/>
+                    <a:p>
+                      <a:pPr marL="0" indent="0" algn="l">
+                        <a:buNone/>
+                      </a:pPr>
+                      <a:r>
+                        <a:rPr lang="en-US" sz="1050" b="1" dirty="0">
+                          <a:solidFill>
+                            <a:srgbClr val="000000"/>
+                          </a:solidFill>
+                          <a:latin typeface="Times New Roman" pitchFamily="34" charset="0"/>
+                          <a:ea typeface="Times New Roman" pitchFamily="34" charset="-122"/>
+                          <a:cs typeface="Times New Roman" pitchFamily="34" charset="-120"/>
+                        </a:rPr>
+                        <a:t>Digital Brain Twin Extractor</a:t>
+                      </a:r>
+                      <a:endParaRPr lang="en-US" sz="1050" dirty="0">
+                        <a:latin typeface="Times New Roman" charset="0"/>
+                        <a:ea typeface="Times New Roman" charset="0"/>
+                        <a:cs typeface="Times New Roman" charset="0"/>
+                      </a:endParaRPr>
+                    </a:p>
+                  </a:txBody>
+                  <a:tcPr>
+                    <a:lnL w="6350" cap="flat" cmpd="sng" algn="ctr">
+                      <a:solidFill>
+                        <a:srgbClr val="BFBFBF"/>
+                      </a:solidFill>
+                      <a:prstDash val="solid"/>
+                      <a:round/>
+                      <a:headEnd type="none" w="med" len="med"/>
+                      <a:tailEnd type="none" w="med" len="med"/>
+                    </a:lnL>
+                    <a:lnR w="6350" cap="flat" cmpd="sng" algn="ctr">
+                      <a:solidFill>
+                        <a:srgbClr val="BFBFBF"/>
+                      </a:solidFill>
+                      <a:prstDash val="solid"/>
+                      <a:round/>
+                      <a:headEnd type="none" w="med" len="med"/>
+                      <a:tailEnd type="none" w="med" len="med"/>
+                    </a:lnR>
+                    <a:lnT w="6350" cap="flat" cmpd="sng" algn="ctr">
+                      <a:solidFill>
+                        <a:srgbClr val="BFBFBF"/>
+                      </a:solidFill>
+                      <a:prstDash val="solid"/>
+                      <a:round/>
+                      <a:headEnd type="none" w="med" len="med"/>
+                      <a:tailEnd type="none" w="med" len="med"/>
+                    </a:lnT>
+                    <a:lnB w="6350" cap="flat" cmpd="sng" algn="ctr">
+                      <a:solidFill>
+                        <a:srgbClr val="BFBFBF"/>
+                      </a:solidFill>
+                      <a:prstDash val="solid"/>
+                      <a:round/>
+                      <a:headEnd type="none" w="med" len="med"/>
+                      <a:tailEnd type="none" w="med" len="med"/>
+                    </a:lnB>
+                    <a:solidFill>
+                      <a:srgbClr val="FFFFFF"/>
+                    </a:solidFill>
+                  </a:tcPr>
+                </a:tc>
+                <a:tc>
+                  <a:txBody>
+                    <a:bodyPr/>
+                    <a:lstStyle/>
+                    <a:p>
+                      <a:pPr marL="0" indent="0" algn="l">
+                        <a:buNone/>
+                      </a:pPr>
+                      <a:r>
+                        <a:rPr lang="en-US" sz="1050" dirty="0">
+                          <a:solidFill>
+                            <a:srgbClr val="000000"/>
+                          </a:solidFill>
+                          <a:latin typeface="Times New Roman" pitchFamily="34" charset="0"/>
+                          <a:ea typeface="Times New Roman" pitchFamily="34" charset="-122"/>
+                          <a:cs typeface="Times New Roman" pitchFamily="34" charset="-120"/>
+                        </a:rPr>
+                        <a:t>Sequence of visit vectors for one patient</a:t>
+                      </a:r>
+                      <a:endParaRPr lang="en-US" sz="1050" dirty="0">
+                        <a:latin typeface="Times New Roman" charset="0"/>
+                        <a:ea typeface="Times New Roman" charset="0"/>
+                        <a:cs typeface="Times New Roman" charset="0"/>
+                      </a:endParaRPr>
+                    </a:p>
+                  </a:txBody>
+                  <a:tcPr>
+                    <a:lnL w="6350" cap="flat" cmpd="sng" algn="ctr">
+                      <a:solidFill>
+                        <a:srgbClr val="BFBFBF"/>
+                      </a:solidFill>
+                      <a:prstDash val="solid"/>
+                      <a:round/>
+                      <a:headEnd type="none" w="med" len="med"/>
+                      <a:tailEnd type="none" w="med" len="med"/>
+                    </a:lnL>
+                    <a:lnR w="6350" cap="flat" cmpd="sng" algn="ctr">
+                      <a:solidFill>
+                        <a:srgbClr val="BFBFBF"/>
+                      </a:solidFill>
+                      <a:prstDash val="solid"/>
+                      <a:round/>
+                      <a:headEnd type="none" w="med" len="med"/>
+                      <a:tailEnd type="none" w="med" len="med"/>
+                    </a:lnR>
+                    <a:lnT w="6350" cap="flat" cmpd="sng" algn="ctr">
+                      <a:solidFill>
+                        <a:srgbClr val="BFBFBF"/>
+                      </a:solidFill>
+                      <a:prstDash val="solid"/>
+                      <a:round/>
+                      <a:headEnd type="none" w="med" len="med"/>
+                      <a:tailEnd type="none" w="med" len="med"/>
+                    </a:lnT>
+                    <a:lnB w="6350" cap="flat" cmpd="sng" algn="ctr">
+                      <a:solidFill>
+                        <a:srgbClr val="BFBFBF"/>
+                      </a:solidFill>
+                      <a:prstDash val="solid"/>
+                      <a:round/>
+                      <a:headEnd type="none" w="med" len="med"/>
+                      <a:tailEnd type="none" w="med" len="med"/>
+                    </a:lnB>
+                    <a:solidFill>
+                      <a:srgbClr val="FFFFFF"/>
+                    </a:solidFill>
+                  </a:tcPr>
+                </a:tc>
+                <a:tc>
+                  <a:txBody>
+                    <a:bodyPr/>
+                    <a:lstStyle/>
+                    <a:p>
+                      <a:pPr marL="0" indent="0" algn="l">
+                        <a:buNone/>
+                      </a:pPr>
+                      <a:r>
+                        <a:rPr lang="en-US" sz="1050" dirty="0">
+                          <a:solidFill>
+                            <a:srgbClr val="000000"/>
+                          </a:solidFill>
+                          <a:latin typeface="Times New Roman" pitchFamily="34" charset="0"/>
+                          <a:ea typeface="Times New Roman" pitchFamily="34" charset="-122"/>
+                          <a:cs typeface="Times New Roman" pitchFamily="34" charset="-120"/>
+                        </a:rPr>
+                        <a:t>Incremental GRU hidden-state extraction: Z₁=GRU([V₁]), Z₂=GRU([V₁,V₂]), …</a:t>
+                      </a:r>
+                      <a:endParaRPr lang="en-US" sz="1050" dirty="0">
+                        <a:latin typeface="Times New Roman" charset="0"/>
+                        <a:ea typeface="Times New Roman" charset="0"/>
+                        <a:cs typeface="Times New Roman" charset="0"/>
+                      </a:endParaRPr>
+                    </a:p>
+                  </a:txBody>
+                  <a:tcPr>
+                    <a:lnL w="6350" cap="flat" cmpd="sng" algn="ctr">
+                      <a:solidFill>
+                        <a:srgbClr val="BFBFBF"/>
+                      </a:solidFill>
+                      <a:prstDash val="solid"/>
+                      <a:round/>
+                      <a:headEnd type="none" w="med" len="med"/>
+                      <a:tailEnd type="none" w="med" len="med"/>
+                    </a:lnL>
+                    <a:lnR w="6350" cap="flat" cmpd="sng" algn="ctr">
+                      <a:solidFill>
+                        <a:srgbClr val="BFBFBF"/>
+                      </a:solidFill>
+                      <a:prstDash val="solid"/>
+                      <a:round/>
+                      <a:headEnd type="none" w="med" len="med"/>
+                      <a:tailEnd type="none" w="med" len="med"/>
+                    </a:lnR>
+                    <a:lnT w="6350" cap="flat" cmpd="sng" algn="ctr">
+                      <a:solidFill>
+                        <a:srgbClr val="BFBFBF"/>
+                      </a:solidFill>
+                      <a:prstDash val="solid"/>
+                      <a:round/>
+                      <a:headEnd type="none" w="med" len="med"/>
+                      <a:tailEnd type="none" w="med" len="med"/>
+                    </a:lnT>
+                    <a:lnB w="6350" cap="flat" cmpd="sng" algn="ctr">
+                      <a:solidFill>
+                        <a:srgbClr val="BFBFBF"/>
+                      </a:solidFill>
+                      <a:prstDash val="solid"/>
+                      <a:round/>
+                      <a:headEnd type="none" w="med" len="med"/>
+                      <a:tailEnd type="none" w="med" len="med"/>
+                    </a:lnB>
+                    <a:solidFill>
+                      <a:srgbClr val="FFFFFF"/>
+                    </a:solidFill>
+                  </a:tcPr>
+                </a:tc>
+                <a:tc>
+                  <a:txBody>
+                    <a:bodyPr/>
+                    <a:lstStyle/>
+                    <a:p>
+                      <a:pPr marL="0" indent="0" algn="l">
+                        <a:buNone/>
+                      </a:pPr>
+                      <a:r>
+                        <a:rPr lang="en-US" sz="1050" dirty="0">
+                          <a:solidFill>
+                            <a:srgbClr val="000000"/>
+                          </a:solidFill>
+                          <a:latin typeface="Times New Roman" pitchFamily="34" charset="0"/>
+                          <a:ea typeface="Times New Roman" pitchFamily="34" charset="-122"/>
+                          <a:cs typeface="Times New Roman" pitchFamily="34" charset="-120"/>
+                        </a:rPr>
+                        <a:t>Per-visit latent trajectory (T × 64, or T × 96 for bimodal)</a:t>
+                      </a:r>
+                      <a:endParaRPr lang="en-US" sz="1050" dirty="0">
+                        <a:latin typeface="Times New Roman" charset="0"/>
+                        <a:ea typeface="Times New Roman" charset="0"/>
+                        <a:cs typeface="Times New Roman" charset="0"/>
+                      </a:endParaRPr>
+                    </a:p>
+                  </a:txBody>
+                  <a:tcPr>
+                    <a:lnL w="6350" cap="flat" cmpd="sng" algn="ctr">
+                      <a:solidFill>
+                        <a:srgbClr val="BFBFBF"/>
+                      </a:solidFill>
+                      <a:prstDash val="solid"/>
+                      <a:round/>
+                      <a:headEnd type="none" w="med" len="med"/>
+                      <a:tailEnd type="none" w="med" len="med"/>
+                    </a:lnL>
+                    <a:lnR w="6350" cap="flat" cmpd="sng" algn="ctr">
+                      <a:solidFill>
+                        <a:srgbClr val="BFBFBF"/>
+                      </a:solidFill>
+                      <a:prstDash val="solid"/>
+                      <a:round/>
+                      <a:headEnd type="none" w="med" len="med"/>
+                      <a:tailEnd type="none" w="med" len="med"/>
+                    </a:lnR>
+                    <a:lnT w="6350" cap="flat" cmpd="sng" algn="ctr">
+                      <a:solidFill>
+                        <a:srgbClr val="BFBFBF"/>
+                      </a:solidFill>
+                      <a:prstDash val="solid"/>
+                      <a:round/>
+                      <a:headEnd type="none" w="med" len="med"/>
+                      <a:tailEnd type="none" w="med" len="med"/>
+                    </a:lnT>
+                    <a:lnB w="6350" cap="flat" cmpd="sng" algn="ctr">
+                      <a:solidFill>
+                        <a:srgbClr val="BFBFBF"/>
+                      </a:solidFill>
+                      <a:prstDash val="solid"/>
+                      <a:round/>
+                      <a:headEnd type="none" w="med" len="med"/>
+                      <a:tailEnd type="none" w="med" len="med"/>
+                    </a:lnB>
+                    <a:solidFill>
+                      <a:srgbClr val="FFFFFF"/>
+                    </a:solidFill>
+                  </a:tcPr>
+                </a:tc>
+                <a:extLst>
+                  <a:ext uri="{0D108BD9-81ED-4DB2-BD59-A6C34878D82A}">
+                    <a16:rowId xmlns:a16="http://schemas.microsoft.com/office/drawing/2014/main" val="10001"/>
+                  </a:ext>
+                </a:extLst>
+              </a:tr>
+              <a:tr h="0">
+                <a:tc>
+                  <a:txBody>
+                    <a:bodyPr/>
+                    <a:lstStyle/>
+                    <a:p>
+                      <a:pPr marL="0" indent="0" algn="l">
+                        <a:buNone/>
+                      </a:pPr>
+                      <a:r>
+                        <a:rPr lang="en-US" sz="1050" b="1" dirty="0">
+                          <a:solidFill>
+                            <a:srgbClr val="000000"/>
+                          </a:solidFill>
+                          <a:latin typeface="Times New Roman" pitchFamily="34" charset="0"/>
+                          <a:ea typeface="Times New Roman" pitchFamily="34" charset="-122"/>
+                          <a:cs typeface="Times New Roman" pitchFamily="34" charset="-120"/>
+                        </a:rPr>
+                        <a:t>Brain Health Index (BHI)</a:t>
+                      </a:r>
+                      <a:endParaRPr lang="en-US" sz="1050" dirty="0">
+                        <a:latin typeface="Times New Roman" charset="0"/>
+                        <a:ea typeface="Times New Roman" charset="0"/>
+                        <a:cs typeface="Times New Roman" charset="0"/>
+                      </a:endParaRPr>
+                    </a:p>
+                  </a:txBody>
+                  <a:tcPr>
+                    <a:lnL w="6350" cap="flat" cmpd="sng" algn="ctr">
+                      <a:solidFill>
+                        <a:srgbClr val="BFBFBF"/>
+                      </a:solidFill>
+                      <a:prstDash val="solid"/>
+                      <a:round/>
+                      <a:headEnd type="none" w="med" len="med"/>
+                      <a:tailEnd type="none" w="med" len="med"/>
+                    </a:lnL>
+                    <a:lnR w="6350" cap="flat" cmpd="sng" algn="ctr">
+                      <a:solidFill>
+                        <a:srgbClr val="BFBFBF"/>
+                      </a:solidFill>
+                      <a:prstDash val="solid"/>
+                      <a:round/>
+                      <a:headEnd type="none" w="med" len="med"/>
+                      <a:tailEnd type="none" w="med" len="med"/>
+                    </a:lnR>
+                    <a:lnT w="6350" cap="flat" cmpd="sng" algn="ctr">
+                      <a:solidFill>
+                        <a:srgbClr val="BFBFBF"/>
+                      </a:solidFill>
+                      <a:prstDash val="solid"/>
+                      <a:round/>
+                      <a:headEnd type="none" w="med" len="med"/>
+                      <a:tailEnd type="none" w="med" len="med"/>
+                    </a:lnT>
+                    <a:lnB w="6350" cap="flat" cmpd="sng" algn="ctr">
+                      <a:solidFill>
+                        <a:srgbClr val="BFBFBF"/>
+                      </a:solidFill>
+                      <a:prstDash val="solid"/>
+                      <a:round/>
+                      <a:headEnd type="none" w="med" len="med"/>
+                      <a:tailEnd type="none" w="med" len="med"/>
+                    </a:lnB>
+                    <a:solidFill>
+                      <a:srgbClr val="DCEAF6"/>
+                    </a:solidFill>
+                  </a:tcPr>
+                </a:tc>
+                <a:tc>
+                  <a:txBody>
+                    <a:bodyPr/>
+                    <a:lstStyle/>
+                    <a:p>
+                      <a:pPr marL="0" indent="0" algn="l">
+                        <a:buNone/>
+                      </a:pPr>
+                      <a:r>
+                        <a:rPr lang="en-US" sz="1050" dirty="0">
+                          <a:solidFill>
+                            <a:srgbClr val="000000"/>
+                          </a:solidFill>
+                          <a:latin typeface="Times New Roman" pitchFamily="34" charset="0"/>
+                          <a:ea typeface="Times New Roman" pitchFamily="34" charset="-122"/>
+                          <a:cs typeface="Times New Roman" pitchFamily="34" charset="-120"/>
+                        </a:rPr>
+                        <a:t>CDR class probabilities, MMSE, nWBV</a:t>
+                      </a:r>
+                      <a:endParaRPr lang="en-US" sz="1050" dirty="0">
+                        <a:latin typeface="Times New Roman" charset="0"/>
+                        <a:ea typeface="Times New Roman" charset="0"/>
+                        <a:cs typeface="Times New Roman" charset="0"/>
+                      </a:endParaRPr>
+                    </a:p>
+                  </a:txBody>
+                  <a:tcPr>
+                    <a:lnL w="6350" cap="flat" cmpd="sng" algn="ctr">
+                      <a:solidFill>
+                        <a:srgbClr val="BFBFBF"/>
+                      </a:solidFill>
+                      <a:prstDash val="solid"/>
+                      <a:round/>
+                      <a:headEnd type="none" w="med" len="med"/>
+                      <a:tailEnd type="none" w="med" len="med"/>
+                    </a:lnL>
+                    <a:lnR w="6350" cap="flat" cmpd="sng" algn="ctr">
+                      <a:solidFill>
+                        <a:srgbClr val="BFBFBF"/>
+                      </a:solidFill>
+                      <a:prstDash val="solid"/>
+                      <a:round/>
+                      <a:headEnd type="none" w="med" len="med"/>
+                      <a:tailEnd type="none" w="med" len="med"/>
+                    </a:lnR>
+                    <a:lnT w="6350" cap="flat" cmpd="sng" algn="ctr">
+                      <a:solidFill>
+                        <a:srgbClr val="BFBFBF"/>
+                      </a:solidFill>
+                      <a:prstDash val="solid"/>
+                      <a:round/>
+                      <a:headEnd type="none" w="med" len="med"/>
+                      <a:tailEnd type="none" w="med" len="med"/>
+                    </a:lnT>
+                    <a:lnB w="6350" cap="flat" cmpd="sng" algn="ctr">
+                      <a:solidFill>
+                        <a:srgbClr val="BFBFBF"/>
+                      </a:solidFill>
+                      <a:prstDash val="solid"/>
+                      <a:round/>
+                      <a:headEnd type="none" w="med" len="med"/>
+                      <a:tailEnd type="none" w="med" len="med"/>
+                    </a:lnB>
+                    <a:solidFill>
+                      <a:srgbClr val="DCEAF6"/>
+                    </a:solidFill>
+                  </a:tcPr>
+                </a:tc>
+                <a:tc>
+                  <a:txBody>
+                    <a:bodyPr/>
+                    <a:lstStyle/>
+                    <a:p>
+                      <a:pPr marL="0" indent="0" algn="l">
+                        <a:buNone/>
+                      </a:pPr>
+                      <a:r>
+                        <a:rPr lang="en-US" sz="1050" dirty="0">
+                          <a:solidFill>
+                            <a:srgbClr val="000000"/>
+                          </a:solidFill>
+                          <a:latin typeface="Times New Roman" pitchFamily="34" charset="0"/>
+                          <a:ea typeface="Times New Roman" pitchFamily="34" charset="-122"/>
+                          <a:cs typeface="Times New Roman" pitchFamily="34" charset="-120"/>
+                        </a:rPr>
+                        <a:t>Rule-based weighted composite: BHI = 0.5×progression + 0.3×cognitive + 0.2×structural score</a:t>
+                      </a:r>
+                      <a:endParaRPr lang="en-US" sz="1050" dirty="0">
+                        <a:latin typeface="Times New Roman" charset="0"/>
+                        <a:ea typeface="Times New Roman" charset="0"/>
+                        <a:cs typeface="Times New Roman" charset="0"/>
+                      </a:endParaRPr>
+                    </a:p>
+                  </a:txBody>
+                  <a:tcPr>
+                    <a:lnL w="6350" cap="flat" cmpd="sng" algn="ctr">
+                      <a:solidFill>
+                        <a:srgbClr val="BFBFBF"/>
+                      </a:solidFill>
+                      <a:prstDash val="solid"/>
+                      <a:round/>
+                      <a:headEnd type="none" w="med" len="med"/>
+                      <a:tailEnd type="none" w="med" len="med"/>
+                    </a:lnL>
+                    <a:lnR w="6350" cap="flat" cmpd="sng" algn="ctr">
+                      <a:solidFill>
+                        <a:srgbClr val="BFBFBF"/>
+                      </a:solidFill>
+                      <a:prstDash val="solid"/>
+                      <a:round/>
+                      <a:headEnd type="none" w="med" len="med"/>
+                      <a:tailEnd type="none" w="med" len="med"/>
+                    </a:lnR>
+                    <a:lnT w="6350" cap="flat" cmpd="sng" algn="ctr">
+                      <a:solidFill>
+                        <a:srgbClr val="BFBFBF"/>
+                      </a:solidFill>
+                      <a:prstDash val="solid"/>
+                      <a:round/>
+                      <a:headEnd type="none" w="med" len="med"/>
+                      <a:tailEnd type="none" w="med" len="med"/>
+                    </a:lnT>
+                    <a:lnB w="6350" cap="flat" cmpd="sng" algn="ctr">
+                      <a:solidFill>
+                        <a:srgbClr val="BFBFBF"/>
+                      </a:solidFill>
+                      <a:prstDash val="solid"/>
+                      <a:round/>
+                      <a:headEnd type="none" w="med" len="med"/>
+                      <a:tailEnd type="none" w="med" len="med"/>
+                    </a:lnB>
+                    <a:solidFill>
+                      <a:srgbClr val="DCEAF6"/>
+                    </a:solidFill>
+                  </a:tcPr>
+                </a:tc>
+                <a:tc>
+                  <a:txBody>
+                    <a:bodyPr/>
+                    <a:lstStyle/>
+                    <a:p>
+                      <a:pPr marL="0" indent="0" algn="l">
+                        <a:buNone/>
+                      </a:pPr>
+                      <a:r>
+                        <a:rPr lang="en-US" sz="1050" dirty="0">
+                          <a:solidFill>
+                            <a:srgbClr val="000000"/>
+                          </a:solidFill>
+                          <a:latin typeface="Times New Roman" pitchFamily="34" charset="0"/>
+                          <a:ea typeface="Times New Roman" pitchFamily="34" charset="-122"/>
+                          <a:cs typeface="Times New Roman" pitchFamily="34" charset="-120"/>
+                        </a:rPr>
+                        <a:t>Composite brain-health score, 0–100</a:t>
+                      </a:r>
+                      <a:endParaRPr lang="en-US" sz="1050" dirty="0">
+                        <a:latin typeface="Times New Roman" charset="0"/>
+                        <a:ea typeface="Times New Roman" charset="0"/>
+                        <a:cs typeface="Times New Roman" charset="0"/>
+                      </a:endParaRPr>
+                    </a:p>
+                  </a:txBody>
+                  <a:tcPr>
+                    <a:lnL w="6350" cap="flat" cmpd="sng" algn="ctr">
+                      <a:solidFill>
+                        <a:srgbClr val="BFBFBF"/>
+                      </a:solidFill>
+                      <a:prstDash val="solid"/>
+                      <a:round/>
+                      <a:headEnd type="none" w="med" len="med"/>
+                      <a:tailEnd type="none" w="med" len="med"/>
+                    </a:lnL>
+                    <a:lnR w="6350" cap="flat" cmpd="sng" algn="ctr">
+                      <a:solidFill>
+                        <a:srgbClr val="BFBFBF"/>
+                      </a:solidFill>
+                      <a:prstDash val="solid"/>
+                      <a:round/>
+                      <a:headEnd type="none" w="med" len="med"/>
+                      <a:tailEnd type="none" w="med" len="med"/>
+                    </a:lnR>
+                    <a:lnT w="6350" cap="flat" cmpd="sng" algn="ctr">
+                      <a:solidFill>
+                        <a:srgbClr val="BFBFBF"/>
+                      </a:solidFill>
+                      <a:prstDash val="solid"/>
+                      <a:round/>
+                      <a:headEnd type="none" w="med" len="med"/>
+                      <a:tailEnd type="none" w="med" len="med"/>
+                    </a:lnT>
+                    <a:lnB w="6350" cap="flat" cmpd="sng" algn="ctr">
+                      <a:solidFill>
+                        <a:srgbClr val="BFBFBF"/>
+                      </a:solidFill>
+                      <a:prstDash val="solid"/>
+                      <a:round/>
+                      <a:headEnd type="none" w="med" len="med"/>
+                      <a:tailEnd type="none" w="med" len="med"/>
+                    </a:lnB>
+                    <a:solidFill>
+                      <a:srgbClr val="DCEAF6"/>
+                    </a:solidFill>
+                  </a:tcPr>
+                </a:tc>
+                <a:extLst>
+                  <a:ext uri="{0D108BD9-81ED-4DB2-BD59-A6C34878D82A}">
+                    <a16:rowId xmlns:a16="http://schemas.microsoft.com/office/drawing/2014/main" val="10002"/>
+                  </a:ext>
+                </a:extLst>
+              </a:tr>
+              <a:tr h="0">
+                <a:tc>
+                  <a:txBody>
+                    <a:bodyPr/>
+                    <a:lstStyle/>
+                    <a:p>
+                      <a:pPr marL="0" indent="0" algn="l">
+                        <a:buNone/>
+                      </a:pPr>
+                      <a:r>
+                        <a:rPr lang="en-US" sz="1050" b="1" dirty="0">
+                          <a:solidFill>
+                            <a:srgbClr val="000000"/>
+                          </a:solidFill>
+                          <a:latin typeface="Times New Roman" pitchFamily="34" charset="0"/>
+                          <a:ea typeface="Times New Roman" pitchFamily="34" charset="-122"/>
+                          <a:cs typeface="Times New Roman" pitchFamily="34" charset="-120"/>
+                        </a:rPr>
+                        <a:t>Explainability (SHAP)</a:t>
+                      </a:r>
+                      <a:endParaRPr lang="en-US" sz="1050" dirty="0">
+                        <a:latin typeface="Times New Roman" charset="0"/>
+                        <a:ea typeface="Times New Roman" charset="0"/>
+                        <a:cs typeface="Times New Roman" charset="0"/>
+                      </a:endParaRPr>
+                    </a:p>
+                  </a:txBody>
+                  <a:tcPr>
+                    <a:lnL w="6350" cap="flat" cmpd="sng" algn="ctr">
+                      <a:solidFill>
+                        <a:srgbClr val="BFBFBF"/>
+                      </a:solidFill>
+                      <a:prstDash val="solid"/>
+                      <a:round/>
+                      <a:headEnd type="none" w="med" len="med"/>
+                      <a:tailEnd type="none" w="med" len="med"/>
+                    </a:lnL>
+                    <a:lnR w="6350" cap="flat" cmpd="sng" algn="ctr">
+                      <a:solidFill>
+                        <a:srgbClr val="BFBFBF"/>
+                      </a:solidFill>
+                      <a:prstDash val="solid"/>
+                      <a:round/>
+                      <a:headEnd type="none" w="med" len="med"/>
+                      <a:tailEnd type="none" w="med" len="med"/>
+                    </a:lnR>
+                    <a:lnT w="6350" cap="flat" cmpd="sng" algn="ctr">
+                      <a:solidFill>
+                        <a:srgbClr val="BFBFBF"/>
+                      </a:solidFill>
+                      <a:prstDash val="solid"/>
+                      <a:round/>
+                      <a:headEnd type="none" w="med" len="med"/>
+                      <a:tailEnd type="none" w="med" len="med"/>
+                    </a:lnT>
+                    <a:lnB w="6350" cap="flat" cmpd="sng" algn="ctr">
+                      <a:solidFill>
+                        <a:srgbClr val="BFBFBF"/>
+                      </a:solidFill>
+                      <a:prstDash val="solid"/>
+                      <a:round/>
+                      <a:headEnd type="none" w="med" len="med"/>
+                      <a:tailEnd type="none" w="med" len="med"/>
+                    </a:lnB>
+                    <a:solidFill>
+                      <a:srgbClr val="FFFFFF"/>
+                    </a:solidFill>
+                  </a:tcPr>
+                </a:tc>
+                <a:tc>
+                  <a:txBody>
+                    <a:bodyPr/>
+                    <a:lstStyle/>
+                    <a:p>
+                      <a:pPr marL="0" indent="0" algn="l">
+                        <a:buNone/>
+                      </a:pPr>
+                      <a:r>
+                        <a:rPr lang="en-US" sz="1050" dirty="0">
+                          <a:solidFill>
+                            <a:srgbClr val="000000"/>
+                          </a:solidFill>
+                          <a:latin typeface="Times New Roman" pitchFamily="34" charset="0"/>
+                          <a:ea typeface="Times New Roman" pitchFamily="34" charset="-122"/>
+                          <a:cs typeface="Times New Roman" pitchFamily="34" charset="-120"/>
+                        </a:rPr>
+                        <a:t>Clinical feature vector</a:t>
+                      </a:r>
+                      <a:endParaRPr lang="en-US" sz="1050" dirty="0">
+                        <a:latin typeface="Times New Roman" charset="0"/>
+                        <a:ea typeface="Times New Roman" charset="0"/>
+                        <a:cs typeface="Times New Roman" charset="0"/>
+                      </a:endParaRPr>
+                    </a:p>
+                  </a:txBody>
+                  <a:tcPr>
+                    <a:lnL w="6350" cap="flat" cmpd="sng" algn="ctr">
+                      <a:solidFill>
+                        <a:srgbClr val="BFBFBF"/>
+                      </a:solidFill>
+                      <a:prstDash val="solid"/>
+                      <a:round/>
+                      <a:headEnd type="none" w="med" len="med"/>
+                      <a:tailEnd type="none" w="med" len="med"/>
+                    </a:lnL>
+                    <a:lnR w="6350" cap="flat" cmpd="sng" algn="ctr">
+                      <a:solidFill>
+                        <a:srgbClr val="BFBFBF"/>
+                      </a:solidFill>
+                      <a:prstDash val="solid"/>
+                      <a:round/>
+                      <a:headEnd type="none" w="med" len="med"/>
+                      <a:tailEnd type="none" w="med" len="med"/>
+                    </a:lnR>
+                    <a:lnT w="6350" cap="flat" cmpd="sng" algn="ctr">
+                      <a:solidFill>
+                        <a:srgbClr val="BFBFBF"/>
+                      </a:solidFill>
+                      <a:prstDash val="solid"/>
+                      <a:round/>
+                      <a:headEnd type="none" w="med" len="med"/>
+                      <a:tailEnd type="none" w="med" len="med"/>
+                    </a:lnT>
+                    <a:lnB w="6350" cap="flat" cmpd="sng" algn="ctr">
+                      <a:solidFill>
+                        <a:srgbClr val="BFBFBF"/>
+                      </a:solidFill>
+                      <a:prstDash val="solid"/>
+                      <a:round/>
+                      <a:headEnd type="none" w="med" len="med"/>
+                      <a:tailEnd type="none" w="med" len="med"/>
+                    </a:lnB>
+                    <a:solidFill>
+                      <a:srgbClr val="FFFFFF"/>
+                    </a:solidFill>
+                  </a:tcPr>
+                </a:tc>
+                <a:tc>
+                  <a:txBody>
+                    <a:bodyPr/>
+                    <a:lstStyle/>
+                    <a:p>
+                      <a:pPr marL="0" indent="0" algn="l">
+                        <a:buNone/>
+                      </a:pPr>
+                      <a:r>
+                        <a:rPr lang="en-US" sz="1050" dirty="0">
+                          <a:solidFill>
+                            <a:srgbClr val="000000"/>
+                          </a:solidFill>
+                          <a:latin typeface="Times New Roman" pitchFamily="34" charset="0"/>
+                          <a:ea typeface="Times New Roman" pitchFamily="34" charset="-122"/>
+                          <a:cs typeface="Times New Roman" pitchFamily="34" charset="-120"/>
+                        </a:rPr>
+                        <a:t>Training-time: real SHAP analysis on trained models. Live API: heuristic linear formulas (approximation, pending integration)</a:t>
+                      </a:r>
+                      <a:endParaRPr lang="en-US" sz="1050" dirty="0">
+                        <a:latin typeface="Times New Roman" charset="0"/>
+                        <a:ea typeface="Times New Roman" charset="0"/>
+                        <a:cs typeface="Times New Roman" charset="0"/>
+                      </a:endParaRPr>
+                    </a:p>
+                  </a:txBody>
+                  <a:tcPr>
+                    <a:lnL w="6350" cap="flat" cmpd="sng" algn="ctr">
+                      <a:solidFill>
+                        <a:srgbClr val="BFBFBF"/>
+                      </a:solidFill>
+                      <a:prstDash val="solid"/>
+                      <a:round/>
+                      <a:headEnd type="none" w="med" len="med"/>
+                      <a:tailEnd type="none" w="med" len="med"/>
+                    </a:lnL>
+                    <a:lnR w="6350" cap="flat" cmpd="sng" algn="ctr">
+                      <a:solidFill>
+                        <a:srgbClr val="BFBFBF"/>
+                      </a:solidFill>
+                      <a:prstDash val="solid"/>
+                      <a:round/>
+                      <a:headEnd type="none" w="med" len="med"/>
+                      <a:tailEnd type="none" w="med" len="med"/>
+                    </a:lnR>
+                    <a:lnT w="6350" cap="flat" cmpd="sng" algn="ctr">
+                      <a:solidFill>
+                        <a:srgbClr val="BFBFBF"/>
+                      </a:solidFill>
+                      <a:prstDash val="solid"/>
+                      <a:round/>
+                      <a:headEnd type="none" w="med" len="med"/>
+                      <a:tailEnd type="none" w="med" len="med"/>
+                    </a:lnT>
+                    <a:lnB w="6350" cap="flat" cmpd="sng" algn="ctr">
+                      <a:solidFill>
+                        <a:srgbClr val="BFBFBF"/>
+                      </a:solidFill>
+                      <a:prstDash val="solid"/>
+                      <a:round/>
+                      <a:headEnd type="none" w="med" len="med"/>
+                      <a:tailEnd type="none" w="med" len="med"/>
+                    </a:lnB>
+                    <a:solidFill>
+                      <a:srgbClr val="FFFFFF"/>
+                    </a:solidFill>
+                  </a:tcPr>
+                </a:tc>
+                <a:tc>
+                  <a:txBody>
+                    <a:bodyPr/>
+                    <a:lstStyle/>
+                    <a:p>
+                      <a:pPr marL="0" indent="0" algn="l">
+                        <a:buNone/>
+                      </a:pPr>
+                      <a:r>
+                        <a:rPr lang="en-US" sz="1050" dirty="0">
+                          <a:solidFill>
+                            <a:srgbClr val="000000"/>
+                          </a:solidFill>
+                          <a:latin typeface="Times New Roman" pitchFamily="34" charset="0"/>
+                          <a:ea typeface="Times New Roman" pitchFamily="34" charset="-122"/>
+                          <a:cs typeface="Times New Roman" pitchFamily="34" charset="-120"/>
+                        </a:rPr>
+                        <a:t>Feature-importance ranking (nWBV, MMSE, Age identified as top predictors)</a:t>
+                      </a:r>
+                      <a:endParaRPr lang="en-US" sz="1050" dirty="0">
+                        <a:latin typeface="Times New Roman" charset="0"/>
+                        <a:ea typeface="Times New Roman" charset="0"/>
+                        <a:cs typeface="Times New Roman" charset="0"/>
+                      </a:endParaRPr>
+                    </a:p>
+                  </a:txBody>
+                  <a:tcPr>
+                    <a:lnL w="6350" cap="flat" cmpd="sng" algn="ctr">
+                      <a:solidFill>
+                        <a:srgbClr val="BFBFBF"/>
+                      </a:solidFill>
+                      <a:prstDash val="solid"/>
+                      <a:round/>
+                      <a:headEnd type="none" w="med" len="med"/>
+                      <a:tailEnd type="none" w="med" len="med"/>
+                    </a:lnL>
+                    <a:lnR w="6350" cap="flat" cmpd="sng" algn="ctr">
+                      <a:solidFill>
+                        <a:srgbClr val="BFBFBF"/>
+                      </a:solidFill>
+                      <a:prstDash val="solid"/>
+                      <a:round/>
+                      <a:headEnd type="none" w="med" len="med"/>
+                      <a:tailEnd type="none" w="med" len="med"/>
+                    </a:lnR>
+                    <a:lnT w="6350" cap="flat" cmpd="sng" algn="ctr">
+                      <a:solidFill>
+                        <a:srgbClr val="BFBFBF"/>
+                      </a:solidFill>
+                      <a:prstDash val="solid"/>
+                      <a:round/>
+                      <a:headEnd type="none" w="med" len="med"/>
+                      <a:tailEnd type="none" w="med" len="med"/>
+                    </a:lnT>
+                    <a:lnB w="6350" cap="flat" cmpd="sng" algn="ctr">
+                      <a:solidFill>
+                        <a:srgbClr val="BFBFBF"/>
+                      </a:solidFill>
+                      <a:prstDash val="solid"/>
+                      <a:round/>
+                      <a:headEnd type="none" w="med" len="med"/>
+                      <a:tailEnd type="none" w="med" len="med"/>
+                    </a:lnB>
+                    <a:solidFill>
+                      <a:srgbClr val="FFFFFF"/>
+                    </a:solidFill>
+                  </a:tcPr>
+                </a:tc>
+                <a:extLst>
+                  <a:ext uri="{0D108BD9-81ED-4DB2-BD59-A6C34878D82A}">
+                    <a16:rowId xmlns:a16="http://schemas.microsoft.com/office/drawing/2014/main" val="10003"/>
+                  </a:ext>
+                </a:extLst>
+              </a:tr>
+              <a:tr h="0">
+                <a:tc>
+                  <a:txBody>
+                    <a:bodyPr/>
+                    <a:lstStyle/>
+                    <a:p>
+                      <a:pPr marL="0" indent="0" algn="l">
+                        <a:buNone/>
+                      </a:pPr>
+                      <a:r>
+                        <a:rPr lang="en-US" sz="1050" b="1" dirty="0">
+                          <a:solidFill>
+                            <a:srgbClr val="000000"/>
+                          </a:solidFill>
+                          <a:latin typeface="Times New Roman" pitchFamily="34" charset="0"/>
+                          <a:ea typeface="Times New Roman" pitchFamily="34" charset="-122"/>
+                          <a:cs typeface="Times New Roman" pitchFamily="34" charset="-120"/>
+                        </a:rPr>
+                        <a:t>Research API + Dashboard</a:t>
+                      </a:r>
+                      <a:endParaRPr lang="en-US" sz="1050" dirty="0">
+                        <a:latin typeface="Times New Roman" charset="0"/>
+                        <a:ea typeface="Times New Roman" charset="0"/>
+                        <a:cs typeface="Times New Roman" charset="0"/>
+                      </a:endParaRPr>
+                    </a:p>
+                  </a:txBody>
+                  <a:tcPr>
+                    <a:lnL w="6350" cap="flat" cmpd="sng" algn="ctr">
+                      <a:solidFill>
+                        <a:srgbClr val="BFBFBF"/>
+                      </a:solidFill>
+                      <a:prstDash val="solid"/>
+                      <a:round/>
+                      <a:headEnd type="none" w="med" len="med"/>
+                      <a:tailEnd type="none" w="med" len="med"/>
+                    </a:lnL>
+                    <a:lnR w="6350" cap="flat" cmpd="sng" algn="ctr">
+                      <a:solidFill>
+                        <a:srgbClr val="BFBFBF"/>
+                      </a:solidFill>
+                      <a:prstDash val="solid"/>
+                      <a:round/>
+                      <a:headEnd type="none" w="med" len="med"/>
+                      <a:tailEnd type="none" w="med" len="med"/>
+                    </a:lnR>
+                    <a:lnT w="6350" cap="flat" cmpd="sng" algn="ctr">
+                      <a:solidFill>
+                        <a:srgbClr val="BFBFBF"/>
+                      </a:solidFill>
+                      <a:prstDash val="solid"/>
+                      <a:round/>
+                      <a:headEnd type="none" w="med" len="med"/>
+                      <a:tailEnd type="none" w="med" len="med"/>
+                    </a:lnT>
+                    <a:lnB w="6350" cap="flat" cmpd="sng" algn="ctr">
+                      <a:solidFill>
+                        <a:srgbClr val="BFBFBF"/>
+                      </a:solidFill>
+                      <a:prstDash val="solid"/>
+                      <a:round/>
+                      <a:headEnd type="none" w="med" len="med"/>
+                      <a:tailEnd type="none" w="med" len="med"/>
+                    </a:lnB>
+                    <a:solidFill>
+                      <a:srgbClr val="DCEAF6"/>
+                    </a:solidFill>
+                  </a:tcPr>
+                </a:tc>
+                <a:tc>
+                  <a:txBody>
+                    <a:bodyPr/>
+                    <a:lstStyle/>
+                    <a:p>
+                      <a:pPr marL="0" indent="0" algn="l">
+                        <a:buNone/>
+                      </a:pPr>
+                      <a:r>
+                        <a:rPr lang="en-US" sz="1050" dirty="0">
+                          <a:solidFill>
+                            <a:srgbClr val="000000"/>
+                          </a:solidFill>
+                          <a:latin typeface="Times New Roman" pitchFamily="34" charset="0"/>
+                          <a:ea typeface="Times New Roman" pitchFamily="34" charset="-122"/>
+                          <a:cs typeface="Times New Roman" pitchFamily="34" charset="-120"/>
+                        </a:rPr>
+                        <a:t>HTTP requests from browser dashboard</a:t>
+                      </a:r>
+                      <a:endParaRPr lang="en-US" sz="1050" dirty="0">
+                        <a:latin typeface="Times New Roman" charset="0"/>
+                        <a:ea typeface="Times New Roman" charset="0"/>
+                        <a:cs typeface="Times New Roman" charset="0"/>
+                      </a:endParaRPr>
+                    </a:p>
+                  </a:txBody>
+                  <a:tcPr>
+                    <a:lnL w="6350" cap="flat" cmpd="sng" algn="ctr">
+                      <a:solidFill>
+                        <a:srgbClr val="BFBFBF"/>
+                      </a:solidFill>
+                      <a:prstDash val="solid"/>
+                      <a:round/>
+                      <a:headEnd type="none" w="med" len="med"/>
+                      <a:tailEnd type="none" w="med" len="med"/>
+                    </a:lnL>
+                    <a:lnR w="6350" cap="flat" cmpd="sng" algn="ctr">
+                      <a:solidFill>
+                        <a:srgbClr val="BFBFBF"/>
+                      </a:solidFill>
+                      <a:prstDash val="solid"/>
+                      <a:round/>
+                      <a:headEnd type="none" w="med" len="med"/>
+                      <a:tailEnd type="none" w="med" len="med"/>
+                    </a:lnR>
+                    <a:lnT w="6350" cap="flat" cmpd="sng" algn="ctr">
+                      <a:solidFill>
+                        <a:srgbClr val="BFBFBF"/>
+                      </a:solidFill>
+                      <a:prstDash val="solid"/>
+                      <a:round/>
+                      <a:headEnd type="none" w="med" len="med"/>
+                      <a:tailEnd type="none" w="med" len="med"/>
+                    </a:lnT>
+                    <a:lnB w="6350" cap="flat" cmpd="sng" algn="ctr">
+                      <a:solidFill>
+                        <a:srgbClr val="BFBFBF"/>
+                      </a:solidFill>
+                      <a:prstDash val="solid"/>
+                      <a:round/>
+                      <a:headEnd type="none" w="med" len="med"/>
+                      <a:tailEnd type="none" w="med" len="med"/>
+                    </a:lnB>
+                    <a:solidFill>
+                      <a:srgbClr val="DCEAF6"/>
+                    </a:solidFill>
+                  </a:tcPr>
+                </a:tc>
+                <a:tc>
+                  <a:txBody>
+                    <a:bodyPr/>
+                    <a:lstStyle/>
+                    <a:p>
+                      <a:pPr marL="0" indent="0" algn="l">
+                        <a:buNone/>
+                      </a:pPr>
+                      <a:r>
+                        <a:rPr lang="en-US" sz="1050" dirty="0">
+                          <a:solidFill>
+                            <a:srgbClr val="000000"/>
+                          </a:solidFill>
+                          <a:latin typeface="Times New Roman" pitchFamily="34" charset="0"/>
+                          <a:ea typeface="Times New Roman" pitchFamily="34" charset="-122"/>
+                          <a:cs typeface="Times New Roman" pitchFamily="34" charset="-120"/>
+                        </a:rPr>
+                        <a:t>FastAPI routers (predict, brain-twin, eeg, history, patient) + SQLAlchemy/SQLite; Next.js/React frontend</a:t>
+                      </a:r>
+                      <a:endParaRPr lang="en-US" sz="1050" dirty="0">
+                        <a:latin typeface="Times New Roman" charset="0"/>
+                        <a:ea typeface="Times New Roman" charset="0"/>
+                        <a:cs typeface="Times New Roman" charset="0"/>
+                      </a:endParaRPr>
+                    </a:p>
+                  </a:txBody>
+                  <a:tcPr>
+                    <a:lnL w="6350" cap="flat" cmpd="sng" algn="ctr">
+                      <a:solidFill>
+                        <a:srgbClr val="BFBFBF"/>
+                      </a:solidFill>
+                      <a:prstDash val="solid"/>
+                      <a:round/>
+                      <a:headEnd type="none" w="med" len="med"/>
+                      <a:tailEnd type="none" w="med" len="med"/>
+                    </a:lnL>
+                    <a:lnR w="6350" cap="flat" cmpd="sng" algn="ctr">
+                      <a:solidFill>
+                        <a:srgbClr val="BFBFBF"/>
+                      </a:solidFill>
+                      <a:prstDash val="solid"/>
+                      <a:round/>
+                      <a:headEnd type="none" w="med" len="med"/>
+                      <a:tailEnd type="none" w="med" len="med"/>
+                    </a:lnR>
+                    <a:lnT w="6350" cap="flat" cmpd="sng" algn="ctr">
+                      <a:solidFill>
+                        <a:srgbClr val="BFBFBF"/>
+                      </a:solidFill>
+                      <a:prstDash val="solid"/>
+                      <a:round/>
+                      <a:headEnd type="none" w="med" len="med"/>
+                      <a:tailEnd type="none" w="med" len="med"/>
+                    </a:lnT>
+                    <a:lnB w="6350" cap="flat" cmpd="sng" algn="ctr">
+                      <a:solidFill>
+                        <a:srgbClr val="BFBFBF"/>
+                      </a:solidFill>
+                      <a:prstDash val="solid"/>
+                      <a:round/>
+                      <a:headEnd type="none" w="med" len="med"/>
+                      <a:tailEnd type="none" w="med" len="med"/>
+                    </a:lnB>
+                    <a:solidFill>
+                      <a:srgbClr val="DCEAF6"/>
+                    </a:solidFill>
+                  </a:tcPr>
+                </a:tc>
+                <a:tc>
+                  <a:txBody>
+                    <a:bodyPr/>
+                    <a:lstStyle/>
+                    <a:p>
+                      <a:pPr marL="0" indent="0" algn="l">
+                        <a:buNone/>
+                      </a:pPr>
+                      <a:r>
+                        <a:rPr lang="en-US" sz="1050" dirty="0">
+                          <a:solidFill>
+                            <a:srgbClr val="000000"/>
+                          </a:solidFill>
+                          <a:latin typeface="Times New Roman" pitchFamily="34" charset="0"/>
+                          <a:ea typeface="Times New Roman" pitchFamily="34" charset="-122"/>
+                          <a:cs typeface="Times New Roman" pitchFamily="34" charset="-120"/>
+                        </a:rPr>
+                        <a:t>JSON prediction responses; interactive dashboard pages; stored prediction history</a:t>
+                      </a:r>
+                      <a:endParaRPr lang="en-US" sz="1050" dirty="0">
+                        <a:latin typeface="Times New Roman" charset="0"/>
+                        <a:ea typeface="Times New Roman" charset="0"/>
+                        <a:cs typeface="Times New Roman" charset="0"/>
+                      </a:endParaRPr>
+                    </a:p>
+                  </a:txBody>
+                  <a:tcPr>
+                    <a:lnL w="6350" cap="flat" cmpd="sng" algn="ctr">
+                      <a:solidFill>
+                        <a:srgbClr val="BFBFBF"/>
+                      </a:solidFill>
+                      <a:prstDash val="solid"/>
+                      <a:round/>
+                      <a:headEnd type="none" w="med" len="med"/>
+                      <a:tailEnd type="none" w="med" len="med"/>
+                    </a:lnL>
+                    <a:lnR w="6350" cap="flat" cmpd="sng" algn="ctr">
+                      <a:solidFill>
+                        <a:srgbClr val="BFBFBF"/>
+                      </a:solidFill>
+                      <a:prstDash val="solid"/>
+                      <a:round/>
+                      <a:headEnd type="none" w="med" len="med"/>
+                      <a:tailEnd type="none" w="med" len="med"/>
+                    </a:lnR>
+                    <a:lnT w="6350" cap="flat" cmpd="sng" algn="ctr">
+                      <a:solidFill>
+                        <a:srgbClr val="BFBFBF"/>
+                      </a:solidFill>
+                      <a:prstDash val="solid"/>
+                      <a:round/>
+                      <a:headEnd type="none" w="med" len="med"/>
+                      <a:tailEnd type="none" w="med" len="med"/>
+                    </a:lnT>
+                    <a:lnB w="6350" cap="flat" cmpd="sng" algn="ctr">
+                      <a:solidFill>
+                        <a:srgbClr val="BFBFBF"/>
+                      </a:solidFill>
+                      <a:prstDash val="solid"/>
+                      <a:round/>
+                      <a:headEnd type="none" w="med" len="med"/>
+                      <a:tailEnd type="none" w="med" len="med"/>
+                    </a:lnB>
+                    <a:solidFill>
+                      <a:srgbClr val="DCEAF6"/>
+                    </a:solidFill>
+                  </a:tcPr>
+                </a:tc>
+                <a:extLst>
+                  <a:ext uri="{0D108BD9-81ED-4DB2-BD59-A6C34878D82A}">
+                    <a16:rowId xmlns:a16="http://schemas.microsoft.com/office/drawing/2014/main" val="10004"/>
+                  </a:ext>
+                </a:extLst>
+              </a:tr>
+            </a:tbl>
+          </a:graphicData>
+        </a:graphic>
+      </p:graphicFrame>
+    </p:spTree>
+    <p:extLst>
+      <p:ext uri="{BB962C8B-B14F-4D97-AF65-F5344CB8AC3E}">
+        <p14:creationId xmlns:p14="http://schemas.microsoft.com/office/powerpoint/2010/main" val="1973561149"/>
+      </p:ext>
+    </p:extLst>
+  </p:cSld>
+  <p:clrMapOvr>
+    <a:masterClrMapping/>
+  </p:clrMapOvr>
+  <p:timing>
+    <p:tnLst>
+      <p:par>
+        <p:cTn id="1" dur="indefinite" restart="never" nodeType="tmRoot"/>
+      </p:par>
+    </p:tnLst>
+  </p:timing>
+</p:sld>
+</file>
+
+<file path=ppt/slides/slide15.xml><?xml version="1.0" encoding="utf-8"?>
+<p:sld xmlns:a="http://schemas.openxmlformats.org/drawingml/2006/main" xmlns:r="http://schemas.openxmlformats.org/officeDocument/2006/relationships" xmlns:p="http://schemas.openxmlformats.org/presentationml/2006/main">
+  <p:cSld>
+    <p:spTree>
+      <p:nvGrpSpPr>
+        <p:cNvPr id="1" name=""/>
+        <p:cNvGrpSpPr/>
+        <p:nvPr/>
+      </p:nvGrpSpPr>
+      <p:grpSpPr>
+        <a:xfrm>
+          <a:off x="0" y="0"/>
+          <a:ext cx="0" cy="0"/>
+          <a:chOff x="0" y="0"/>
+          <a:chExt cx="0" cy="0"/>
+        </a:xfrm>
+      </p:grpSpPr>
+      <p:sp>
+        <p:nvSpPr>
+          <p:cNvPr id="2" name="Title 1"/>
+          <p:cNvSpPr>
+            <a:spLocks noGrp="1"/>
+          </p:cNvSpPr>
+          <p:nvPr>
+            <p:ph type="title"/>
+          </p:nvPr>
+        </p:nvSpPr>
+        <p:spPr>
+          <a:solidFill>
+            <a:srgbClr val="558ED5"/>
+          </a:solidFill>
+        </p:spPr>
+        <p:txBody>
+          <a:bodyPr/>
+          <a:lstStyle/>
+          <a:p>
+            <a:r>
+              <a:rPr lang="en-US" sz="3700" b="1" dirty="0" smtClean="0">
+                <a:solidFill>
+                  <a:schemeClr val="bg1"/>
+                </a:solidFill>
+                <a:latin typeface="Times New Roman" pitchFamily="18" charset="0"/>
+                <a:cs typeface="Times New Roman" pitchFamily="18" charset="0"/>
+              </a:rPr>
+              <a:t>10</a:t>
+            </a:r>
+            <a:r>
+              <a:rPr lang="en-US" sz="3700" b="1" dirty="0" smtClean="0">
+                <a:solidFill>
+                  <a:schemeClr val="bg1"/>
+                </a:solidFill>
+                <a:latin typeface="Times New Roman" pitchFamily="18" charset="0"/>
+                <a:cs typeface="Times New Roman" pitchFamily="18" charset="0"/>
+              </a:rPr>
+              <a:t>. IMPLEMENTATION </a:t>
+            </a:r>
+            <a:endParaRPr lang="en-US" sz="3700" b="1" dirty="0">
+              <a:solidFill>
+                <a:schemeClr val="bg1"/>
+              </a:solidFill>
+              <a:latin typeface="Times New Roman" pitchFamily="18" charset="0"/>
+              <a:cs typeface="Times New Roman" pitchFamily="18" charset="0"/>
+            </a:endParaRPr>
+          </a:p>
+        </p:txBody>
+      </p:sp>
+      <p:sp>
+        <p:nvSpPr>
+          <p:cNvPr id="4" name="Slide Number Placeholder 3"/>
+          <p:cNvSpPr>
+            <a:spLocks noGrp="1"/>
+          </p:cNvSpPr>
+          <p:nvPr>
+            <p:ph type="sldNum" sz="quarter" idx="12"/>
+          </p:nvPr>
+        </p:nvSpPr>
+        <p:spPr/>
+        <p:txBody>
+          <a:bodyPr/>
+          <a:lstStyle/>
+          <a:p>
+            <a:fld id="{C02A2637-A5A3-49FA-B214-6E67543099EF}" type="slidenum">
+              <a:rPr lang="en-US" smtClean="0"/>
+              <a:t>15</a:t>
+            </a:fld>
+            <a:endParaRPr lang="en-US"/>
+          </a:p>
+        </p:txBody>
+      </p:sp>
+    </p:spTree>
+    <p:extLst>
+      <p:ext uri="{BB962C8B-B14F-4D97-AF65-F5344CB8AC3E}">
+        <p14:creationId xmlns:p14="http://schemas.microsoft.com/office/powerpoint/2010/main" val="841557151"/>
+      </p:ext>
+    </p:extLst>
+  </p:cSld>
+  <p:clrMapOvr>
+    <a:masterClrMapping/>
+  </p:clrMapOvr>
+  <p:timing>
+    <p:tnLst>
+      <p:par>
+        <p:cTn id="1" dur="indefinite" restart="never" nodeType="tmRoot"/>
+      </p:par>
+    </p:tnLst>
+  </p:timing>
+</p:sld>
+</file>
+
+<file path=ppt/slides/slide16.xml><?xml version="1.0" encoding="utf-8"?>
+<p:sld xmlns:a="http://schemas.openxmlformats.org/drawingml/2006/main" xmlns:r="http://schemas.openxmlformats.org/officeDocument/2006/relationships" xmlns:p="http://schemas.openxmlformats.org/presentationml/2006/main">
+  <p:cSld>
+    <p:spTree>
+      <p:nvGrpSpPr>
+        <p:cNvPr id="1" name=""/>
+        <p:cNvGrpSpPr/>
+        <p:nvPr/>
+      </p:nvGrpSpPr>
+      <p:grpSpPr>
+        <a:xfrm>
+          <a:off x="0" y="0"/>
+          <a:ext cx="0" cy="0"/>
+          <a:chOff x="0" y="0"/>
+          <a:chExt cx="0" cy="0"/>
+        </a:xfrm>
+      </p:grpSpPr>
+      <p:sp>
+        <p:nvSpPr>
+          <p:cNvPr id="2" name="Title 1"/>
+          <p:cNvSpPr>
+            <a:spLocks noGrp="1"/>
+          </p:cNvSpPr>
+          <p:nvPr>
+            <p:ph type="title"/>
+          </p:nvPr>
+        </p:nvSpPr>
+        <p:spPr>
+          <a:solidFill>
+            <a:srgbClr val="558ED5"/>
+          </a:solidFill>
+        </p:spPr>
+        <p:txBody>
+          <a:bodyPr/>
+          <a:lstStyle/>
+          <a:p>
+            <a:r>
+              <a:rPr lang="en-US" sz="3700" b="1" dirty="0" smtClean="0">
+                <a:solidFill>
+                  <a:schemeClr val="bg1"/>
+                </a:solidFill>
+                <a:latin typeface="Times New Roman" pitchFamily="18" charset="0"/>
+                <a:cs typeface="Times New Roman" pitchFamily="18" charset="0"/>
+              </a:rPr>
+              <a:t>11</a:t>
+            </a:r>
+            <a:r>
+              <a:rPr lang="en-US" sz="3700" b="1" dirty="0" smtClean="0">
+                <a:solidFill>
+                  <a:schemeClr val="bg1"/>
+                </a:solidFill>
+                <a:latin typeface="Times New Roman" pitchFamily="18" charset="0"/>
+                <a:cs typeface="Times New Roman" pitchFamily="18" charset="0"/>
+              </a:rPr>
+              <a:t>. EVALUATION METRICS</a:t>
+            </a:r>
+            <a:endParaRPr lang="en-US" sz="3700" b="1" dirty="0">
+              <a:solidFill>
+                <a:schemeClr val="bg1"/>
+              </a:solidFill>
+              <a:latin typeface="Times New Roman" pitchFamily="18" charset="0"/>
+              <a:cs typeface="Times New Roman" pitchFamily="18" charset="0"/>
+            </a:endParaRPr>
+          </a:p>
+        </p:txBody>
+      </p:sp>
+      <p:sp>
+        <p:nvSpPr>
+          <p:cNvPr id="4" name="Slide Number Placeholder 3"/>
+          <p:cNvSpPr>
+            <a:spLocks noGrp="1"/>
+          </p:cNvSpPr>
+          <p:nvPr>
+            <p:ph type="sldNum" sz="quarter" idx="12"/>
+          </p:nvPr>
+        </p:nvSpPr>
+        <p:spPr/>
+        <p:txBody>
+          <a:bodyPr/>
+          <a:lstStyle/>
+          <a:p>
+            <a:fld id="{C02A2637-A5A3-49FA-B214-6E67543099EF}" type="slidenum">
+              <a:rPr lang="en-US" smtClean="0"/>
+              <a:t>16</a:t>
+            </a:fld>
+            <a:endParaRPr lang="en-US"/>
+          </a:p>
+        </p:txBody>
+      </p:sp>
+    </p:spTree>
+    <p:extLst>
+      <p:ext uri="{BB962C8B-B14F-4D97-AF65-F5344CB8AC3E}">
+        <p14:creationId xmlns:p14="http://schemas.microsoft.com/office/powerpoint/2010/main" val="1415021971"/>
+      </p:ext>
+    </p:extLst>
+  </p:cSld>
+  <p:clrMapOvr>
+    <a:masterClrMapping/>
+  </p:clrMapOvr>
+  <p:timing>
+    <p:tnLst>
+      <p:par>
+        <p:cTn id="1" dur="indefinite" restart="never" nodeType="tmRoot"/>
+      </p:par>
+    </p:tnLst>
+  </p:timing>
+</p:sld>
+</file>
+
+<file path=ppt/slides/slide17.xml><?xml version="1.0" encoding="utf-8"?>
+<p:sld xmlns:a="http://schemas.openxmlformats.org/drawingml/2006/main" xmlns:r="http://schemas.openxmlformats.org/officeDocument/2006/relationships" xmlns:p="http://schemas.openxmlformats.org/presentationml/2006/main">
+  <p:cSld>
+    <p:spTree>
+      <p:nvGrpSpPr>
+        <p:cNvPr id="1" name=""/>
+        <p:cNvGrpSpPr/>
+        <p:nvPr/>
+      </p:nvGrpSpPr>
+      <p:grpSpPr>
+        <a:xfrm>
+          <a:off x="0" y="0"/>
+          <a:ext cx="0" cy="0"/>
+          <a:chOff x="0" y="0"/>
+          <a:chExt cx="0" cy="0"/>
+        </a:xfrm>
+      </p:grpSpPr>
+      <p:sp>
+        <p:nvSpPr>
+          <p:cNvPr id="2" name="Title 1"/>
+          <p:cNvSpPr>
+            <a:spLocks noGrp="1"/>
+          </p:cNvSpPr>
+          <p:nvPr>
+            <p:ph type="title"/>
+          </p:nvPr>
+        </p:nvSpPr>
+        <p:spPr>
+          <a:solidFill>
+            <a:srgbClr val="558ED5"/>
+          </a:solidFill>
+        </p:spPr>
+        <p:txBody>
+          <a:bodyPr/>
+          <a:lstStyle/>
+          <a:p>
+            <a:r>
+              <a:rPr lang="en-US" sz="3700" b="1" dirty="0" smtClean="0">
+                <a:solidFill>
+                  <a:schemeClr val="bg1"/>
+                </a:solidFill>
+                <a:latin typeface="Times New Roman" pitchFamily="18" charset="0"/>
+                <a:cs typeface="Times New Roman" pitchFamily="18" charset="0"/>
+              </a:rPr>
+              <a:t>12</a:t>
+            </a:r>
+            <a:r>
+              <a:rPr lang="en-US" sz="3700" b="1" dirty="0" smtClean="0">
+                <a:solidFill>
+                  <a:schemeClr val="bg1"/>
+                </a:solidFill>
+                <a:latin typeface="Times New Roman" pitchFamily="18" charset="0"/>
+                <a:cs typeface="Times New Roman" pitchFamily="18" charset="0"/>
+              </a:rPr>
+              <a:t>. GUIDE’S APPROVAL</a:t>
+            </a:r>
+            <a:endParaRPr lang="en-US" sz="3700" b="1" dirty="0">
+              <a:solidFill>
+                <a:schemeClr val="bg1"/>
+              </a:solidFill>
+              <a:latin typeface="Times New Roman" pitchFamily="18" charset="0"/>
+              <a:cs typeface="Times New Roman" pitchFamily="18" charset="0"/>
+            </a:endParaRPr>
+          </a:p>
+        </p:txBody>
+      </p:sp>
+      <p:sp>
+        <p:nvSpPr>
+          <p:cNvPr id="4" name="Slide Number Placeholder 3"/>
+          <p:cNvSpPr>
+            <a:spLocks noGrp="1"/>
+          </p:cNvSpPr>
+          <p:nvPr>
+            <p:ph type="sldNum" sz="quarter" idx="12"/>
+          </p:nvPr>
+        </p:nvSpPr>
+        <p:spPr/>
+        <p:txBody>
+          <a:bodyPr/>
+          <a:lstStyle/>
+          <a:p>
+            <a:fld id="{C02A2637-A5A3-49FA-B214-6E67543099EF}" type="slidenum">
+              <a:rPr lang="en-US" smtClean="0"/>
+              <a:t>17</a:t>
+            </a:fld>
+            <a:endParaRPr lang="en-US"/>
+          </a:p>
+        </p:txBody>
+      </p:sp>
+    </p:spTree>
+    <p:extLst>
+      <p:ext uri="{BB962C8B-B14F-4D97-AF65-F5344CB8AC3E}">
+        <p14:creationId xmlns:p14="http://schemas.microsoft.com/office/powerpoint/2010/main" val="1449897290"/>
+      </p:ext>
+    </p:extLst>
+  </p:cSld>
+  <p:clrMapOvr>
+    <a:masterClrMapping/>
+  </p:clrMapOvr>
+  <p:timing>
+    <p:tnLst>
+      <p:par>
+        <p:cTn id="1" dur="indefinite" restart="never" nodeType="tmRoot"/>
+      </p:par>
+    </p:tnLst>
+  </p:timing>
+</p:sld>
+</file>
+
+<file path=ppt/slides/slide18.xml><?xml version="1.0" encoding="utf-8"?>
+<p:sld xmlns:a="http://schemas.openxmlformats.org/drawingml/2006/main" xmlns:r="http://schemas.openxmlformats.org/officeDocument/2006/relationships" xmlns:p="http://schemas.openxmlformats.org/presentationml/2006/main">
+  <p:cSld>
+    <p:spTree>
+      <p:nvGrpSpPr>
+        <p:cNvPr id="1" name=""/>
+        <p:cNvGrpSpPr/>
+        <p:nvPr/>
+      </p:nvGrpSpPr>
+      <p:grpSpPr>
+        <a:xfrm>
+          <a:off x="0" y="0"/>
+          <a:ext cx="0" cy="0"/>
+          <a:chOff x="0" y="0"/>
+          <a:chExt cx="0" cy="0"/>
+        </a:xfrm>
+      </p:grpSpPr>
+      <p:sp>
+        <p:nvSpPr>
+          <p:cNvPr id="2" name="Title 1"/>
+          <p:cNvSpPr>
+            <a:spLocks noGrp="1"/>
+          </p:cNvSpPr>
+          <p:nvPr>
+            <p:ph type="title"/>
+          </p:nvPr>
+        </p:nvSpPr>
+        <p:spPr>
           <a:xfrm>
             <a:off x="651655" y="183617"/>
             <a:ext cx="11521440" cy="1219200"/>
@@ -5431,16 +9189,6 @@
           <a:lstStyle/>
           <a:p>
             <a:r>
-              <a:rPr lang="en-US" sz="3700" b="1" dirty="0">
-                <a:solidFill>
-                  <a:schemeClr val="bg1"/>
-                </a:solidFill>
-                <a:latin typeface="Times New Roman" panose="02020603050405020304" pitchFamily="18" charset="0"/>
-                <a:cs typeface="Times New Roman" pitchFamily="18" charset="0"/>
-              </a:rPr>
-              <a:t>8</a:t>
-            </a:r>
-            <a:r>
               <a:rPr lang="en-US" sz="3700" b="1" dirty="0" smtClean="0">
                 <a:solidFill>
                   <a:schemeClr val="bg1"/>
@@ -5448,7 +9196,7 @@
                 <a:latin typeface="Times New Roman" panose="02020603050405020304" pitchFamily="18" charset="0"/>
                 <a:cs typeface="Times New Roman" pitchFamily="18" charset="0"/>
               </a:rPr>
-              <a:t>. </a:t>
+              <a:t>13. </a:t>
             </a:r>
             <a:r>
               <a:rPr lang="en-US" sz="3700" b="1" dirty="0">
@@ -5488,7 +9236,7 @@
                 <a:latin typeface="Times New Roman" panose="02020603050405020304" pitchFamily="18" charset="0"/>
                 <a:cs typeface="Times New Roman" panose="02020603050405020304" pitchFamily="18" charset="0"/>
               </a:rPr>
-              <a:t>13</a:t>
+              <a:t>18</a:t>
             </a:fld>
             <a:endParaRPr lang="en-US">
               <a:latin typeface="Times New Roman" panose="02020603050405020304" pitchFamily="18" charset="0"/>
@@ -7372,7 +11120,7 @@
 </p:sld>
 </file>
 
-<file path=ppt/slides/slide14.xml><?xml version="1.0" encoding="utf-8"?>
+<file path=ppt/slides/slide19.xml><?xml version="1.0" encoding="utf-8"?>
 <p:sld xmlns:a="http://schemas.openxmlformats.org/drawingml/2006/main" xmlns:r="http://schemas.openxmlformats.org/officeDocument/2006/relationships" xmlns:p="http://schemas.openxmlformats.org/presentationml/2006/main">
   <p:cSld>
     <p:spTree>
@@ -7411,16 +11159,6 @@
           <a:lstStyle/>
           <a:p>
             <a:r>
-              <a:rPr lang="en-US" sz="3700" b="1" dirty="0">
-                <a:solidFill>
-                  <a:schemeClr val="bg1"/>
-                </a:solidFill>
-                <a:latin typeface="Times New Roman" pitchFamily="18" charset="0"/>
-                <a:cs typeface="Times New Roman" pitchFamily="18" charset="0"/>
-              </a:rPr>
-              <a:t>9</a:t>
-            </a:r>
-            <a:r>
               <a:rPr lang="en-US" sz="3700" b="1" dirty="0" smtClean="0">
                 <a:solidFill>
                   <a:schemeClr val="bg1"/>
@@ -7428,7 +11166,7 @@
                 <a:latin typeface="Times New Roman" pitchFamily="18" charset="0"/>
                 <a:cs typeface="Times New Roman" pitchFamily="18" charset="0"/>
               </a:rPr>
-              <a:t>. </a:t>
+              <a:t>14. </a:t>
             </a:r>
             <a:r>
               <a:rPr lang="en-US" sz="3700" b="1" dirty="0" smtClean="0">
@@ -7467,7 +11205,7 @@
           <a:p>
             <a:fld id="{C02A2637-A5A3-49FA-B214-6E67543099EF}" type="slidenum">
               <a:rPr lang="en-US" smtClean="0"/>
-              <a:t>14</a:t>
+              <a:t>19</a:t>
             </a:fld>
             <a:endParaRPr lang="en-US" dirty="0"/>
           </a:p>
@@ -7742,989 +11480,6 @@
     <p:extLst>
       <p:ext uri="{BB962C8B-B14F-4D97-AF65-F5344CB8AC3E}">
         <p14:creationId xmlns:p14="http://schemas.microsoft.com/office/powerpoint/2010/main" val="190899723"/>
-      </p:ext>
-    </p:extLst>
-  </p:cSld>
-  <p:clrMapOvr>
-    <a:masterClrMapping/>
-  </p:clrMapOvr>
-  <p:timing>
-    <p:tnLst>
-      <p:par>
-        <p:cTn id="1" dur="indefinite" restart="never" nodeType="tmRoot"/>
-      </p:par>
-    </p:tnLst>
-  </p:timing>
-</p:sld>
-</file>
-
-<file path=ppt/slides/slide15.xml><?xml version="1.0" encoding="utf-8"?>
-<p:sld xmlns:a="http://schemas.openxmlformats.org/drawingml/2006/main" xmlns:r="http://schemas.openxmlformats.org/officeDocument/2006/relationships" xmlns:p="http://schemas.openxmlformats.org/presentationml/2006/main">
-  <p:cSld>
-    <p:spTree>
-      <p:nvGrpSpPr>
-        <p:cNvPr id="1" name=""/>
-        <p:cNvGrpSpPr/>
-        <p:nvPr/>
-      </p:nvGrpSpPr>
-      <p:grpSpPr>
-        <a:xfrm>
-          <a:off x="0" y="0"/>
-          <a:ext cx="0" cy="0"/>
-          <a:chOff x="0" y="0"/>
-          <a:chExt cx="0" cy="0"/>
-        </a:xfrm>
-      </p:grpSpPr>
-      <p:sp>
-        <p:nvSpPr>
-          <p:cNvPr id="2" name="Title 1"/>
-          <p:cNvSpPr>
-            <a:spLocks noGrp="1"/>
-          </p:cNvSpPr>
-          <p:nvPr>
-            <p:ph type="title"/>
-          </p:nvPr>
-        </p:nvSpPr>
-        <p:spPr>
-          <a:solidFill>
-            <a:srgbClr val="558ED5"/>
-          </a:solidFill>
-        </p:spPr>
-        <p:txBody>
-          <a:bodyPr>
-            <a:normAutofit/>
-          </a:bodyPr>
-          <a:lstStyle/>
-          <a:p>
-            <a:r>
-              <a:rPr lang="en-US" sz="3700" b="1" dirty="0">
-                <a:solidFill>
-                  <a:schemeClr val="bg1"/>
-                </a:solidFill>
-                <a:latin typeface="Times New Roman" pitchFamily="18" charset="0"/>
-                <a:cs typeface="Times New Roman" pitchFamily="18" charset="0"/>
-              </a:rPr>
-              <a:t>REFERENCES (CONTD</a:t>
-            </a:r>
-            <a:r>
-              <a:rPr lang="en-US" sz="3700" b="1" dirty="0" smtClean="0">
-                <a:solidFill>
-                  <a:schemeClr val="bg1"/>
-                </a:solidFill>
-                <a:latin typeface="Times New Roman" pitchFamily="18" charset="0"/>
-                <a:cs typeface="Times New Roman" pitchFamily="18" charset="0"/>
-              </a:rPr>
-              <a:t>..)</a:t>
-            </a:r>
-            <a:endParaRPr lang="en-US" sz="3700" b="1" dirty="0">
-              <a:solidFill>
-                <a:schemeClr val="bg1"/>
-              </a:solidFill>
-              <a:latin typeface="Times New Roman" pitchFamily="18" charset="0"/>
-              <a:cs typeface="Times New Roman" pitchFamily="18" charset="0"/>
-            </a:endParaRPr>
-          </a:p>
-        </p:txBody>
-      </p:sp>
-      <p:sp>
-        <p:nvSpPr>
-          <p:cNvPr id="4" name="Slide Number Placeholder 3"/>
-          <p:cNvSpPr>
-            <a:spLocks noGrp="1"/>
-          </p:cNvSpPr>
-          <p:nvPr>
-            <p:ph type="sldNum" sz="quarter" idx="12"/>
-          </p:nvPr>
-        </p:nvSpPr>
-        <p:spPr/>
-        <p:txBody>
-          <a:bodyPr/>
-          <a:lstStyle/>
-          <a:p>
-            <a:fld id="{C02A2637-A5A3-49FA-B214-6E67543099EF}" type="slidenum">
-              <a:rPr lang="en-US" smtClean="0"/>
-              <a:t>15</a:t>
-            </a:fld>
-            <a:endParaRPr lang="en-US" dirty="0"/>
-          </a:p>
-        </p:txBody>
-      </p:sp>
-      <p:sp>
-        <p:nvSpPr>
-          <p:cNvPr id="3" name="Rectangle 2"/>
-          <p:cNvSpPr/>
-          <p:nvPr/>
-        </p:nvSpPr>
-        <p:spPr>
-          <a:xfrm>
-            <a:off x="640080" y="1628503"/>
-            <a:ext cx="11521440" cy="5401479"/>
-          </a:xfrm>
-          <a:prstGeom prst="rect">
-            <a:avLst/>
-          </a:prstGeom>
-        </p:spPr>
-        <p:txBody>
-          <a:bodyPr wrap="square">
-            <a:spAutoFit/>
-          </a:bodyPr>
-          <a:lstStyle/>
-          <a:p>
-            <a:pPr marL="342900" indent="-342900">
-              <a:buFont typeface="Arial" panose="020B0604020202020204" pitchFamily="34" charset="0"/>
-              <a:buChar char="•"/>
-            </a:pPr>
-            <a:r>
-              <a:rPr lang="en-US" b="1" dirty="0" err="1">
-                <a:latin typeface="Times New Roman" panose="02020603050405020304" pitchFamily="18" charset="0"/>
-                <a:cs typeface="Times New Roman" panose="02020603050405020304" pitchFamily="18" charset="0"/>
-              </a:rPr>
-              <a:t>Abrol</a:t>
-            </a:r>
-            <a:r>
-              <a:rPr lang="en-US" b="1" dirty="0">
-                <a:latin typeface="Times New Roman" panose="02020603050405020304" pitchFamily="18" charset="0"/>
-                <a:cs typeface="Times New Roman" panose="02020603050405020304" pitchFamily="18" charset="0"/>
-              </a:rPr>
-              <a:t>, A., </a:t>
-            </a:r>
-            <a:r>
-              <a:rPr lang="en-US" b="1" dirty="0" err="1">
-                <a:latin typeface="Times New Roman" panose="02020603050405020304" pitchFamily="18" charset="0"/>
-                <a:cs typeface="Times New Roman" panose="02020603050405020304" pitchFamily="18" charset="0"/>
-              </a:rPr>
-              <a:t>Bhattarai</a:t>
-            </a:r>
-            <a:r>
-              <a:rPr lang="en-US" b="1" dirty="0">
-                <a:latin typeface="Times New Roman" panose="02020603050405020304" pitchFamily="18" charset="0"/>
-                <a:cs typeface="Times New Roman" panose="02020603050405020304" pitchFamily="18" charset="0"/>
-              </a:rPr>
-              <a:t>, M., </a:t>
-            </a:r>
-            <a:r>
-              <a:rPr lang="en-US" b="1" dirty="0" err="1">
-                <a:latin typeface="Times New Roman" panose="02020603050405020304" pitchFamily="18" charset="0"/>
-                <a:cs typeface="Times New Roman" panose="02020603050405020304" pitchFamily="18" charset="0"/>
-              </a:rPr>
-              <a:t>Fedorov</a:t>
-            </a:r>
-            <a:r>
-              <a:rPr lang="en-US" b="1" dirty="0">
-                <a:latin typeface="Times New Roman" panose="02020603050405020304" pitchFamily="18" charset="0"/>
-                <a:cs typeface="Times New Roman" panose="02020603050405020304" pitchFamily="18" charset="0"/>
-              </a:rPr>
-              <a:t>, A., et al. (2020).</a:t>
-            </a:r>
-            <a:r>
-              <a:rPr lang="en-US" dirty="0">
-                <a:latin typeface="Times New Roman" panose="02020603050405020304" pitchFamily="18" charset="0"/>
-                <a:cs typeface="Times New Roman" panose="02020603050405020304" pitchFamily="18" charset="0"/>
-              </a:rPr>
-              <a:t> Deep residual learning for neuroimaging: An application to predict progression to Alzheimer’s disease. </a:t>
-            </a:r>
-            <a:r>
-              <a:rPr lang="en-US" i="1" dirty="0">
-                <a:latin typeface="Times New Roman" panose="02020603050405020304" pitchFamily="18" charset="0"/>
-                <a:cs typeface="Times New Roman" panose="02020603050405020304" pitchFamily="18" charset="0"/>
-              </a:rPr>
-              <a:t>Journal of Neuroscience Methods, 339</a:t>
-            </a:r>
-            <a:r>
-              <a:rPr lang="en-US" dirty="0">
-                <a:latin typeface="Times New Roman" panose="02020603050405020304" pitchFamily="18" charset="0"/>
-                <a:cs typeface="Times New Roman" panose="02020603050405020304" pitchFamily="18" charset="0"/>
-              </a:rPr>
-              <a:t>, 108701. </a:t>
-            </a:r>
-            <a:r>
-              <a:rPr lang="en-US" dirty="0">
-                <a:latin typeface="Times New Roman" panose="02020603050405020304" pitchFamily="18" charset="0"/>
-                <a:cs typeface="Times New Roman" panose="02020603050405020304" pitchFamily="18" charset="0"/>
-                <a:hlinkClick r:id="rId2"/>
-              </a:rPr>
-              <a:t>https://</a:t>
-            </a:r>
-            <a:r>
-              <a:rPr lang="en-US" dirty="0" smtClean="0">
-                <a:latin typeface="Times New Roman" panose="02020603050405020304" pitchFamily="18" charset="0"/>
-                <a:cs typeface="Times New Roman" panose="02020603050405020304" pitchFamily="18" charset="0"/>
-                <a:hlinkClick r:id="rId2"/>
-              </a:rPr>
-              <a:t>doi.org/10.1016/j.jneumeth.2020.108701</a:t>
-            </a:r>
-            <a:r>
-              <a:rPr lang="en-US" dirty="0" smtClean="0">
-                <a:latin typeface="Times New Roman" panose="02020603050405020304" pitchFamily="18" charset="0"/>
-                <a:cs typeface="Times New Roman" panose="02020603050405020304" pitchFamily="18" charset="0"/>
-              </a:rPr>
-              <a:t/>
-            </a:r>
-            <a:br>
-              <a:rPr lang="en-US" dirty="0" smtClean="0">
-                <a:latin typeface="Times New Roman" panose="02020603050405020304" pitchFamily="18" charset="0"/>
-                <a:cs typeface="Times New Roman" panose="02020603050405020304" pitchFamily="18" charset="0"/>
-              </a:rPr>
-            </a:br>
-            <a:endParaRPr lang="en-IN" dirty="0" smtClean="0">
-              <a:latin typeface="Times New Roman" panose="02020603050405020304" pitchFamily="18" charset="0"/>
-              <a:cs typeface="Times New Roman" panose="02020603050405020304" pitchFamily="18" charset="0"/>
-            </a:endParaRPr>
-          </a:p>
-          <a:p>
-            <a:pPr marL="342900" indent="-342900">
-              <a:buFont typeface="Arial" panose="020B0604020202020204" pitchFamily="34" charset="0"/>
-              <a:buChar char="•"/>
-            </a:pPr>
-            <a:r>
-              <a:rPr lang="en-IN" b="1" dirty="0" err="1">
-                <a:latin typeface="Times New Roman" panose="02020603050405020304" pitchFamily="18" charset="0"/>
-                <a:cs typeface="Times New Roman" panose="02020603050405020304" pitchFamily="18" charset="0"/>
-              </a:rPr>
-              <a:t>Venugopalan</a:t>
-            </a:r>
-            <a:r>
-              <a:rPr lang="en-IN" b="1" dirty="0">
-                <a:latin typeface="Times New Roman" panose="02020603050405020304" pitchFamily="18" charset="0"/>
-                <a:cs typeface="Times New Roman" panose="02020603050405020304" pitchFamily="18" charset="0"/>
-              </a:rPr>
-              <a:t>, J., Tong, L., </a:t>
-            </a:r>
-            <a:r>
-              <a:rPr lang="en-IN" b="1" dirty="0" err="1">
-                <a:latin typeface="Times New Roman" panose="02020603050405020304" pitchFamily="18" charset="0"/>
-                <a:cs typeface="Times New Roman" panose="02020603050405020304" pitchFamily="18" charset="0"/>
-              </a:rPr>
-              <a:t>Hassanzadeh</a:t>
-            </a:r>
-            <a:r>
-              <a:rPr lang="en-IN" b="1" dirty="0">
-                <a:latin typeface="Times New Roman" panose="02020603050405020304" pitchFamily="18" charset="0"/>
-                <a:cs typeface="Times New Roman" panose="02020603050405020304" pitchFamily="18" charset="0"/>
-              </a:rPr>
-              <a:t>, H. R., &amp; Wang, M. D. (2021).</a:t>
-            </a:r>
-            <a:r>
-              <a:rPr lang="en-IN" dirty="0">
-                <a:latin typeface="Times New Roman" panose="02020603050405020304" pitchFamily="18" charset="0"/>
-                <a:cs typeface="Times New Roman" panose="02020603050405020304" pitchFamily="18" charset="0"/>
-              </a:rPr>
-              <a:t> Multimodal deep learning models for early detection of Alzheimer’s disease stage. </a:t>
-            </a:r>
-            <a:r>
-              <a:rPr lang="en-IN" i="1" dirty="0">
-                <a:latin typeface="Times New Roman" panose="02020603050405020304" pitchFamily="18" charset="0"/>
-                <a:cs typeface="Times New Roman" panose="02020603050405020304" pitchFamily="18" charset="0"/>
-              </a:rPr>
-              <a:t>Scientific Reports, 11</a:t>
-            </a:r>
-            <a:r>
-              <a:rPr lang="en-IN" dirty="0">
-                <a:latin typeface="Times New Roman" panose="02020603050405020304" pitchFamily="18" charset="0"/>
-                <a:cs typeface="Times New Roman" panose="02020603050405020304" pitchFamily="18" charset="0"/>
-              </a:rPr>
-              <a:t>, 3254</a:t>
-            </a:r>
-            <a:r>
-              <a:rPr lang="en-IN" dirty="0" smtClean="0">
-                <a:latin typeface="Times New Roman" panose="02020603050405020304" pitchFamily="18" charset="0"/>
-                <a:cs typeface="Times New Roman" panose="02020603050405020304" pitchFamily="18" charset="0"/>
-              </a:rPr>
-              <a:t>.</a:t>
-            </a:r>
-            <a:br>
-              <a:rPr lang="en-IN" dirty="0" smtClean="0">
-                <a:latin typeface="Times New Roman" panose="02020603050405020304" pitchFamily="18" charset="0"/>
-                <a:cs typeface="Times New Roman" panose="02020603050405020304" pitchFamily="18" charset="0"/>
-              </a:rPr>
-            </a:br>
-            <a:r>
-              <a:rPr lang="en-IN" dirty="0" smtClean="0">
-                <a:latin typeface="Times New Roman" panose="02020603050405020304" pitchFamily="18" charset="0"/>
-                <a:cs typeface="Times New Roman" panose="02020603050405020304" pitchFamily="18" charset="0"/>
-                <a:hlinkClick r:id="rId3"/>
-              </a:rPr>
-              <a:t>https</a:t>
-            </a:r>
-            <a:r>
-              <a:rPr lang="en-IN" dirty="0">
-                <a:latin typeface="Times New Roman" panose="02020603050405020304" pitchFamily="18" charset="0"/>
-                <a:cs typeface="Times New Roman" panose="02020603050405020304" pitchFamily="18" charset="0"/>
-                <a:hlinkClick r:id="rId3"/>
-              </a:rPr>
-              <a:t>://</a:t>
-            </a:r>
-            <a:r>
-              <a:rPr lang="en-IN" dirty="0" smtClean="0">
-                <a:latin typeface="Times New Roman" panose="02020603050405020304" pitchFamily="18" charset="0"/>
-                <a:cs typeface="Times New Roman" panose="02020603050405020304" pitchFamily="18" charset="0"/>
-                <a:hlinkClick r:id="rId3"/>
-              </a:rPr>
-              <a:t>doi.org/10.1038/s41598-020-74399-w</a:t>
-            </a:r>
-            <a:r>
-              <a:rPr lang="en-IN" dirty="0" smtClean="0">
-                <a:latin typeface="Times New Roman" panose="02020603050405020304" pitchFamily="18" charset="0"/>
-                <a:cs typeface="Times New Roman" panose="02020603050405020304" pitchFamily="18" charset="0"/>
-              </a:rPr>
-              <a:t/>
-            </a:r>
-            <a:br>
-              <a:rPr lang="en-IN" dirty="0" smtClean="0">
-                <a:latin typeface="Times New Roman" panose="02020603050405020304" pitchFamily="18" charset="0"/>
-                <a:cs typeface="Times New Roman" panose="02020603050405020304" pitchFamily="18" charset="0"/>
-              </a:rPr>
-            </a:br>
-            <a:endParaRPr lang="en-IN" dirty="0">
-              <a:latin typeface="Times New Roman" panose="02020603050405020304" pitchFamily="18" charset="0"/>
-              <a:cs typeface="Times New Roman" panose="02020603050405020304" pitchFamily="18" charset="0"/>
-            </a:endParaRPr>
-          </a:p>
-          <a:p>
-            <a:pPr marL="342900" indent="-342900">
-              <a:buFont typeface="Arial" panose="020B0604020202020204" pitchFamily="34" charset="0"/>
-              <a:buChar char="•"/>
-            </a:pPr>
-            <a:r>
-              <a:rPr lang="en-IN" b="1" dirty="0" err="1">
-                <a:latin typeface="Times New Roman" panose="02020603050405020304" pitchFamily="18" charset="0"/>
-                <a:cs typeface="Times New Roman" panose="02020603050405020304" pitchFamily="18" charset="0"/>
-              </a:rPr>
-              <a:t>Aghaei</a:t>
-            </a:r>
-            <a:r>
-              <a:rPr lang="en-IN" b="1" dirty="0">
-                <a:latin typeface="Times New Roman" panose="02020603050405020304" pitchFamily="18" charset="0"/>
-                <a:cs typeface="Times New Roman" panose="02020603050405020304" pitchFamily="18" charset="0"/>
-              </a:rPr>
-              <a:t>, A., &amp; </a:t>
-            </a:r>
-            <a:r>
-              <a:rPr lang="en-IN" b="1" dirty="0" err="1">
-                <a:latin typeface="Times New Roman" panose="02020603050405020304" pitchFamily="18" charset="0"/>
-                <a:cs typeface="Times New Roman" panose="02020603050405020304" pitchFamily="18" charset="0"/>
-              </a:rPr>
-              <a:t>Ebrahimi</a:t>
-            </a:r>
-            <a:r>
-              <a:rPr lang="en-IN" b="1" dirty="0">
-                <a:latin typeface="Times New Roman" panose="02020603050405020304" pitchFamily="18" charset="0"/>
-                <a:cs typeface="Times New Roman" panose="02020603050405020304" pitchFamily="18" charset="0"/>
-              </a:rPr>
-              <a:t> </a:t>
-            </a:r>
-            <a:r>
-              <a:rPr lang="en-IN" b="1" dirty="0" err="1">
-                <a:latin typeface="Times New Roman" panose="02020603050405020304" pitchFamily="18" charset="0"/>
-                <a:cs typeface="Times New Roman" panose="02020603050405020304" pitchFamily="18" charset="0"/>
-              </a:rPr>
-              <a:t>Moghaddam</a:t>
-            </a:r>
-            <a:r>
-              <a:rPr lang="en-IN" b="1" dirty="0">
-                <a:latin typeface="Times New Roman" panose="02020603050405020304" pitchFamily="18" charset="0"/>
-                <a:cs typeface="Times New Roman" panose="02020603050405020304" pitchFamily="18" charset="0"/>
-              </a:rPr>
-              <a:t>, M. (2023).</a:t>
-            </a:r>
-            <a:r>
-              <a:rPr lang="en-IN" dirty="0">
-                <a:latin typeface="Times New Roman" panose="02020603050405020304" pitchFamily="18" charset="0"/>
-                <a:cs typeface="Times New Roman" panose="02020603050405020304" pitchFamily="18" charset="0"/>
-              </a:rPr>
-              <a:t> Smart ROI detection for Alzheimer’s disease prediction using explainable AI. </a:t>
-            </a:r>
-            <a:r>
-              <a:rPr lang="en-IN" i="1" dirty="0">
-                <a:latin typeface="Times New Roman" panose="02020603050405020304" pitchFamily="18" charset="0"/>
-                <a:cs typeface="Times New Roman" panose="02020603050405020304" pitchFamily="18" charset="0"/>
-              </a:rPr>
-              <a:t>[Preprint]</a:t>
-            </a:r>
-            <a:r>
-              <a:rPr lang="en-IN" dirty="0">
-                <a:latin typeface="Times New Roman" panose="02020603050405020304" pitchFamily="18" charset="0"/>
-                <a:cs typeface="Times New Roman" panose="02020603050405020304" pitchFamily="18" charset="0"/>
-              </a:rPr>
-              <a:t>. </a:t>
-            </a:r>
-            <a:r>
-              <a:rPr lang="en-IN" dirty="0" smtClean="0">
-                <a:latin typeface="Times New Roman" panose="02020603050405020304" pitchFamily="18" charset="0"/>
-                <a:cs typeface="Times New Roman" panose="02020603050405020304" pitchFamily="18" charset="0"/>
-              </a:rPr>
-              <a:t/>
-            </a:r>
-            <a:br>
-              <a:rPr lang="en-IN" dirty="0" smtClean="0">
-                <a:latin typeface="Times New Roman" panose="02020603050405020304" pitchFamily="18" charset="0"/>
-                <a:cs typeface="Times New Roman" panose="02020603050405020304" pitchFamily="18" charset="0"/>
-              </a:rPr>
-            </a:br>
-            <a:endParaRPr lang="en-US" dirty="0">
-              <a:latin typeface="Times New Roman" panose="02020603050405020304" pitchFamily="18" charset="0"/>
-              <a:cs typeface="Times New Roman" panose="02020603050405020304" pitchFamily="18" charset="0"/>
-            </a:endParaRPr>
-          </a:p>
-          <a:p>
-            <a:pPr marL="342900" indent="-342900">
-              <a:buFont typeface="Arial" panose="020B0604020202020204" pitchFamily="34" charset="0"/>
-              <a:buChar char="•"/>
-            </a:pPr>
-            <a:r>
-              <a:rPr lang="en-US" b="1" dirty="0" err="1">
-                <a:latin typeface="Times New Roman" panose="02020603050405020304" pitchFamily="18" charset="0"/>
-                <a:cs typeface="Times New Roman" panose="02020603050405020304" pitchFamily="18" charset="0"/>
-              </a:rPr>
-              <a:t>Geng</a:t>
-            </a:r>
-            <a:r>
-              <a:rPr lang="en-US" b="1" dirty="0">
-                <a:latin typeface="Times New Roman" panose="02020603050405020304" pitchFamily="18" charset="0"/>
-                <a:cs typeface="Times New Roman" panose="02020603050405020304" pitchFamily="18" charset="0"/>
-              </a:rPr>
-              <a:t>, Y., &amp; Zhang, H. (2026).</a:t>
-            </a:r>
-            <a:r>
-              <a:rPr lang="en-US" dirty="0">
-                <a:latin typeface="Times New Roman" panose="02020603050405020304" pitchFamily="18" charset="0"/>
-                <a:cs typeface="Times New Roman" panose="02020603050405020304" pitchFamily="18" charset="0"/>
-              </a:rPr>
-              <a:t> Machine-learning prediction and risk stratification of 12-month cognitive decline in Alzheimer’s disease using routine clinical and MRI data. </a:t>
-            </a:r>
-            <a:r>
-              <a:rPr lang="en-US" i="1" dirty="0">
-                <a:latin typeface="Times New Roman" panose="02020603050405020304" pitchFamily="18" charset="0"/>
-                <a:cs typeface="Times New Roman" panose="02020603050405020304" pitchFamily="18" charset="0"/>
-              </a:rPr>
-              <a:t>Scientific Reports, 16</a:t>
-            </a:r>
-            <a:r>
-              <a:rPr lang="en-US" dirty="0">
-                <a:latin typeface="Times New Roman" panose="02020603050405020304" pitchFamily="18" charset="0"/>
-                <a:cs typeface="Times New Roman" panose="02020603050405020304" pitchFamily="18" charset="0"/>
-              </a:rPr>
-              <a:t>, 12227. https://doi.org/10.1038/s41598-026-43321-1</a:t>
-            </a:r>
-            <a:r>
-              <a:rPr lang="en-US" dirty="0" smtClean="0">
-                <a:latin typeface="Times New Roman" panose="02020603050405020304" pitchFamily="18" charset="0"/>
-                <a:cs typeface="Times New Roman" panose="02020603050405020304" pitchFamily="18" charset="0"/>
-              </a:rPr>
-              <a:t/>
-            </a:r>
-            <a:br>
-              <a:rPr lang="en-US" dirty="0" smtClean="0">
-                <a:latin typeface="Times New Roman" panose="02020603050405020304" pitchFamily="18" charset="0"/>
-                <a:cs typeface="Times New Roman" panose="02020603050405020304" pitchFamily="18" charset="0"/>
-              </a:rPr>
-            </a:br>
-            <a:endParaRPr lang="en-IN" dirty="0">
-              <a:latin typeface="Times New Roman" panose="02020603050405020304" pitchFamily="18" charset="0"/>
-              <a:cs typeface="Times New Roman" panose="02020603050405020304" pitchFamily="18" charset="0"/>
-            </a:endParaRPr>
-          </a:p>
-        </p:txBody>
-      </p:sp>
-    </p:spTree>
-    <p:extLst>
-      <p:ext uri="{BB962C8B-B14F-4D97-AF65-F5344CB8AC3E}">
-        <p14:creationId xmlns:p14="http://schemas.microsoft.com/office/powerpoint/2010/main" val="365677003"/>
-      </p:ext>
-    </p:extLst>
-  </p:cSld>
-  <p:clrMapOvr>
-    <a:masterClrMapping/>
-  </p:clrMapOvr>
-  <p:timing>
-    <p:tnLst>
-      <p:par>
-        <p:cTn id="1" dur="indefinite" restart="never" nodeType="tmRoot"/>
-      </p:par>
-    </p:tnLst>
-  </p:timing>
-</p:sld>
-</file>
-
-<file path=ppt/slides/slide16.xml><?xml version="1.0" encoding="utf-8"?>
-<p:sld xmlns:a="http://schemas.openxmlformats.org/drawingml/2006/main" xmlns:r="http://schemas.openxmlformats.org/officeDocument/2006/relationships" xmlns:p="http://schemas.openxmlformats.org/presentationml/2006/main">
-  <p:cSld>
-    <p:spTree>
-      <p:nvGrpSpPr>
-        <p:cNvPr id="1" name=""/>
-        <p:cNvGrpSpPr/>
-        <p:nvPr/>
-      </p:nvGrpSpPr>
-      <p:grpSpPr>
-        <a:xfrm>
-          <a:off x="0" y="0"/>
-          <a:ext cx="0" cy="0"/>
-          <a:chOff x="0" y="0"/>
-          <a:chExt cx="0" cy="0"/>
-        </a:xfrm>
-      </p:grpSpPr>
-      <p:sp>
-        <p:nvSpPr>
-          <p:cNvPr id="2" name="Title 1"/>
-          <p:cNvSpPr>
-            <a:spLocks noGrp="1"/>
-          </p:cNvSpPr>
-          <p:nvPr>
-            <p:ph type="title"/>
-          </p:nvPr>
-        </p:nvSpPr>
-        <p:spPr>
-          <a:solidFill>
-            <a:srgbClr val="558ED5"/>
-          </a:solidFill>
-        </p:spPr>
-        <p:txBody>
-          <a:bodyPr>
-            <a:normAutofit/>
-          </a:bodyPr>
-          <a:lstStyle/>
-          <a:p>
-            <a:r>
-              <a:rPr lang="en-US" sz="3700" b="1" dirty="0">
-                <a:solidFill>
-                  <a:schemeClr val="bg1"/>
-                </a:solidFill>
-                <a:latin typeface="Times New Roman" pitchFamily="18" charset="0"/>
-                <a:cs typeface="Times New Roman" pitchFamily="18" charset="0"/>
-              </a:rPr>
-              <a:t>REFERENCES (CONTD</a:t>
-            </a:r>
-            <a:r>
-              <a:rPr lang="en-US" sz="3700" b="1" dirty="0" smtClean="0">
-                <a:solidFill>
-                  <a:schemeClr val="bg1"/>
-                </a:solidFill>
-                <a:latin typeface="Times New Roman" pitchFamily="18" charset="0"/>
-                <a:cs typeface="Times New Roman" pitchFamily="18" charset="0"/>
-              </a:rPr>
-              <a:t>..)</a:t>
-            </a:r>
-            <a:endParaRPr lang="en-US" sz="3700" b="1" dirty="0">
-              <a:solidFill>
-                <a:schemeClr val="bg1"/>
-              </a:solidFill>
-              <a:latin typeface="Times New Roman" pitchFamily="18" charset="0"/>
-              <a:cs typeface="Times New Roman" pitchFamily="18" charset="0"/>
-            </a:endParaRPr>
-          </a:p>
-        </p:txBody>
-      </p:sp>
-      <p:sp>
-        <p:nvSpPr>
-          <p:cNvPr id="4" name="Slide Number Placeholder 3"/>
-          <p:cNvSpPr>
-            <a:spLocks noGrp="1"/>
-          </p:cNvSpPr>
-          <p:nvPr>
-            <p:ph type="sldNum" sz="quarter" idx="12"/>
-          </p:nvPr>
-        </p:nvSpPr>
-        <p:spPr/>
-        <p:txBody>
-          <a:bodyPr/>
-          <a:lstStyle/>
-          <a:p>
-            <a:fld id="{C02A2637-A5A3-49FA-B214-6E67543099EF}" type="slidenum">
-              <a:rPr lang="en-US" smtClean="0"/>
-              <a:t>16</a:t>
-            </a:fld>
-            <a:endParaRPr lang="en-US" dirty="0"/>
-          </a:p>
-        </p:txBody>
-      </p:sp>
-      <p:sp>
-        <p:nvSpPr>
-          <p:cNvPr id="3" name="Rectangle 2"/>
-          <p:cNvSpPr/>
-          <p:nvPr/>
-        </p:nvSpPr>
-        <p:spPr>
-          <a:xfrm>
-            <a:off x="640080" y="1812175"/>
-            <a:ext cx="11521440" cy="5401479"/>
-          </a:xfrm>
-          <a:prstGeom prst="rect">
-            <a:avLst/>
-          </a:prstGeom>
-        </p:spPr>
-        <p:txBody>
-          <a:bodyPr wrap="square">
-            <a:spAutoFit/>
-          </a:bodyPr>
-          <a:lstStyle/>
-          <a:p>
-            <a:pPr marL="342900" indent="-342900">
-              <a:buFont typeface="Arial" panose="020B0604020202020204" pitchFamily="34" charset="0"/>
-              <a:buChar char="•"/>
-            </a:pPr>
-            <a:r>
-              <a:rPr lang="en-IN" b="1" dirty="0" err="1">
-                <a:latin typeface="Times New Roman" panose="02020603050405020304" pitchFamily="18" charset="0"/>
-                <a:cs typeface="Times New Roman" panose="02020603050405020304" pitchFamily="18" charset="0"/>
-              </a:rPr>
-              <a:t>LaMontagne</a:t>
-            </a:r>
-            <a:r>
-              <a:rPr lang="en-IN" b="1" dirty="0">
-                <a:latin typeface="Times New Roman" panose="02020603050405020304" pitchFamily="18" charset="0"/>
-                <a:cs typeface="Times New Roman" panose="02020603050405020304" pitchFamily="18" charset="0"/>
-              </a:rPr>
-              <a:t>, P. J., et al. (2018).</a:t>
-            </a:r>
-            <a:r>
-              <a:rPr lang="en-IN" dirty="0">
-                <a:latin typeface="Times New Roman" panose="02020603050405020304" pitchFamily="18" charset="0"/>
-                <a:cs typeface="Times New Roman" panose="02020603050405020304" pitchFamily="18" charset="0"/>
-              </a:rPr>
-              <a:t> OASIS-3: Longitudinal neuroimaging, clinical, and cognitive dataset for normal aging and Alzheimer’s disease. </a:t>
-            </a:r>
-            <a:r>
-              <a:rPr lang="en-IN" i="1" dirty="0">
-                <a:latin typeface="Times New Roman" panose="02020603050405020304" pitchFamily="18" charset="0"/>
-                <a:cs typeface="Times New Roman" panose="02020603050405020304" pitchFamily="18" charset="0"/>
-              </a:rPr>
-              <a:t>Alzheimer’s &amp; Dementia</a:t>
-            </a:r>
-            <a:r>
-              <a:rPr lang="en-IN" dirty="0">
-                <a:latin typeface="Times New Roman" panose="02020603050405020304" pitchFamily="18" charset="0"/>
-                <a:cs typeface="Times New Roman" panose="02020603050405020304" pitchFamily="18" charset="0"/>
-              </a:rPr>
-              <a:t>. </a:t>
-            </a:r>
-            <a:r>
-              <a:rPr lang="en-IN" dirty="0">
-                <a:latin typeface="Times New Roman" panose="02020603050405020304" pitchFamily="18" charset="0"/>
-                <a:cs typeface="Times New Roman" panose="02020603050405020304" pitchFamily="18" charset="0"/>
-                <a:hlinkClick r:id="rId2"/>
-              </a:rPr>
-              <a:t>https://</a:t>
-            </a:r>
-            <a:r>
-              <a:rPr lang="en-IN" dirty="0" smtClean="0">
-                <a:latin typeface="Times New Roman" panose="02020603050405020304" pitchFamily="18" charset="0"/>
-                <a:cs typeface="Times New Roman" panose="02020603050405020304" pitchFamily="18" charset="0"/>
-                <a:hlinkClick r:id="rId2"/>
-              </a:rPr>
-              <a:t>doi.org/10.1016/j.jalz.2018.06.2231</a:t>
-            </a:r>
-            <a:r>
-              <a:rPr lang="en-IN" dirty="0" smtClean="0">
-                <a:latin typeface="Times New Roman" panose="02020603050405020304" pitchFamily="18" charset="0"/>
-                <a:cs typeface="Times New Roman" panose="02020603050405020304" pitchFamily="18" charset="0"/>
-              </a:rPr>
-              <a:t/>
-            </a:r>
-            <a:br>
-              <a:rPr lang="en-IN" dirty="0" smtClean="0">
-                <a:latin typeface="Times New Roman" panose="02020603050405020304" pitchFamily="18" charset="0"/>
-                <a:cs typeface="Times New Roman" panose="02020603050405020304" pitchFamily="18" charset="0"/>
-              </a:rPr>
-            </a:br>
-            <a:endParaRPr lang="en-IN" dirty="0" smtClean="0">
-              <a:latin typeface="Times New Roman" panose="02020603050405020304" pitchFamily="18" charset="0"/>
-              <a:cs typeface="Times New Roman" panose="02020603050405020304" pitchFamily="18" charset="0"/>
-            </a:endParaRPr>
-          </a:p>
-          <a:p>
-            <a:pPr marL="342900" indent="-342900">
-              <a:buFont typeface="Arial" panose="020B0604020202020204" pitchFamily="34" charset="0"/>
-              <a:buChar char="•"/>
-            </a:pPr>
-            <a:r>
-              <a:rPr lang="en-IN" b="1" dirty="0">
-                <a:latin typeface="Times New Roman" panose="02020603050405020304" pitchFamily="18" charset="0"/>
-                <a:cs typeface="Times New Roman" panose="02020603050405020304" pitchFamily="18" charset="0"/>
-              </a:rPr>
-              <a:t>Wang, D., Florian, H., Lynch, S. Y., et al. (2025).</a:t>
-            </a:r>
-            <a:r>
-              <a:rPr lang="en-IN" dirty="0">
-                <a:latin typeface="Times New Roman" panose="02020603050405020304" pitchFamily="18" charset="0"/>
-                <a:cs typeface="Times New Roman" panose="02020603050405020304" pitchFamily="18" charset="0"/>
-              </a:rPr>
-              <a:t> Assessment of AI-generated digital twin methodology on reduction of treatment effect variance and potential clinical trial sample size saving using a Phase 2 trial dataset from patients with Alzheimer’s disease. </a:t>
-            </a:r>
-            <a:r>
-              <a:rPr lang="en-IN" i="1" dirty="0">
-                <a:latin typeface="Times New Roman" panose="02020603050405020304" pitchFamily="18" charset="0"/>
-                <a:cs typeface="Times New Roman" panose="02020603050405020304" pitchFamily="18" charset="0"/>
-              </a:rPr>
-              <a:t>Alzheimer’s &amp; Dementia</a:t>
-            </a:r>
-            <a:r>
-              <a:rPr lang="en-IN" dirty="0">
-                <a:latin typeface="Times New Roman" panose="02020603050405020304" pitchFamily="18" charset="0"/>
-                <a:cs typeface="Times New Roman" panose="02020603050405020304" pitchFamily="18" charset="0"/>
-              </a:rPr>
-              <a:t>. </a:t>
-            </a:r>
-            <a:r>
-              <a:rPr lang="en-IN" dirty="0">
-                <a:latin typeface="Times New Roman" panose="02020603050405020304" pitchFamily="18" charset="0"/>
-                <a:cs typeface="Times New Roman" panose="02020603050405020304" pitchFamily="18" charset="0"/>
-                <a:hlinkClick r:id="rId3"/>
-              </a:rPr>
-              <a:t>https://</a:t>
-            </a:r>
-            <a:r>
-              <a:rPr lang="en-IN" dirty="0" smtClean="0">
-                <a:latin typeface="Times New Roman" panose="02020603050405020304" pitchFamily="18" charset="0"/>
-                <a:cs typeface="Times New Roman" panose="02020603050405020304" pitchFamily="18" charset="0"/>
-                <a:hlinkClick r:id="rId3"/>
-              </a:rPr>
-              <a:t>doi.org/10.1002/alz.090685</a:t>
-            </a:r>
-            <a:endParaRPr lang="en-IN" dirty="0" smtClean="0">
-              <a:latin typeface="Times New Roman" panose="02020603050405020304" pitchFamily="18" charset="0"/>
-              <a:cs typeface="Times New Roman" panose="02020603050405020304" pitchFamily="18" charset="0"/>
-            </a:endParaRPr>
-          </a:p>
-          <a:p>
-            <a:endParaRPr lang="en-IN" dirty="0" smtClean="0">
-              <a:latin typeface="Times New Roman" panose="02020603050405020304" pitchFamily="18" charset="0"/>
-              <a:cs typeface="Times New Roman" panose="02020603050405020304" pitchFamily="18" charset="0"/>
-            </a:endParaRPr>
-          </a:p>
-          <a:p>
-            <a:pPr marL="342900" indent="-342900">
-              <a:buFont typeface="Arial" panose="020B0604020202020204" pitchFamily="34" charset="0"/>
-              <a:buChar char="•"/>
-            </a:pPr>
-            <a:r>
-              <a:rPr lang="en-IN" b="1" dirty="0">
-                <a:latin typeface="Times New Roman" panose="02020603050405020304" pitchFamily="18" charset="0"/>
-                <a:cs typeface="Times New Roman" panose="02020603050405020304" pitchFamily="18" charset="0"/>
-              </a:rPr>
-              <a:t>Huang, Y., Zhang, Y., </a:t>
-            </a:r>
-            <a:r>
-              <a:rPr lang="en-IN" b="1" dirty="0" err="1">
-                <a:latin typeface="Times New Roman" panose="02020603050405020304" pitchFamily="18" charset="0"/>
-                <a:cs typeface="Times New Roman" panose="02020603050405020304" pitchFamily="18" charset="0"/>
-              </a:rPr>
-              <a:t>Michopoulou</a:t>
-            </a:r>
-            <a:r>
-              <a:rPr lang="en-IN" b="1" dirty="0">
-                <a:latin typeface="Times New Roman" panose="02020603050405020304" pitchFamily="18" charset="0"/>
-                <a:cs typeface="Times New Roman" panose="02020603050405020304" pitchFamily="18" charset="0"/>
-              </a:rPr>
-              <a:t>, S., </a:t>
-            </a:r>
-            <a:r>
-              <a:rPr lang="en-IN" b="1" dirty="0" err="1">
-                <a:latin typeface="Times New Roman" panose="02020603050405020304" pitchFamily="18" charset="0"/>
-                <a:cs typeface="Times New Roman" panose="02020603050405020304" pitchFamily="18" charset="0"/>
-              </a:rPr>
-              <a:t>Kipps</a:t>
-            </a:r>
-            <a:r>
-              <a:rPr lang="en-IN" b="1" dirty="0">
-                <a:latin typeface="Times New Roman" panose="02020603050405020304" pitchFamily="18" charset="0"/>
-                <a:cs typeface="Times New Roman" panose="02020603050405020304" pitchFamily="18" charset="0"/>
-              </a:rPr>
-              <a:t>, C., &amp; Attar, R. (2026).</a:t>
-            </a:r>
-            <a:r>
-              <a:rPr lang="en-IN" dirty="0">
-                <a:latin typeface="Times New Roman" panose="02020603050405020304" pitchFamily="18" charset="0"/>
-                <a:cs typeface="Times New Roman" panose="02020603050405020304" pitchFamily="18" charset="0"/>
-              </a:rPr>
-              <a:t> Transition-based digital twin modelling for Alzheimer’s disease under sparse longitudinal data. </a:t>
-            </a:r>
-            <a:r>
-              <a:rPr lang="en-IN" i="1" dirty="0" err="1">
-                <a:latin typeface="Times New Roman" panose="02020603050405020304" pitchFamily="18" charset="0"/>
-                <a:cs typeface="Times New Roman" panose="02020603050405020304" pitchFamily="18" charset="0"/>
-              </a:rPr>
-              <a:t>arXiv</a:t>
-            </a:r>
-            <a:r>
-              <a:rPr lang="en-IN" i="1" dirty="0">
-                <a:latin typeface="Times New Roman" panose="02020603050405020304" pitchFamily="18" charset="0"/>
-                <a:cs typeface="Times New Roman" panose="02020603050405020304" pitchFamily="18" charset="0"/>
-              </a:rPr>
-              <a:t> preprint</a:t>
-            </a:r>
-            <a:r>
-              <a:rPr lang="en-IN" dirty="0">
-                <a:latin typeface="Times New Roman" panose="02020603050405020304" pitchFamily="18" charset="0"/>
-                <a:cs typeface="Times New Roman" panose="02020603050405020304" pitchFamily="18" charset="0"/>
-              </a:rPr>
-              <a:t>.</a:t>
-            </a:r>
-            <a:br>
-              <a:rPr lang="en-IN" dirty="0">
-                <a:latin typeface="Times New Roman" panose="02020603050405020304" pitchFamily="18" charset="0"/>
-                <a:cs typeface="Times New Roman" panose="02020603050405020304" pitchFamily="18" charset="0"/>
-              </a:rPr>
-            </a:br>
-            <a:r>
-              <a:rPr lang="en-IN" dirty="0" smtClean="0">
-                <a:latin typeface="Times New Roman" panose="02020603050405020304" pitchFamily="18" charset="0"/>
-                <a:cs typeface="Times New Roman" panose="02020603050405020304" pitchFamily="18" charset="0"/>
-              </a:rPr>
-              <a:t/>
-            </a:r>
-            <a:br>
-              <a:rPr lang="en-IN" dirty="0" smtClean="0">
-                <a:latin typeface="Times New Roman" panose="02020603050405020304" pitchFamily="18" charset="0"/>
-                <a:cs typeface="Times New Roman" panose="02020603050405020304" pitchFamily="18" charset="0"/>
-              </a:rPr>
-            </a:br>
-            <a:r>
-              <a:rPr lang="en-IN" dirty="0" smtClean="0">
-                <a:solidFill>
-                  <a:srgbClr val="222222"/>
-                </a:solidFill>
-                <a:latin typeface="Times New Roman" panose="02020603050405020304" pitchFamily="18" charset="0"/>
-                <a:cs typeface="Times New Roman" panose="02020603050405020304" pitchFamily="18" charset="0"/>
-              </a:rPr>
-              <a:t/>
-            </a:r>
-            <a:br>
-              <a:rPr lang="en-IN" dirty="0" smtClean="0">
-                <a:solidFill>
-                  <a:srgbClr val="222222"/>
-                </a:solidFill>
-                <a:latin typeface="Times New Roman" panose="02020603050405020304" pitchFamily="18" charset="0"/>
-                <a:cs typeface="Times New Roman" panose="02020603050405020304" pitchFamily="18" charset="0"/>
-              </a:rPr>
-            </a:br>
-            <a:r>
-              <a:rPr lang="en-IN" dirty="0" smtClean="0">
-                <a:solidFill>
-                  <a:srgbClr val="222222"/>
-                </a:solidFill>
-                <a:latin typeface="Times New Roman" panose="02020603050405020304" pitchFamily="18" charset="0"/>
-                <a:cs typeface="Times New Roman" panose="02020603050405020304" pitchFamily="18" charset="0"/>
-              </a:rPr>
-              <a:t/>
-            </a:r>
-            <a:br>
-              <a:rPr lang="en-IN" dirty="0" smtClean="0">
-                <a:solidFill>
-                  <a:srgbClr val="222222"/>
-                </a:solidFill>
-                <a:latin typeface="Times New Roman" panose="02020603050405020304" pitchFamily="18" charset="0"/>
-                <a:cs typeface="Times New Roman" panose="02020603050405020304" pitchFamily="18" charset="0"/>
-              </a:rPr>
-            </a:br>
-            <a:endParaRPr lang="en-IN" dirty="0">
-              <a:latin typeface="Times New Roman" panose="02020603050405020304" pitchFamily="18" charset="0"/>
-              <a:cs typeface="Times New Roman" panose="02020603050405020304" pitchFamily="18" charset="0"/>
-            </a:endParaRPr>
-          </a:p>
-        </p:txBody>
-      </p:sp>
-    </p:spTree>
-    <p:extLst>
-      <p:ext uri="{BB962C8B-B14F-4D97-AF65-F5344CB8AC3E}">
-        <p14:creationId xmlns:p14="http://schemas.microsoft.com/office/powerpoint/2010/main" val="1268385975"/>
-      </p:ext>
-    </p:extLst>
-  </p:cSld>
-  <p:clrMapOvr>
-    <a:masterClrMapping/>
-  </p:clrMapOvr>
-  <p:timing>
-    <p:tnLst>
-      <p:par>
-        <p:cTn id="1" dur="indefinite" restart="never" nodeType="tmRoot"/>
-      </p:par>
-    </p:tnLst>
-  </p:timing>
-</p:sld>
-</file>
-
-<file path=ppt/slides/slide17.xml><?xml version="1.0" encoding="utf-8"?>
-<p:sld xmlns:a="http://schemas.openxmlformats.org/drawingml/2006/main" xmlns:r="http://schemas.openxmlformats.org/officeDocument/2006/relationships" xmlns:p="http://schemas.openxmlformats.org/presentationml/2006/main">
-  <p:cSld>
-    <p:spTree>
-      <p:nvGrpSpPr>
-        <p:cNvPr id="1" name=""/>
-        <p:cNvGrpSpPr/>
-        <p:nvPr/>
-      </p:nvGrpSpPr>
-      <p:grpSpPr>
-        <a:xfrm>
-          <a:off x="0" y="0"/>
-          <a:ext cx="0" cy="0"/>
-          <a:chOff x="0" y="0"/>
-          <a:chExt cx="0" cy="0"/>
-        </a:xfrm>
-      </p:grpSpPr>
-      <p:sp>
-        <p:nvSpPr>
-          <p:cNvPr id="2" name="Title 1"/>
-          <p:cNvSpPr>
-            <a:spLocks noGrp="1"/>
-          </p:cNvSpPr>
-          <p:nvPr>
-            <p:ph type="title"/>
-          </p:nvPr>
-        </p:nvSpPr>
-        <p:spPr>
-          <a:xfrm>
-            <a:off x="640080" y="2819401"/>
-            <a:ext cx="11521440" cy="1219200"/>
-          </a:xfrm>
-        </p:spPr>
-        <p:txBody>
-          <a:bodyPr>
-            <a:normAutofit fontScale="90000"/>
-          </a:bodyPr>
-          <a:lstStyle/>
-          <a:p>
-            <a:r>
-              <a:rPr lang="en-US" sz="10000" b="1" dirty="0">
-                <a:solidFill>
-                  <a:schemeClr val="tx2">
-                    <a:lumMod val="60000"/>
-                    <a:lumOff val="40000"/>
-                  </a:schemeClr>
-                </a:solidFill>
-                <a:latin typeface="Times New Roman" pitchFamily="18" charset="0"/>
-                <a:cs typeface="Times New Roman" pitchFamily="18" charset="0"/>
-              </a:rPr>
-              <a:t>Thank You</a:t>
-            </a:r>
-          </a:p>
-        </p:txBody>
-      </p:sp>
-      <p:sp>
-        <p:nvSpPr>
-          <p:cNvPr id="3" name="Slide Number Placeholder 2"/>
-          <p:cNvSpPr>
-            <a:spLocks noGrp="1"/>
-          </p:cNvSpPr>
-          <p:nvPr>
-            <p:ph type="sldNum" sz="quarter" idx="12"/>
-          </p:nvPr>
-        </p:nvSpPr>
-        <p:spPr/>
-        <p:txBody>
-          <a:bodyPr/>
-          <a:lstStyle/>
-          <a:p>
-            <a:fld id="{C02A2637-A5A3-49FA-B214-6E67543099EF}" type="slidenum">
-              <a:rPr lang="en-US" smtClean="0"/>
-              <a:t>17</a:t>
-            </a:fld>
-            <a:endParaRPr lang="en-US"/>
-          </a:p>
-        </p:txBody>
-      </p:sp>
-    </p:spTree>
-    <p:extLst>
-      <p:ext uri="{BB962C8B-B14F-4D97-AF65-F5344CB8AC3E}">
-        <p14:creationId xmlns:p14="http://schemas.microsoft.com/office/powerpoint/2010/main" val="2750398038"/>
       </p:ext>
     </p:extLst>
   </p:cSld>
@@ -8835,7 +11590,7 @@
         </p:spPr>
         <p:txBody>
           <a:bodyPr vert="horz" lIns="114945" tIns="57473" rIns="114945" bIns="57473" rtlCol="0">
-            <a:normAutofit/>
+            <a:normAutofit fontScale="85000" lnSpcReduction="20000"/>
           </a:bodyPr>
           <a:lstStyle>
             <a:lvl1pPr marL="431044" indent="-431044" algn="l" defTabSz="1149448" rtl="0" eaLnBrk="1" latinLnBrk="0" hangingPunct="1">
@@ -9080,6 +11835,71 @@
               </a:rPr>
               <a:t>ARCHITECTURE</a:t>
             </a:r>
+          </a:p>
+          <a:p>
+            <a:pPr fontAlgn="ctr">
+              <a:buFont typeface="Wingdings" panose="05000000000000000000" pitchFamily="2" charset="2"/>
+              <a:buChar char="v"/>
+            </a:pPr>
+            <a:r>
+              <a:rPr lang="en-US" sz="2800" dirty="0" smtClean="0">
+                <a:latin typeface="Times New Roman" panose="02020603050405020304" pitchFamily="18" charset="0"/>
+                <a:cs typeface="Times New Roman" panose="02020603050405020304" pitchFamily="18" charset="0"/>
+              </a:rPr>
+              <a:t>DATASET DESCRIPTION</a:t>
+            </a:r>
+          </a:p>
+          <a:p>
+            <a:pPr fontAlgn="ctr">
+              <a:buFont typeface="Wingdings" panose="05000000000000000000" pitchFamily="2" charset="2"/>
+              <a:buChar char="v"/>
+            </a:pPr>
+            <a:r>
+              <a:rPr lang="en-US" sz="2800" dirty="0" smtClean="0">
+                <a:latin typeface="Times New Roman" panose="02020603050405020304" pitchFamily="18" charset="0"/>
+                <a:cs typeface="Times New Roman" panose="02020603050405020304" pitchFamily="18" charset="0"/>
+              </a:rPr>
+              <a:t>MODULES DESCRIPTION</a:t>
+            </a:r>
+          </a:p>
+          <a:p>
+            <a:pPr fontAlgn="ctr">
+              <a:buFont typeface="Wingdings" panose="05000000000000000000" pitchFamily="2" charset="2"/>
+              <a:buChar char="v"/>
+            </a:pPr>
+            <a:r>
+              <a:rPr lang="en-US" sz="2800" dirty="0" smtClean="0">
+                <a:latin typeface="Times New Roman" panose="02020603050405020304" pitchFamily="18" charset="0"/>
+                <a:cs typeface="Times New Roman" panose="02020603050405020304" pitchFamily="18" charset="0"/>
+              </a:rPr>
+              <a:t>IMPLEMENTATION</a:t>
+            </a:r>
+          </a:p>
+          <a:p>
+            <a:pPr fontAlgn="ctr">
+              <a:buFont typeface="Wingdings" panose="05000000000000000000" pitchFamily="2" charset="2"/>
+              <a:buChar char="v"/>
+            </a:pPr>
+            <a:r>
+              <a:rPr lang="en-US" sz="2800" dirty="0" smtClean="0">
+                <a:latin typeface="Times New Roman" panose="02020603050405020304" pitchFamily="18" charset="0"/>
+                <a:cs typeface="Times New Roman" panose="02020603050405020304" pitchFamily="18" charset="0"/>
+              </a:rPr>
+              <a:t>EVALUATION METRICS &amp; RESULTS</a:t>
+            </a:r>
+          </a:p>
+          <a:p>
+            <a:pPr fontAlgn="ctr">
+              <a:buFont typeface="Wingdings" panose="05000000000000000000" pitchFamily="2" charset="2"/>
+              <a:buChar char="v"/>
+            </a:pPr>
+            <a:r>
+              <a:rPr lang="en-US" sz="2800" dirty="0" smtClean="0">
+                <a:latin typeface="Times New Roman" panose="02020603050405020304" pitchFamily="18" charset="0"/>
+                <a:cs typeface="Times New Roman" panose="02020603050405020304" pitchFamily="18" charset="0"/>
+              </a:rPr>
+              <a:t>GUIDE APPROVAL</a:t>
+            </a:r>
             <a:endParaRPr lang="en-US" sz="2800" dirty="0">
               <a:latin typeface="Times New Roman" panose="02020603050405020304" pitchFamily="18" charset="0"/>
               <a:cs typeface="Times New Roman" panose="02020603050405020304" pitchFamily="18" charset="0"/>
@@ -9104,12 +11924,32 @@
               <a:buChar char="v"/>
             </a:pPr>
             <a:r>
-              <a:rPr lang="en-US" sz="2800" dirty="0">
+              <a:rPr lang="en-US" sz="2800" dirty="0" smtClean="0">
                 <a:latin typeface="Times New Roman" panose="02020603050405020304" pitchFamily="18" charset="0"/>
                 <a:cs typeface="Times New Roman" panose="02020603050405020304" pitchFamily="18" charset="0"/>
               </a:rPr>
               <a:t>REFERENCES</a:t>
             </a:r>
+          </a:p>
+          <a:p>
+            <a:pPr fontAlgn="ctr">
+              <a:buFont typeface="Wingdings" panose="05000000000000000000" pitchFamily="2" charset="2"/>
+              <a:buChar char="v"/>
+            </a:pPr>
+            <a:endParaRPr lang="en-US" sz="2800" dirty="0" smtClean="0">
+              <a:latin typeface="Times New Roman" panose="02020603050405020304" pitchFamily="18" charset="0"/>
+              <a:cs typeface="Times New Roman" panose="02020603050405020304" pitchFamily="18" charset="0"/>
+            </a:endParaRPr>
+          </a:p>
+          <a:p>
+            <a:pPr fontAlgn="ctr">
+              <a:buFont typeface="Wingdings" panose="05000000000000000000" pitchFamily="2" charset="2"/>
+              <a:buChar char="v"/>
+            </a:pPr>
+            <a:endParaRPr lang="en-US" sz="2800" dirty="0">
+              <a:latin typeface="Times New Roman" panose="02020603050405020304" pitchFamily="18" charset="0"/>
+              <a:cs typeface="Times New Roman" panose="02020603050405020304" pitchFamily="18" charset="0"/>
+            </a:endParaRPr>
           </a:p>
         </p:txBody>
       </p:sp>
@@ -9117,6 +11957,989 @@
     <p:extLst>
       <p:ext uri="{BB962C8B-B14F-4D97-AF65-F5344CB8AC3E}">
         <p14:creationId xmlns:p14="http://schemas.microsoft.com/office/powerpoint/2010/main" val="2490154017"/>
+      </p:ext>
+    </p:extLst>
+  </p:cSld>
+  <p:clrMapOvr>
+    <a:masterClrMapping/>
+  </p:clrMapOvr>
+  <p:timing>
+    <p:tnLst>
+      <p:par>
+        <p:cTn id="1" dur="indefinite" restart="never" nodeType="tmRoot"/>
+      </p:par>
+    </p:tnLst>
+  </p:timing>
+</p:sld>
+</file>
+
+<file path=ppt/slides/slide20.xml><?xml version="1.0" encoding="utf-8"?>
+<p:sld xmlns:a="http://schemas.openxmlformats.org/drawingml/2006/main" xmlns:r="http://schemas.openxmlformats.org/officeDocument/2006/relationships" xmlns:p="http://schemas.openxmlformats.org/presentationml/2006/main">
+  <p:cSld>
+    <p:spTree>
+      <p:nvGrpSpPr>
+        <p:cNvPr id="1" name=""/>
+        <p:cNvGrpSpPr/>
+        <p:nvPr/>
+      </p:nvGrpSpPr>
+      <p:grpSpPr>
+        <a:xfrm>
+          <a:off x="0" y="0"/>
+          <a:ext cx="0" cy="0"/>
+          <a:chOff x="0" y="0"/>
+          <a:chExt cx="0" cy="0"/>
+        </a:xfrm>
+      </p:grpSpPr>
+      <p:sp>
+        <p:nvSpPr>
+          <p:cNvPr id="2" name="Title 1"/>
+          <p:cNvSpPr>
+            <a:spLocks noGrp="1"/>
+          </p:cNvSpPr>
+          <p:nvPr>
+            <p:ph type="title"/>
+          </p:nvPr>
+        </p:nvSpPr>
+        <p:spPr>
+          <a:solidFill>
+            <a:srgbClr val="558ED5"/>
+          </a:solidFill>
+        </p:spPr>
+        <p:txBody>
+          <a:bodyPr>
+            <a:normAutofit/>
+          </a:bodyPr>
+          <a:lstStyle/>
+          <a:p>
+            <a:r>
+              <a:rPr lang="en-US" sz="3700" b="1" dirty="0">
+                <a:solidFill>
+                  <a:schemeClr val="bg1"/>
+                </a:solidFill>
+                <a:latin typeface="Times New Roman" pitchFamily="18" charset="0"/>
+                <a:cs typeface="Times New Roman" pitchFamily="18" charset="0"/>
+              </a:rPr>
+              <a:t>REFERENCES (CONTD</a:t>
+            </a:r>
+            <a:r>
+              <a:rPr lang="en-US" sz="3700" b="1" dirty="0" smtClean="0">
+                <a:solidFill>
+                  <a:schemeClr val="bg1"/>
+                </a:solidFill>
+                <a:latin typeface="Times New Roman" pitchFamily="18" charset="0"/>
+                <a:cs typeface="Times New Roman" pitchFamily="18" charset="0"/>
+              </a:rPr>
+              <a:t>..)</a:t>
+            </a:r>
+            <a:endParaRPr lang="en-US" sz="3700" b="1" dirty="0">
+              <a:solidFill>
+                <a:schemeClr val="bg1"/>
+              </a:solidFill>
+              <a:latin typeface="Times New Roman" pitchFamily="18" charset="0"/>
+              <a:cs typeface="Times New Roman" pitchFamily="18" charset="0"/>
+            </a:endParaRPr>
+          </a:p>
+        </p:txBody>
+      </p:sp>
+      <p:sp>
+        <p:nvSpPr>
+          <p:cNvPr id="4" name="Slide Number Placeholder 3"/>
+          <p:cNvSpPr>
+            <a:spLocks noGrp="1"/>
+          </p:cNvSpPr>
+          <p:nvPr>
+            <p:ph type="sldNum" sz="quarter" idx="12"/>
+          </p:nvPr>
+        </p:nvSpPr>
+        <p:spPr/>
+        <p:txBody>
+          <a:bodyPr/>
+          <a:lstStyle/>
+          <a:p>
+            <a:fld id="{C02A2637-A5A3-49FA-B214-6E67543099EF}" type="slidenum">
+              <a:rPr lang="en-US" smtClean="0"/>
+              <a:t>20</a:t>
+            </a:fld>
+            <a:endParaRPr lang="en-US" dirty="0"/>
+          </a:p>
+        </p:txBody>
+      </p:sp>
+      <p:sp>
+        <p:nvSpPr>
+          <p:cNvPr id="3" name="Rectangle 2"/>
+          <p:cNvSpPr/>
+          <p:nvPr/>
+        </p:nvSpPr>
+        <p:spPr>
+          <a:xfrm>
+            <a:off x="640080" y="1628503"/>
+            <a:ext cx="11521440" cy="5401479"/>
+          </a:xfrm>
+          <a:prstGeom prst="rect">
+            <a:avLst/>
+          </a:prstGeom>
+        </p:spPr>
+        <p:txBody>
+          <a:bodyPr wrap="square">
+            <a:spAutoFit/>
+          </a:bodyPr>
+          <a:lstStyle/>
+          <a:p>
+            <a:pPr marL="342900" indent="-342900">
+              <a:buFont typeface="Arial" panose="020B0604020202020204" pitchFamily="34" charset="0"/>
+              <a:buChar char="•"/>
+            </a:pPr>
+            <a:r>
+              <a:rPr lang="en-US" b="1" dirty="0" err="1">
+                <a:latin typeface="Times New Roman" panose="02020603050405020304" pitchFamily="18" charset="0"/>
+                <a:cs typeface="Times New Roman" panose="02020603050405020304" pitchFamily="18" charset="0"/>
+              </a:rPr>
+              <a:t>Abrol</a:t>
+            </a:r>
+            <a:r>
+              <a:rPr lang="en-US" b="1" dirty="0">
+                <a:latin typeface="Times New Roman" panose="02020603050405020304" pitchFamily="18" charset="0"/>
+                <a:cs typeface="Times New Roman" panose="02020603050405020304" pitchFamily="18" charset="0"/>
+              </a:rPr>
+              <a:t>, A., </a:t>
+            </a:r>
+            <a:r>
+              <a:rPr lang="en-US" b="1" dirty="0" err="1">
+                <a:latin typeface="Times New Roman" panose="02020603050405020304" pitchFamily="18" charset="0"/>
+                <a:cs typeface="Times New Roman" panose="02020603050405020304" pitchFamily="18" charset="0"/>
+              </a:rPr>
+              <a:t>Bhattarai</a:t>
+            </a:r>
+            <a:r>
+              <a:rPr lang="en-US" b="1" dirty="0">
+                <a:latin typeface="Times New Roman" panose="02020603050405020304" pitchFamily="18" charset="0"/>
+                <a:cs typeface="Times New Roman" panose="02020603050405020304" pitchFamily="18" charset="0"/>
+              </a:rPr>
+              <a:t>, M., </a:t>
+            </a:r>
+            <a:r>
+              <a:rPr lang="en-US" b="1" dirty="0" err="1">
+                <a:latin typeface="Times New Roman" panose="02020603050405020304" pitchFamily="18" charset="0"/>
+                <a:cs typeface="Times New Roman" panose="02020603050405020304" pitchFamily="18" charset="0"/>
+              </a:rPr>
+              <a:t>Fedorov</a:t>
+            </a:r>
+            <a:r>
+              <a:rPr lang="en-US" b="1" dirty="0">
+                <a:latin typeface="Times New Roman" panose="02020603050405020304" pitchFamily="18" charset="0"/>
+                <a:cs typeface="Times New Roman" panose="02020603050405020304" pitchFamily="18" charset="0"/>
+              </a:rPr>
+              <a:t>, A., et al. (2020).</a:t>
+            </a:r>
+            <a:r>
+              <a:rPr lang="en-US" dirty="0">
+                <a:latin typeface="Times New Roman" panose="02020603050405020304" pitchFamily="18" charset="0"/>
+                <a:cs typeface="Times New Roman" panose="02020603050405020304" pitchFamily="18" charset="0"/>
+              </a:rPr>
+              <a:t> Deep residual learning for neuroimaging: An application to predict progression to Alzheimer’s disease. </a:t>
+            </a:r>
+            <a:r>
+              <a:rPr lang="en-US" i="1" dirty="0">
+                <a:latin typeface="Times New Roman" panose="02020603050405020304" pitchFamily="18" charset="0"/>
+                <a:cs typeface="Times New Roman" panose="02020603050405020304" pitchFamily="18" charset="0"/>
+              </a:rPr>
+              <a:t>Journal of Neuroscience Methods, 339</a:t>
+            </a:r>
+            <a:r>
+              <a:rPr lang="en-US" dirty="0">
+                <a:latin typeface="Times New Roman" panose="02020603050405020304" pitchFamily="18" charset="0"/>
+                <a:cs typeface="Times New Roman" panose="02020603050405020304" pitchFamily="18" charset="0"/>
+              </a:rPr>
+              <a:t>, 108701. </a:t>
+            </a:r>
+            <a:r>
+              <a:rPr lang="en-US" dirty="0">
+                <a:latin typeface="Times New Roman" panose="02020603050405020304" pitchFamily="18" charset="0"/>
+                <a:cs typeface="Times New Roman" panose="02020603050405020304" pitchFamily="18" charset="0"/>
+                <a:hlinkClick r:id="rId2"/>
+              </a:rPr>
+              <a:t>https://</a:t>
+            </a:r>
+            <a:r>
+              <a:rPr lang="en-US" dirty="0" smtClean="0">
+                <a:latin typeface="Times New Roman" panose="02020603050405020304" pitchFamily="18" charset="0"/>
+                <a:cs typeface="Times New Roman" panose="02020603050405020304" pitchFamily="18" charset="0"/>
+                <a:hlinkClick r:id="rId2"/>
+              </a:rPr>
+              <a:t>doi.org/10.1016/j.jneumeth.2020.108701</a:t>
+            </a:r>
+            <a:r>
+              <a:rPr lang="en-US" dirty="0" smtClean="0">
+                <a:latin typeface="Times New Roman" panose="02020603050405020304" pitchFamily="18" charset="0"/>
+                <a:cs typeface="Times New Roman" panose="02020603050405020304" pitchFamily="18" charset="0"/>
+              </a:rPr>
+              <a:t/>
+            </a:r>
+            <a:br>
+              <a:rPr lang="en-US" dirty="0" smtClean="0">
+                <a:latin typeface="Times New Roman" panose="02020603050405020304" pitchFamily="18" charset="0"/>
+                <a:cs typeface="Times New Roman" panose="02020603050405020304" pitchFamily="18" charset="0"/>
+              </a:rPr>
+            </a:br>
+            <a:endParaRPr lang="en-IN" dirty="0" smtClean="0">
+              <a:latin typeface="Times New Roman" panose="02020603050405020304" pitchFamily="18" charset="0"/>
+              <a:cs typeface="Times New Roman" panose="02020603050405020304" pitchFamily="18" charset="0"/>
+            </a:endParaRPr>
+          </a:p>
+          <a:p>
+            <a:pPr marL="342900" indent="-342900">
+              <a:buFont typeface="Arial" panose="020B0604020202020204" pitchFamily="34" charset="0"/>
+              <a:buChar char="•"/>
+            </a:pPr>
+            <a:r>
+              <a:rPr lang="en-IN" b="1" dirty="0" err="1">
+                <a:latin typeface="Times New Roman" panose="02020603050405020304" pitchFamily="18" charset="0"/>
+                <a:cs typeface="Times New Roman" panose="02020603050405020304" pitchFamily="18" charset="0"/>
+              </a:rPr>
+              <a:t>Venugopalan</a:t>
+            </a:r>
+            <a:r>
+              <a:rPr lang="en-IN" b="1" dirty="0">
+                <a:latin typeface="Times New Roman" panose="02020603050405020304" pitchFamily="18" charset="0"/>
+                <a:cs typeface="Times New Roman" panose="02020603050405020304" pitchFamily="18" charset="0"/>
+              </a:rPr>
+              <a:t>, J., Tong, L., </a:t>
+            </a:r>
+            <a:r>
+              <a:rPr lang="en-IN" b="1" dirty="0" err="1">
+                <a:latin typeface="Times New Roman" panose="02020603050405020304" pitchFamily="18" charset="0"/>
+                <a:cs typeface="Times New Roman" panose="02020603050405020304" pitchFamily="18" charset="0"/>
+              </a:rPr>
+              <a:t>Hassanzadeh</a:t>
+            </a:r>
+            <a:r>
+              <a:rPr lang="en-IN" b="1" dirty="0">
+                <a:latin typeface="Times New Roman" panose="02020603050405020304" pitchFamily="18" charset="0"/>
+                <a:cs typeface="Times New Roman" panose="02020603050405020304" pitchFamily="18" charset="0"/>
+              </a:rPr>
+              <a:t>, H. R., &amp; Wang, M. D. (2021).</a:t>
+            </a:r>
+            <a:r>
+              <a:rPr lang="en-IN" dirty="0">
+                <a:latin typeface="Times New Roman" panose="02020603050405020304" pitchFamily="18" charset="0"/>
+                <a:cs typeface="Times New Roman" panose="02020603050405020304" pitchFamily="18" charset="0"/>
+              </a:rPr>
+              <a:t> Multimodal deep learning models for early detection of Alzheimer’s disease stage. </a:t>
+            </a:r>
+            <a:r>
+              <a:rPr lang="en-IN" i="1" dirty="0">
+                <a:latin typeface="Times New Roman" panose="02020603050405020304" pitchFamily="18" charset="0"/>
+                <a:cs typeface="Times New Roman" panose="02020603050405020304" pitchFamily="18" charset="0"/>
+              </a:rPr>
+              <a:t>Scientific Reports, 11</a:t>
+            </a:r>
+            <a:r>
+              <a:rPr lang="en-IN" dirty="0">
+                <a:latin typeface="Times New Roman" panose="02020603050405020304" pitchFamily="18" charset="0"/>
+                <a:cs typeface="Times New Roman" panose="02020603050405020304" pitchFamily="18" charset="0"/>
+              </a:rPr>
+              <a:t>, 3254</a:t>
+            </a:r>
+            <a:r>
+              <a:rPr lang="en-IN" dirty="0" smtClean="0">
+                <a:latin typeface="Times New Roman" panose="02020603050405020304" pitchFamily="18" charset="0"/>
+                <a:cs typeface="Times New Roman" panose="02020603050405020304" pitchFamily="18" charset="0"/>
+              </a:rPr>
+              <a:t>.</a:t>
+            </a:r>
+            <a:br>
+              <a:rPr lang="en-IN" dirty="0" smtClean="0">
+                <a:latin typeface="Times New Roman" panose="02020603050405020304" pitchFamily="18" charset="0"/>
+                <a:cs typeface="Times New Roman" panose="02020603050405020304" pitchFamily="18" charset="0"/>
+              </a:rPr>
+            </a:br>
+            <a:r>
+              <a:rPr lang="en-IN" dirty="0" smtClean="0">
+                <a:latin typeface="Times New Roman" panose="02020603050405020304" pitchFamily="18" charset="0"/>
+                <a:cs typeface="Times New Roman" panose="02020603050405020304" pitchFamily="18" charset="0"/>
+                <a:hlinkClick r:id="rId3"/>
+              </a:rPr>
+              <a:t>https</a:t>
+            </a:r>
+            <a:r>
+              <a:rPr lang="en-IN" dirty="0">
+                <a:latin typeface="Times New Roman" panose="02020603050405020304" pitchFamily="18" charset="0"/>
+                <a:cs typeface="Times New Roman" panose="02020603050405020304" pitchFamily="18" charset="0"/>
+                <a:hlinkClick r:id="rId3"/>
+              </a:rPr>
+              <a:t>://</a:t>
+            </a:r>
+            <a:r>
+              <a:rPr lang="en-IN" dirty="0" smtClean="0">
+                <a:latin typeface="Times New Roman" panose="02020603050405020304" pitchFamily="18" charset="0"/>
+                <a:cs typeface="Times New Roman" panose="02020603050405020304" pitchFamily="18" charset="0"/>
+                <a:hlinkClick r:id="rId3"/>
+              </a:rPr>
+              <a:t>doi.org/10.1038/s41598-020-74399-w</a:t>
+            </a:r>
+            <a:r>
+              <a:rPr lang="en-IN" dirty="0" smtClean="0">
+                <a:latin typeface="Times New Roman" panose="02020603050405020304" pitchFamily="18" charset="0"/>
+                <a:cs typeface="Times New Roman" panose="02020603050405020304" pitchFamily="18" charset="0"/>
+              </a:rPr>
+              <a:t/>
+            </a:r>
+            <a:br>
+              <a:rPr lang="en-IN" dirty="0" smtClean="0">
+                <a:latin typeface="Times New Roman" panose="02020603050405020304" pitchFamily="18" charset="0"/>
+                <a:cs typeface="Times New Roman" panose="02020603050405020304" pitchFamily="18" charset="0"/>
+              </a:rPr>
+            </a:br>
+            <a:endParaRPr lang="en-IN" dirty="0">
+              <a:latin typeface="Times New Roman" panose="02020603050405020304" pitchFamily="18" charset="0"/>
+              <a:cs typeface="Times New Roman" panose="02020603050405020304" pitchFamily="18" charset="0"/>
+            </a:endParaRPr>
+          </a:p>
+          <a:p>
+            <a:pPr marL="342900" indent="-342900">
+              <a:buFont typeface="Arial" panose="020B0604020202020204" pitchFamily="34" charset="0"/>
+              <a:buChar char="•"/>
+            </a:pPr>
+            <a:r>
+              <a:rPr lang="en-IN" b="1" dirty="0" err="1">
+                <a:latin typeface="Times New Roman" panose="02020603050405020304" pitchFamily="18" charset="0"/>
+                <a:cs typeface="Times New Roman" panose="02020603050405020304" pitchFamily="18" charset="0"/>
+              </a:rPr>
+              <a:t>Aghaei</a:t>
+            </a:r>
+            <a:r>
+              <a:rPr lang="en-IN" b="1" dirty="0">
+                <a:latin typeface="Times New Roman" panose="02020603050405020304" pitchFamily="18" charset="0"/>
+                <a:cs typeface="Times New Roman" panose="02020603050405020304" pitchFamily="18" charset="0"/>
+              </a:rPr>
+              <a:t>, A., &amp; </a:t>
+            </a:r>
+            <a:r>
+              <a:rPr lang="en-IN" b="1" dirty="0" err="1">
+                <a:latin typeface="Times New Roman" panose="02020603050405020304" pitchFamily="18" charset="0"/>
+                <a:cs typeface="Times New Roman" panose="02020603050405020304" pitchFamily="18" charset="0"/>
+              </a:rPr>
+              <a:t>Ebrahimi</a:t>
+            </a:r>
+            <a:r>
+              <a:rPr lang="en-IN" b="1" dirty="0">
+                <a:latin typeface="Times New Roman" panose="02020603050405020304" pitchFamily="18" charset="0"/>
+                <a:cs typeface="Times New Roman" panose="02020603050405020304" pitchFamily="18" charset="0"/>
+              </a:rPr>
+              <a:t> </a:t>
+            </a:r>
+            <a:r>
+              <a:rPr lang="en-IN" b="1" dirty="0" err="1">
+                <a:latin typeface="Times New Roman" panose="02020603050405020304" pitchFamily="18" charset="0"/>
+                <a:cs typeface="Times New Roman" panose="02020603050405020304" pitchFamily="18" charset="0"/>
+              </a:rPr>
+              <a:t>Moghaddam</a:t>
+            </a:r>
+            <a:r>
+              <a:rPr lang="en-IN" b="1" dirty="0">
+                <a:latin typeface="Times New Roman" panose="02020603050405020304" pitchFamily="18" charset="0"/>
+                <a:cs typeface="Times New Roman" panose="02020603050405020304" pitchFamily="18" charset="0"/>
+              </a:rPr>
+              <a:t>, M. (2023).</a:t>
+            </a:r>
+            <a:r>
+              <a:rPr lang="en-IN" dirty="0">
+                <a:latin typeface="Times New Roman" panose="02020603050405020304" pitchFamily="18" charset="0"/>
+                <a:cs typeface="Times New Roman" panose="02020603050405020304" pitchFamily="18" charset="0"/>
+              </a:rPr>
+              <a:t> Smart ROI detection for Alzheimer’s disease prediction using explainable AI. </a:t>
+            </a:r>
+            <a:r>
+              <a:rPr lang="en-IN" i="1" dirty="0">
+                <a:latin typeface="Times New Roman" panose="02020603050405020304" pitchFamily="18" charset="0"/>
+                <a:cs typeface="Times New Roman" panose="02020603050405020304" pitchFamily="18" charset="0"/>
+              </a:rPr>
+              <a:t>[Preprint]</a:t>
+            </a:r>
+            <a:r>
+              <a:rPr lang="en-IN" dirty="0">
+                <a:latin typeface="Times New Roman" panose="02020603050405020304" pitchFamily="18" charset="0"/>
+                <a:cs typeface="Times New Roman" panose="02020603050405020304" pitchFamily="18" charset="0"/>
+              </a:rPr>
+              <a:t>. </a:t>
+            </a:r>
+            <a:r>
+              <a:rPr lang="en-IN" dirty="0" smtClean="0">
+                <a:latin typeface="Times New Roman" panose="02020603050405020304" pitchFamily="18" charset="0"/>
+                <a:cs typeface="Times New Roman" panose="02020603050405020304" pitchFamily="18" charset="0"/>
+              </a:rPr>
+              <a:t/>
+            </a:r>
+            <a:br>
+              <a:rPr lang="en-IN" dirty="0" smtClean="0">
+                <a:latin typeface="Times New Roman" panose="02020603050405020304" pitchFamily="18" charset="0"/>
+                <a:cs typeface="Times New Roman" panose="02020603050405020304" pitchFamily="18" charset="0"/>
+              </a:rPr>
+            </a:br>
+            <a:endParaRPr lang="en-US" dirty="0">
+              <a:latin typeface="Times New Roman" panose="02020603050405020304" pitchFamily="18" charset="0"/>
+              <a:cs typeface="Times New Roman" panose="02020603050405020304" pitchFamily="18" charset="0"/>
+            </a:endParaRPr>
+          </a:p>
+          <a:p>
+            <a:pPr marL="342900" indent="-342900">
+              <a:buFont typeface="Arial" panose="020B0604020202020204" pitchFamily="34" charset="0"/>
+              <a:buChar char="•"/>
+            </a:pPr>
+            <a:r>
+              <a:rPr lang="en-US" b="1" dirty="0" err="1">
+                <a:latin typeface="Times New Roman" panose="02020603050405020304" pitchFamily="18" charset="0"/>
+                <a:cs typeface="Times New Roman" panose="02020603050405020304" pitchFamily="18" charset="0"/>
+              </a:rPr>
+              <a:t>Geng</a:t>
+            </a:r>
+            <a:r>
+              <a:rPr lang="en-US" b="1" dirty="0">
+                <a:latin typeface="Times New Roman" panose="02020603050405020304" pitchFamily="18" charset="0"/>
+                <a:cs typeface="Times New Roman" panose="02020603050405020304" pitchFamily="18" charset="0"/>
+              </a:rPr>
+              <a:t>, Y., &amp; Zhang, H. (2026).</a:t>
+            </a:r>
+            <a:r>
+              <a:rPr lang="en-US" dirty="0">
+                <a:latin typeface="Times New Roman" panose="02020603050405020304" pitchFamily="18" charset="0"/>
+                <a:cs typeface="Times New Roman" panose="02020603050405020304" pitchFamily="18" charset="0"/>
+              </a:rPr>
+              <a:t> Machine-learning prediction and risk stratification of 12-month cognitive decline in Alzheimer’s disease using routine clinical and MRI data. </a:t>
+            </a:r>
+            <a:r>
+              <a:rPr lang="en-US" i="1" dirty="0">
+                <a:latin typeface="Times New Roman" panose="02020603050405020304" pitchFamily="18" charset="0"/>
+                <a:cs typeface="Times New Roman" panose="02020603050405020304" pitchFamily="18" charset="0"/>
+              </a:rPr>
+              <a:t>Scientific Reports, 16</a:t>
+            </a:r>
+            <a:r>
+              <a:rPr lang="en-US" dirty="0">
+                <a:latin typeface="Times New Roman" panose="02020603050405020304" pitchFamily="18" charset="0"/>
+                <a:cs typeface="Times New Roman" panose="02020603050405020304" pitchFamily="18" charset="0"/>
+              </a:rPr>
+              <a:t>, 12227. https://doi.org/10.1038/s41598-026-43321-1</a:t>
+            </a:r>
+            <a:r>
+              <a:rPr lang="en-US" dirty="0" smtClean="0">
+                <a:latin typeface="Times New Roman" panose="02020603050405020304" pitchFamily="18" charset="0"/>
+                <a:cs typeface="Times New Roman" panose="02020603050405020304" pitchFamily="18" charset="0"/>
+              </a:rPr>
+              <a:t/>
+            </a:r>
+            <a:br>
+              <a:rPr lang="en-US" dirty="0" smtClean="0">
+                <a:latin typeface="Times New Roman" panose="02020603050405020304" pitchFamily="18" charset="0"/>
+                <a:cs typeface="Times New Roman" panose="02020603050405020304" pitchFamily="18" charset="0"/>
+              </a:rPr>
+            </a:br>
+            <a:endParaRPr lang="en-IN" dirty="0">
+              <a:latin typeface="Times New Roman" panose="02020603050405020304" pitchFamily="18" charset="0"/>
+              <a:cs typeface="Times New Roman" panose="02020603050405020304" pitchFamily="18" charset="0"/>
+            </a:endParaRPr>
+          </a:p>
+        </p:txBody>
+      </p:sp>
+    </p:spTree>
+    <p:extLst>
+      <p:ext uri="{BB962C8B-B14F-4D97-AF65-F5344CB8AC3E}">
+        <p14:creationId xmlns:p14="http://schemas.microsoft.com/office/powerpoint/2010/main" val="365677003"/>
+      </p:ext>
+    </p:extLst>
+  </p:cSld>
+  <p:clrMapOvr>
+    <a:masterClrMapping/>
+  </p:clrMapOvr>
+  <p:timing>
+    <p:tnLst>
+      <p:par>
+        <p:cTn id="1" dur="indefinite" restart="never" nodeType="tmRoot"/>
+      </p:par>
+    </p:tnLst>
+  </p:timing>
+</p:sld>
+</file>
+
+<file path=ppt/slides/slide21.xml><?xml version="1.0" encoding="utf-8"?>
+<p:sld xmlns:a="http://schemas.openxmlformats.org/drawingml/2006/main" xmlns:r="http://schemas.openxmlformats.org/officeDocument/2006/relationships" xmlns:p="http://schemas.openxmlformats.org/presentationml/2006/main">
+  <p:cSld>
+    <p:spTree>
+      <p:nvGrpSpPr>
+        <p:cNvPr id="1" name=""/>
+        <p:cNvGrpSpPr/>
+        <p:nvPr/>
+      </p:nvGrpSpPr>
+      <p:grpSpPr>
+        <a:xfrm>
+          <a:off x="0" y="0"/>
+          <a:ext cx="0" cy="0"/>
+          <a:chOff x="0" y="0"/>
+          <a:chExt cx="0" cy="0"/>
+        </a:xfrm>
+      </p:grpSpPr>
+      <p:sp>
+        <p:nvSpPr>
+          <p:cNvPr id="2" name="Title 1"/>
+          <p:cNvSpPr>
+            <a:spLocks noGrp="1"/>
+          </p:cNvSpPr>
+          <p:nvPr>
+            <p:ph type="title"/>
+          </p:nvPr>
+        </p:nvSpPr>
+        <p:spPr>
+          <a:solidFill>
+            <a:srgbClr val="558ED5"/>
+          </a:solidFill>
+        </p:spPr>
+        <p:txBody>
+          <a:bodyPr>
+            <a:normAutofit/>
+          </a:bodyPr>
+          <a:lstStyle/>
+          <a:p>
+            <a:r>
+              <a:rPr lang="en-US" sz="3700" b="1" dirty="0">
+                <a:solidFill>
+                  <a:schemeClr val="bg1"/>
+                </a:solidFill>
+                <a:latin typeface="Times New Roman" pitchFamily="18" charset="0"/>
+                <a:cs typeface="Times New Roman" pitchFamily="18" charset="0"/>
+              </a:rPr>
+              <a:t>REFERENCES (CONTD</a:t>
+            </a:r>
+            <a:r>
+              <a:rPr lang="en-US" sz="3700" b="1" dirty="0" smtClean="0">
+                <a:solidFill>
+                  <a:schemeClr val="bg1"/>
+                </a:solidFill>
+                <a:latin typeface="Times New Roman" pitchFamily="18" charset="0"/>
+                <a:cs typeface="Times New Roman" pitchFamily="18" charset="0"/>
+              </a:rPr>
+              <a:t>..)</a:t>
+            </a:r>
+            <a:endParaRPr lang="en-US" sz="3700" b="1" dirty="0">
+              <a:solidFill>
+                <a:schemeClr val="bg1"/>
+              </a:solidFill>
+              <a:latin typeface="Times New Roman" pitchFamily="18" charset="0"/>
+              <a:cs typeface="Times New Roman" pitchFamily="18" charset="0"/>
+            </a:endParaRPr>
+          </a:p>
+        </p:txBody>
+      </p:sp>
+      <p:sp>
+        <p:nvSpPr>
+          <p:cNvPr id="4" name="Slide Number Placeholder 3"/>
+          <p:cNvSpPr>
+            <a:spLocks noGrp="1"/>
+          </p:cNvSpPr>
+          <p:nvPr>
+            <p:ph type="sldNum" sz="quarter" idx="12"/>
+          </p:nvPr>
+        </p:nvSpPr>
+        <p:spPr/>
+        <p:txBody>
+          <a:bodyPr/>
+          <a:lstStyle/>
+          <a:p>
+            <a:fld id="{C02A2637-A5A3-49FA-B214-6E67543099EF}" type="slidenum">
+              <a:rPr lang="en-US" smtClean="0"/>
+              <a:t>21</a:t>
+            </a:fld>
+            <a:endParaRPr lang="en-US" dirty="0"/>
+          </a:p>
+        </p:txBody>
+      </p:sp>
+      <p:sp>
+        <p:nvSpPr>
+          <p:cNvPr id="3" name="Rectangle 2"/>
+          <p:cNvSpPr/>
+          <p:nvPr/>
+        </p:nvSpPr>
+        <p:spPr>
+          <a:xfrm>
+            <a:off x="640080" y="1812175"/>
+            <a:ext cx="11521440" cy="5401479"/>
+          </a:xfrm>
+          <a:prstGeom prst="rect">
+            <a:avLst/>
+          </a:prstGeom>
+        </p:spPr>
+        <p:txBody>
+          <a:bodyPr wrap="square">
+            <a:spAutoFit/>
+          </a:bodyPr>
+          <a:lstStyle/>
+          <a:p>
+            <a:pPr marL="342900" indent="-342900">
+              <a:buFont typeface="Arial" panose="020B0604020202020204" pitchFamily="34" charset="0"/>
+              <a:buChar char="•"/>
+            </a:pPr>
+            <a:r>
+              <a:rPr lang="en-IN" b="1" dirty="0" err="1">
+                <a:latin typeface="Times New Roman" panose="02020603050405020304" pitchFamily="18" charset="0"/>
+                <a:cs typeface="Times New Roman" panose="02020603050405020304" pitchFamily="18" charset="0"/>
+              </a:rPr>
+              <a:t>LaMontagne</a:t>
+            </a:r>
+            <a:r>
+              <a:rPr lang="en-IN" b="1" dirty="0">
+                <a:latin typeface="Times New Roman" panose="02020603050405020304" pitchFamily="18" charset="0"/>
+                <a:cs typeface="Times New Roman" panose="02020603050405020304" pitchFamily="18" charset="0"/>
+              </a:rPr>
+              <a:t>, P. J., et al. (2018).</a:t>
+            </a:r>
+            <a:r>
+              <a:rPr lang="en-IN" dirty="0">
+                <a:latin typeface="Times New Roman" panose="02020603050405020304" pitchFamily="18" charset="0"/>
+                <a:cs typeface="Times New Roman" panose="02020603050405020304" pitchFamily="18" charset="0"/>
+              </a:rPr>
+              <a:t> OASIS-3: Longitudinal neuroimaging, clinical, and cognitive dataset for normal aging and Alzheimer’s disease. </a:t>
+            </a:r>
+            <a:r>
+              <a:rPr lang="en-IN" i="1" dirty="0">
+                <a:latin typeface="Times New Roman" panose="02020603050405020304" pitchFamily="18" charset="0"/>
+                <a:cs typeface="Times New Roman" panose="02020603050405020304" pitchFamily="18" charset="0"/>
+              </a:rPr>
+              <a:t>Alzheimer’s &amp; Dementia</a:t>
+            </a:r>
+            <a:r>
+              <a:rPr lang="en-IN" dirty="0">
+                <a:latin typeface="Times New Roman" panose="02020603050405020304" pitchFamily="18" charset="0"/>
+                <a:cs typeface="Times New Roman" panose="02020603050405020304" pitchFamily="18" charset="0"/>
+              </a:rPr>
+              <a:t>. </a:t>
+            </a:r>
+            <a:r>
+              <a:rPr lang="en-IN" dirty="0">
+                <a:latin typeface="Times New Roman" panose="02020603050405020304" pitchFamily="18" charset="0"/>
+                <a:cs typeface="Times New Roman" panose="02020603050405020304" pitchFamily="18" charset="0"/>
+                <a:hlinkClick r:id="rId2"/>
+              </a:rPr>
+              <a:t>https://</a:t>
+            </a:r>
+            <a:r>
+              <a:rPr lang="en-IN" dirty="0" smtClean="0">
+                <a:latin typeface="Times New Roman" panose="02020603050405020304" pitchFamily="18" charset="0"/>
+                <a:cs typeface="Times New Roman" panose="02020603050405020304" pitchFamily="18" charset="0"/>
+                <a:hlinkClick r:id="rId2"/>
+              </a:rPr>
+              <a:t>doi.org/10.1016/j.jalz.2018.06.2231</a:t>
+            </a:r>
+            <a:r>
+              <a:rPr lang="en-IN" dirty="0" smtClean="0">
+                <a:latin typeface="Times New Roman" panose="02020603050405020304" pitchFamily="18" charset="0"/>
+                <a:cs typeface="Times New Roman" panose="02020603050405020304" pitchFamily="18" charset="0"/>
+              </a:rPr>
+              <a:t/>
+            </a:r>
+            <a:br>
+              <a:rPr lang="en-IN" dirty="0" smtClean="0">
+                <a:latin typeface="Times New Roman" panose="02020603050405020304" pitchFamily="18" charset="0"/>
+                <a:cs typeface="Times New Roman" panose="02020603050405020304" pitchFamily="18" charset="0"/>
+              </a:rPr>
+            </a:br>
+            <a:endParaRPr lang="en-IN" dirty="0" smtClean="0">
+              <a:latin typeface="Times New Roman" panose="02020603050405020304" pitchFamily="18" charset="0"/>
+              <a:cs typeface="Times New Roman" panose="02020603050405020304" pitchFamily="18" charset="0"/>
+            </a:endParaRPr>
+          </a:p>
+          <a:p>
+            <a:pPr marL="342900" indent="-342900">
+              <a:buFont typeface="Arial" panose="020B0604020202020204" pitchFamily="34" charset="0"/>
+              <a:buChar char="•"/>
+            </a:pPr>
+            <a:r>
+              <a:rPr lang="en-IN" b="1" dirty="0">
+                <a:latin typeface="Times New Roman" panose="02020603050405020304" pitchFamily="18" charset="0"/>
+                <a:cs typeface="Times New Roman" panose="02020603050405020304" pitchFamily="18" charset="0"/>
+              </a:rPr>
+              <a:t>Wang, D., Florian, H., Lynch, S. Y., et al. (2025).</a:t>
+            </a:r>
+            <a:r>
+              <a:rPr lang="en-IN" dirty="0">
+                <a:latin typeface="Times New Roman" panose="02020603050405020304" pitchFamily="18" charset="0"/>
+                <a:cs typeface="Times New Roman" panose="02020603050405020304" pitchFamily="18" charset="0"/>
+              </a:rPr>
+              <a:t> Assessment of AI-generated digital twin methodology on reduction of treatment effect variance and potential clinical trial sample size saving using a Phase 2 trial dataset from patients with Alzheimer’s disease. </a:t>
+            </a:r>
+            <a:r>
+              <a:rPr lang="en-IN" i="1" dirty="0">
+                <a:latin typeface="Times New Roman" panose="02020603050405020304" pitchFamily="18" charset="0"/>
+                <a:cs typeface="Times New Roman" panose="02020603050405020304" pitchFamily="18" charset="0"/>
+              </a:rPr>
+              <a:t>Alzheimer’s &amp; Dementia</a:t>
+            </a:r>
+            <a:r>
+              <a:rPr lang="en-IN" dirty="0">
+                <a:latin typeface="Times New Roman" panose="02020603050405020304" pitchFamily="18" charset="0"/>
+                <a:cs typeface="Times New Roman" panose="02020603050405020304" pitchFamily="18" charset="0"/>
+              </a:rPr>
+              <a:t>. </a:t>
+            </a:r>
+            <a:r>
+              <a:rPr lang="en-IN" dirty="0">
+                <a:latin typeface="Times New Roman" panose="02020603050405020304" pitchFamily="18" charset="0"/>
+                <a:cs typeface="Times New Roman" panose="02020603050405020304" pitchFamily="18" charset="0"/>
+                <a:hlinkClick r:id="rId3"/>
+              </a:rPr>
+              <a:t>https://</a:t>
+            </a:r>
+            <a:r>
+              <a:rPr lang="en-IN" dirty="0" smtClean="0">
+                <a:latin typeface="Times New Roman" panose="02020603050405020304" pitchFamily="18" charset="0"/>
+                <a:cs typeface="Times New Roman" panose="02020603050405020304" pitchFamily="18" charset="0"/>
+                <a:hlinkClick r:id="rId3"/>
+              </a:rPr>
+              <a:t>doi.org/10.1002/alz.090685</a:t>
+            </a:r>
+            <a:endParaRPr lang="en-IN" dirty="0" smtClean="0">
+              <a:latin typeface="Times New Roman" panose="02020603050405020304" pitchFamily="18" charset="0"/>
+              <a:cs typeface="Times New Roman" panose="02020603050405020304" pitchFamily="18" charset="0"/>
+            </a:endParaRPr>
+          </a:p>
+          <a:p>
+            <a:endParaRPr lang="en-IN" dirty="0" smtClean="0">
+              <a:latin typeface="Times New Roman" panose="02020603050405020304" pitchFamily="18" charset="0"/>
+              <a:cs typeface="Times New Roman" panose="02020603050405020304" pitchFamily="18" charset="0"/>
+            </a:endParaRPr>
+          </a:p>
+          <a:p>
+            <a:pPr marL="342900" indent="-342900">
+              <a:buFont typeface="Arial" panose="020B0604020202020204" pitchFamily="34" charset="0"/>
+              <a:buChar char="•"/>
+            </a:pPr>
+            <a:r>
+              <a:rPr lang="en-IN" b="1" dirty="0">
+                <a:latin typeface="Times New Roman" panose="02020603050405020304" pitchFamily="18" charset="0"/>
+                <a:cs typeface="Times New Roman" panose="02020603050405020304" pitchFamily="18" charset="0"/>
+              </a:rPr>
+              <a:t>Huang, Y., Zhang, Y., </a:t>
+            </a:r>
+            <a:r>
+              <a:rPr lang="en-IN" b="1" dirty="0" err="1">
+                <a:latin typeface="Times New Roman" panose="02020603050405020304" pitchFamily="18" charset="0"/>
+                <a:cs typeface="Times New Roman" panose="02020603050405020304" pitchFamily="18" charset="0"/>
+              </a:rPr>
+              <a:t>Michopoulou</a:t>
+            </a:r>
+            <a:r>
+              <a:rPr lang="en-IN" b="1" dirty="0">
+                <a:latin typeface="Times New Roman" panose="02020603050405020304" pitchFamily="18" charset="0"/>
+                <a:cs typeface="Times New Roman" panose="02020603050405020304" pitchFamily="18" charset="0"/>
+              </a:rPr>
+              <a:t>, S., </a:t>
+            </a:r>
+            <a:r>
+              <a:rPr lang="en-IN" b="1" dirty="0" err="1">
+                <a:latin typeface="Times New Roman" panose="02020603050405020304" pitchFamily="18" charset="0"/>
+                <a:cs typeface="Times New Roman" panose="02020603050405020304" pitchFamily="18" charset="0"/>
+              </a:rPr>
+              <a:t>Kipps</a:t>
+            </a:r>
+            <a:r>
+              <a:rPr lang="en-IN" b="1" dirty="0">
+                <a:latin typeface="Times New Roman" panose="02020603050405020304" pitchFamily="18" charset="0"/>
+                <a:cs typeface="Times New Roman" panose="02020603050405020304" pitchFamily="18" charset="0"/>
+              </a:rPr>
+              <a:t>, C., &amp; Attar, R. (2026).</a:t>
+            </a:r>
+            <a:r>
+              <a:rPr lang="en-IN" dirty="0">
+                <a:latin typeface="Times New Roman" panose="02020603050405020304" pitchFamily="18" charset="0"/>
+                <a:cs typeface="Times New Roman" panose="02020603050405020304" pitchFamily="18" charset="0"/>
+              </a:rPr>
+              <a:t> Transition-based digital twin modelling for Alzheimer’s disease under sparse longitudinal data. </a:t>
+            </a:r>
+            <a:r>
+              <a:rPr lang="en-IN" i="1" dirty="0" err="1">
+                <a:latin typeface="Times New Roman" panose="02020603050405020304" pitchFamily="18" charset="0"/>
+                <a:cs typeface="Times New Roman" panose="02020603050405020304" pitchFamily="18" charset="0"/>
+              </a:rPr>
+              <a:t>arXiv</a:t>
+            </a:r>
+            <a:r>
+              <a:rPr lang="en-IN" i="1" dirty="0">
+                <a:latin typeface="Times New Roman" panose="02020603050405020304" pitchFamily="18" charset="0"/>
+                <a:cs typeface="Times New Roman" panose="02020603050405020304" pitchFamily="18" charset="0"/>
+              </a:rPr>
+              <a:t> preprint</a:t>
+            </a:r>
+            <a:r>
+              <a:rPr lang="en-IN" dirty="0">
+                <a:latin typeface="Times New Roman" panose="02020603050405020304" pitchFamily="18" charset="0"/>
+                <a:cs typeface="Times New Roman" panose="02020603050405020304" pitchFamily="18" charset="0"/>
+              </a:rPr>
+              <a:t>.</a:t>
+            </a:r>
+            <a:br>
+              <a:rPr lang="en-IN" dirty="0">
+                <a:latin typeface="Times New Roman" panose="02020603050405020304" pitchFamily="18" charset="0"/>
+                <a:cs typeface="Times New Roman" panose="02020603050405020304" pitchFamily="18" charset="0"/>
+              </a:rPr>
+            </a:br>
+            <a:r>
+              <a:rPr lang="en-IN" dirty="0" smtClean="0">
+                <a:latin typeface="Times New Roman" panose="02020603050405020304" pitchFamily="18" charset="0"/>
+                <a:cs typeface="Times New Roman" panose="02020603050405020304" pitchFamily="18" charset="0"/>
+              </a:rPr>
+              <a:t/>
+            </a:r>
+            <a:br>
+              <a:rPr lang="en-IN" dirty="0" smtClean="0">
+                <a:latin typeface="Times New Roman" panose="02020603050405020304" pitchFamily="18" charset="0"/>
+                <a:cs typeface="Times New Roman" panose="02020603050405020304" pitchFamily="18" charset="0"/>
+              </a:rPr>
+            </a:br>
+            <a:r>
+              <a:rPr lang="en-IN" dirty="0" smtClean="0">
+                <a:solidFill>
+                  <a:srgbClr val="222222"/>
+                </a:solidFill>
+                <a:latin typeface="Times New Roman" panose="02020603050405020304" pitchFamily="18" charset="0"/>
+                <a:cs typeface="Times New Roman" panose="02020603050405020304" pitchFamily="18" charset="0"/>
+              </a:rPr>
+              <a:t/>
+            </a:r>
+            <a:br>
+              <a:rPr lang="en-IN" dirty="0" smtClean="0">
+                <a:solidFill>
+                  <a:srgbClr val="222222"/>
+                </a:solidFill>
+                <a:latin typeface="Times New Roman" panose="02020603050405020304" pitchFamily="18" charset="0"/>
+                <a:cs typeface="Times New Roman" panose="02020603050405020304" pitchFamily="18" charset="0"/>
+              </a:rPr>
+            </a:br>
+            <a:r>
+              <a:rPr lang="en-IN" dirty="0" smtClean="0">
+                <a:solidFill>
+                  <a:srgbClr val="222222"/>
+                </a:solidFill>
+                <a:latin typeface="Times New Roman" panose="02020603050405020304" pitchFamily="18" charset="0"/>
+                <a:cs typeface="Times New Roman" panose="02020603050405020304" pitchFamily="18" charset="0"/>
+              </a:rPr>
+              <a:t/>
+            </a:r>
+            <a:br>
+              <a:rPr lang="en-IN" dirty="0" smtClean="0">
+                <a:solidFill>
+                  <a:srgbClr val="222222"/>
+                </a:solidFill>
+                <a:latin typeface="Times New Roman" panose="02020603050405020304" pitchFamily="18" charset="0"/>
+                <a:cs typeface="Times New Roman" panose="02020603050405020304" pitchFamily="18" charset="0"/>
+              </a:rPr>
+            </a:br>
+            <a:endParaRPr lang="en-IN" dirty="0">
+              <a:latin typeface="Times New Roman" panose="02020603050405020304" pitchFamily="18" charset="0"/>
+              <a:cs typeface="Times New Roman" panose="02020603050405020304" pitchFamily="18" charset="0"/>
+            </a:endParaRPr>
+          </a:p>
+        </p:txBody>
+      </p:sp>
+    </p:spTree>
+    <p:extLst>
+      <p:ext uri="{BB962C8B-B14F-4D97-AF65-F5344CB8AC3E}">
+        <p14:creationId xmlns:p14="http://schemas.microsoft.com/office/powerpoint/2010/main" val="1268385975"/>
+      </p:ext>
+    </p:extLst>
+  </p:cSld>
+  <p:clrMapOvr>
+    <a:masterClrMapping/>
+  </p:clrMapOvr>
+  <p:timing>
+    <p:tnLst>
+      <p:par>
+        <p:cTn id="1" dur="indefinite" restart="never" nodeType="tmRoot"/>
+      </p:par>
+    </p:tnLst>
+  </p:timing>
+</p:sld>
+</file>
+
+<file path=ppt/slides/slide22.xml><?xml version="1.0" encoding="utf-8"?>
+<p:sld xmlns:a="http://schemas.openxmlformats.org/drawingml/2006/main" xmlns:r="http://schemas.openxmlformats.org/officeDocument/2006/relationships" xmlns:p="http://schemas.openxmlformats.org/presentationml/2006/main">
+  <p:cSld>
+    <p:spTree>
+      <p:nvGrpSpPr>
+        <p:cNvPr id="1" name=""/>
+        <p:cNvGrpSpPr/>
+        <p:nvPr/>
+      </p:nvGrpSpPr>
+      <p:grpSpPr>
+        <a:xfrm>
+          <a:off x="0" y="0"/>
+          <a:ext cx="0" cy="0"/>
+          <a:chOff x="0" y="0"/>
+          <a:chExt cx="0" cy="0"/>
+        </a:xfrm>
+      </p:grpSpPr>
+      <p:sp>
+        <p:nvSpPr>
+          <p:cNvPr id="2" name="Title 1"/>
+          <p:cNvSpPr>
+            <a:spLocks noGrp="1"/>
+          </p:cNvSpPr>
+          <p:nvPr>
+            <p:ph type="title"/>
+          </p:nvPr>
+        </p:nvSpPr>
+        <p:spPr>
+          <a:xfrm>
+            <a:off x="640080" y="2819401"/>
+            <a:ext cx="11521440" cy="1219200"/>
+          </a:xfrm>
+        </p:spPr>
+        <p:txBody>
+          <a:bodyPr>
+            <a:normAutofit fontScale="90000"/>
+          </a:bodyPr>
+          <a:lstStyle/>
+          <a:p>
+            <a:r>
+              <a:rPr lang="en-US" sz="10000" b="1" dirty="0">
+                <a:solidFill>
+                  <a:schemeClr val="tx2">
+                    <a:lumMod val="60000"/>
+                    <a:lumOff val="40000"/>
+                  </a:schemeClr>
+                </a:solidFill>
+                <a:latin typeface="Times New Roman" pitchFamily="18" charset="0"/>
+                <a:cs typeface="Times New Roman" pitchFamily="18" charset="0"/>
+              </a:rPr>
+              <a:t>Thank You</a:t>
+            </a:r>
+          </a:p>
+        </p:txBody>
+      </p:sp>
+      <p:sp>
+        <p:nvSpPr>
+          <p:cNvPr id="3" name="Slide Number Placeholder 2"/>
+          <p:cNvSpPr>
+            <a:spLocks noGrp="1"/>
+          </p:cNvSpPr>
+          <p:nvPr>
+            <p:ph type="sldNum" sz="quarter" idx="12"/>
+          </p:nvPr>
+        </p:nvSpPr>
+        <p:spPr/>
+        <p:txBody>
+          <a:bodyPr/>
+          <a:lstStyle/>
+          <a:p>
+            <a:fld id="{C02A2637-A5A3-49FA-B214-6E67543099EF}" type="slidenum">
+              <a:rPr lang="en-US" smtClean="0"/>
+              <a:t>22</a:t>
+            </a:fld>
+            <a:endParaRPr lang="en-US"/>
+          </a:p>
+        </p:txBody>
+      </p:sp>
+    </p:spTree>
+    <p:extLst>
+      <p:ext uri="{BB962C8B-B14F-4D97-AF65-F5344CB8AC3E}">
+        <p14:creationId xmlns:p14="http://schemas.microsoft.com/office/powerpoint/2010/main" val="2750398038"/>
       </p:ext>
     </p:extLst>
   </p:cSld>
@@ -14070,17 +17893,7 @@
                 <a:latin typeface="Times New Roman" pitchFamily="18" charset="0"/>
                 <a:cs typeface="Times New Roman" pitchFamily="18" charset="0"/>
               </a:rPr>
-              <a:t>. </a:t>
-            </a:r>
-            <a:r>
-              <a:rPr lang="en-US" sz="3700" b="1" dirty="0" smtClean="0">
-                <a:solidFill>
-                  <a:schemeClr val="bg1"/>
-                </a:solidFill>
-                <a:latin typeface="Times New Roman" pitchFamily="18" charset="0"/>
-                <a:cs typeface="Times New Roman" pitchFamily="18" charset="0"/>
-              </a:rPr>
-              <a:t>OBJECTIVES</a:t>
+              <a:t>. OBJECTIVES</a:t>
             </a:r>
             <a:endParaRPr lang="en-US" sz="3700" b="1" dirty="0">
               <a:solidFill>
